--- a/python-course-ppt/逐节课件/Python讲授课件-单元05.pptx
+++ b/python-course-ppt/逐节课件/Python讲授课件-单元05.pptx
@@ -236,1260 +236,6 @@
     </a:lvl9pPr>
   </p:notesStyle>
 </p:notesMaster>
-</file>
-
-<file path=ppt/notesSlides/notesSlide1.xml><?xml version="1.0" encoding="utf-8"?>
-<p:notes xmlns:a="http://schemas.openxmlformats.org/drawingml/2006/main" xmlns:p="http://schemas.openxmlformats.org/presentationml/2006/main" xmlns:r="http://schemas.openxmlformats.org/officeDocument/2006/relationships">
-  <p:cSld>
-    <p:spTree>
-      <p:nvGrpSpPr>
-        <p:cNvPr id="1" name=""/>
-        <p:cNvGrpSpPr/>
-        <p:nvPr/>
-      </p:nvGrpSpPr>
-      <p:grpSpPr>
-        <a:xfrm>
-          <a:off x="0" y="0"/>
-          <a:ext cx="0" cy="0"/>
-          <a:chOff x="0" y="0"/>
-          <a:chExt cx="0" cy="0"/>
-        </a:xfrm>
-      </p:grpSpPr>
-      <p:sp>
-        <p:nvSpPr>
-          <p:cNvPr id="2" name="讲课提示"/>
-          <p:cNvSpPr txBox="1"/>
-          <p:nvPr/>
-        </p:nvSpPr>
-        <p:spPr>
-          <a:xfrm>
-            <a:off x="457200" y="457200"/>
-            <a:ext cx="6858000" cy="4800600"/>
-          </a:xfrm>
-          <a:prstGeom prst="rect">
-            <a:avLst/>
-          </a:prstGeom>
-        </p:spPr>
-        <p:txBody>
-          <a:bodyPr wrap="square"/>
-          <a:lstStyle/>
-          <a:p>
-            <a:r>
-              <a:rPr lang="zh-CN" dirty="0"/>
-              <a:t>单元 5 · 单元 5 · 字典</a:t>
-            </a:r>
-          </a:p>
-          <a:p>
-            <a:r>
-              <a:rPr lang="zh-CN" dirty="0"/>
-              <a:t/>
-            </a:r>
-          </a:p>
-          <a:p>
-            <a:r>
-              <a:rPr lang="zh-CN" dirty="0"/>
-              <a:t>本单元包含以下课节：</a:t>
-            </a:r>
-          </a:p>
-          <a:p>
-            <a:r>
-              <a:rPr lang="zh-CN" dirty="0"/>
-              <a:t>· 第 23 节 字典：按名字找数据</a:t>
-            </a:r>
-          </a:p>
-          <a:p>
-            <a:r>
-              <a:rPr lang="zh-CN" dirty="0"/>
-              <a:t>· 第 24 节 三种遍历与 get() 安全取值</a:t>
-            </a:r>
-          </a:p>
-          <a:p>
-            <a:r>
-              <a:rPr lang="zh-CN" dirty="0"/>
-              <a:t>· 第 25 节 遍历时修改与嵌套结构</a:t>
-            </a:r>
-          </a:p>
-          <a:p>
-            <a:r>
-              <a:rPr lang="zh-CN" dirty="0"/>
-              <a:t>· 第 26 节 动手实战与答案讲评</a:t>
-            </a:r>
-          </a:p>
-          <a:p>
-            <a:r>
-              <a:rPr lang="zh-CN" dirty="0"/>
-              <a:t>· 第 27 节 单元 5 验收复盘</a:t>
-            </a:r>
-          </a:p>
-          <a:p>
-            <a:r>
-              <a:rPr lang="zh-CN" dirty="0"/>
-              <a:t/>
-            </a:r>
-          </a:p>
-          <a:p>
-            <a:r>
-              <a:rPr lang="zh-CN" dirty="0"/>
-              <a:t>开场用 3 分钟讲清：这个单元学完能做出什么，最后会被关卡怎么验。</a:t>
-            </a:r>
-          </a:p>
-        </p:txBody>
-      </p:sp>
-    </p:spTree>
-  </p:cSld>
-  <p:clrMapOvr>
-    <a:masterClrMapping/>
-  </p:clrMapOvr>
-</p:notes>
-</file>
-
-<file path=ppt/notesSlides/notesSlide10.xml><?xml version="1.0" encoding="utf-8"?>
-<p:notes xmlns:a="http://schemas.openxmlformats.org/drawingml/2006/main" xmlns:p="http://schemas.openxmlformats.org/presentationml/2006/main" xmlns:r="http://schemas.openxmlformats.org/officeDocument/2006/relationships">
-  <p:cSld>
-    <p:spTree>
-      <p:nvGrpSpPr>
-        <p:cNvPr id="1" name=""/>
-        <p:cNvGrpSpPr/>
-        <p:nvPr/>
-      </p:nvGrpSpPr>
-      <p:grpSpPr>
-        <a:xfrm>
-          <a:off x="0" y="0"/>
-          <a:ext cx="0" cy="0"/>
-          <a:chOff x="0" y="0"/>
-          <a:chExt cx="0" cy="0"/>
-        </a:xfrm>
-      </p:grpSpPr>
-      <p:sp>
-        <p:nvSpPr>
-          <p:cNvPr id="2" name="讲课提示"/>
-          <p:cNvSpPr txBox="1"/>
-          <p:nvPr/>
-        </p:nvSpPr>
-        <p:spPr>
-          <a:xfrm>
-            <a:off x="457200" y="457200"/>
-            <a:ext cx="6858000" cy="4800600"/>
-          </a:xfrm>
-          <a:prstGeom prst="rect">
-            <a:avLst/>
-          </a:prstGeom>
-        </p:spPr>
-        <p:txBody>
-          <a:bodyPr wrap="square"/>
-          <a:lstStyle/>
-          <a:p>
-            <a:r>
-              <a:rPr lang="zh-CN" dirty="0"/>
-              <a:t>第 27 节 · 单元 5 验收复盘</a:t>
-            </a:r>
-          </a:p>
-          <a:p>
-            <a:r>
-              <a:rPr lang="zh-CN" dirty="0"/>
-              <a:t>单元 5 · 字典 · W5</a:t>
-            </a:r>
-          </a:p>
-          <a:p>
-            <a:r>
-              <a:rPr lang="zh-CN" dirty="0"/>
-              <a:t/>
-            </a:r>
-          </a:p>
-          <a:p>
-            <a:r>
-              <a:rPr lang="zh-CN" dirty="0"/>
-              <a:t>学习目标：确认字典增删改查、三种遍历、嵌套都过关</a:t>
-            </a:r>
-          </a:p>
-          <a:p>
-            <a:r>
-              <a:rPr lang="zh-CN" dirty="0"/>
-              <a:t/>
-            </a:r>
-          </a:p>
-          <a:p>
-            <a:r>
-              <a:rPr lang="zh-CN" dirty="0"/>
-              <a:t>课堂实操（40 分钟，不看答案）：</a:t>
-            </a:r>
-          </a:p>
-          <a:p>
-            <a:r>
-              <a:rPr lang="zh-CN" dirty="0"/>
-              <a:t>· 逐条打勾验收自测</a:t>
-            </a:r>
-          </a:p>
-          <a:p>
-            <a:r>
-              <a:rPr lang="zh-CN" dirty="0"/>
-              <a:t>· 现场演示嵌套数据的提取</a:t>
-            </a:r>
-          </a:p>
-          <a:p>
-            <a:r>
-              <a:rPr lang="zh-CN" dirty="0"/>
-              <a:t/>
-            </a:r>
-          </a:p>
-          <a:p>
-            <a:r>
-              <a:rPr lang="zh-CN" dirty="0"/>
-              <a:t>课后作业：</a:t>
-            </a:r>
-          </a:p>
-          <a:p>
-            <a:r>
-              <a:rPr lang="zh-CN" dirty="0"/>
-              <a:t>· 完成本单元小结与产出检查</a:t>
-            </a:r>
-          </a:p>
-          <a:p>
-            <a:r>
-              <a:rPr lang="zh-CN" dirty="0"/>
-              <a:t/>
-            </a:r>
-          </a:p>
-          <a:p>
-            <a:r>
-              <a:rPr lang="zh-CN" dirty="0"/>
-              <a:t>节奏：讲 20 分钟 → 学员自己敲 40 分钟（不看答案）→ 对讲评自查 20 分钟 → 写作业 10 分钟。</a:t>
-            </a:r>
-          </a:p>
-        </p:txBody>
-      </p:sp>
-    </p:spTree>
-  </p:cSld>
-  <p:clrMapOvr>
-    <a:masterClrMapping/>
-  </p:clrMapOvr>
-</p:notes>
-</file>
-
-<file path=ppt/notesSlides/notesSlide11.xml><?xml version="1.0" encoding="utf-8"?>
-<p:notes xmlns:a="http://schemas.openxmlformats.org/drawingml/2006/main" xmlns:p="http://schemas.openxmlformats.org/presentationml/2006/main" xmlns:r="http://schemas.openxmlformats.org/officeDocument/2006/relationships">
-  <p:cSld>
-    <p:spTree>
-      <p:nvGrpSpPr>
-        <p:cNvPr id="1" name=""/>
-        <p:cNvGrpSpPr/>
-        <p:nvPr/>
-      </p:nvGrpSpPr>
-      <p:grpSpPr>
-        <a:xfrm>
-          <a:off x="0" y="0"/>
-          <a:ext cx="0" cy="0"/>
-          <a:chOff x="0" y="0"/>
-          <a:chExt cx="0" cy="0"/>
-        </a:xfrm>
-      </p:grpSpPr>
-      <p:sp>
-        <p:nvSpPr>
-          <p:cNvPr id="2" name="讲课提示"/>
-          <p:cNvSpPr txBox="1"/>
-          <p:nvPr/>
-        </p:nvSpPr>
-        <p:spPr>
-          <a:xfrm>
-            <a:off x="457200" y="457200"/>
-            <a:ext cx="6858000" cy="4800600"/>
-          </a:xfrm>
-          <a:prstGeom prst="rect">
-            <a:avLst/>
-          </a:prstGeom>
-        </p:spPr>
-        <p:txBody>
-          <a:bodyPr wrap="square"/>
-          <a:lstStyle/>
-          <a:p>
-            <a:r>
-              <a:rPr lang="zh-CN" dirty="0"/>
-              <a:t>第 27 节 · 核心知识点：单元 5 验收复盘</a:t>
-            </a:r>
-          </a:p>
-          <a:p>
-            <a:r>
-              <a:rPr lang="zh-CN" dirty="0"/>
-              <a:t/>
-            </a:r>
-          </a:p>
-          <a:p>
-            <a:r>
-              <a:rPr lang="zh-CN" dirty="0"/>
-              <a:t>讲这一页时：先让学生说出上节课的结论，再逐块讲要点。</a:t>
-            </a:r>
-          </a:p>
-          <a:p>
-            <a:r>
-              <a:rPr lang="zh-CN" dirty="0"/>
-              <a:t>每讲完一块，问一句「这一步如果写错了，报错会长什么样？」——把错误提前讲。</a:t>
-            </a:r>
-          </a:p>
-          <a:p>
-            <a:r>
-              <a:rPr lang="zh-CN" dirty="0"/>
-              <a:t/>
-            </a:r>
-          </a:p>
-          <a:p>
-            <a:r>
-              <a:rPr lang="zh-CN" dirty="0"/>
-              <a:t>本节目标：确认字典增删改查、三种遍历、嵌套都过关</a:t>
-            </a:r>
-          </a:p>
-          <a:p>
-            <a:r>
-              <a:rPr lang="zh-CN" dirty="0"/>
-              <a:t/>
-            </a:r>
-          </a:p>
-          <a:p>
-            <a:r>
-              <a:rPr lang="zh-CN" dirty="0"/>
-              <a:t>看不到懂的地方，回讲义对应小节读一遍，再回来对着这页复述一次——能讲出来才算真懂。</a:t>
-            </a:r>
-          </a:p>
-        </p:txBody>
-      </p:sp>
-    </p:spTree>
-  </p:cSld>
-  <p:clrMapOvr>
-    <a:masterClrMapping/>
-  </p:clrMapOvr>
-</p:notes>
-</file>
-
-<file path=ppt/notesSlides/notesSlide12.xml><?xml version="1.0" encoding="utf-8"?>
-<p:notes xmlns:a="http://schemas.openxmlformats.org/drawingml/2006/main" xmlns:p="http://schemas.openxmlformats.org/presentationml/2006/main" xmlns:r="http://schemas.openxmlformats.org/officeDocument/2006/relationships">
-  <p:cSld>
-    <p:spTree>
-      <p:nvGrpSpPr>
-        <p:cNvPr id="1" name=""/>
-        <p:cNvGrpSpPr/>
-        <p:nvPr/>
-      </p:nvGrpSpPr>
-      <p:grpSpPr>
-        <a:xfrm>
-          <a:off x="0" y="0"/>
-          <a:ext cx="0" cy="0"/>
-          <a:chOff x="0" y="0"/>
-          <a:chExt cx="0" cy="0"/>
-        </a:xfrm>
-      </p:grpSpPr>
-      <p:sp>
-        <p:nvSpPr>
-          <p:cNvPr id="2" name="讲课提示"/>
-          <p:cNvSpPr txBox="1"/>
-          <p:nvPr/>
-        </p:nvSpPr>
-        <p:spPr>
-          <a:xfrm>
-            <a:off x="457200" y="457200"/>
-            <a:ext cx="6858000" cy="4800600"/>
-          </a:xfrm>
-          <a:prstGeom prst="rect">
-            <a:avLst/>
-          </a:prstGeom>
-        </p:spPr>
-        <p:txBody>
-          <a:bodyPr wrap="square"/>
-          <a:lstStyle/>
-          <a:p>
-            <a:r>
-              <a:rPr lang="zh-CN" dirty="0"/>
-              <a:t>单元 5 小结 · 单元 5 · 小结</a:t>
-            </a:r>
-          </a:p>
-          <a:p>
-            <a:r>
-              <a:rPr lang="zh-CN" dirty="0"/>
-              <a:t/>
-            </a:r>
-          </a:p>
-          <a:p>
-            <a:r>
-              <a:rPr lang="zh-CN" dirty="0"/>
-              <a:t>收尾动作：让学生合上讲义，口述本单元三个最重要的结论；说不出来的，回对应课节。</a:t>
-            </a:r>
-          </a:p>
-          <a:p>
-            <a:r>
-              <a:rPr lang="zh-CN" dirty="0"/>
-              <a:t>然后当场勾一遍本单元课节的「已完成」，没打勾的进下一单元前补掉。</a:t>
-            </a:r>
-          </a:p>
-        </p:txBody>
-      </p:sp>
-    </p:spTree>
-  </p:cSld>
-  <p:clrMapOvr>
-    <a:masterClrMapping/>
-  </p:clrMapOvr>
-</p:notes>
-</file>
-
-<file path=ppt/notesSlides/notesSlide2.xml><?xml version="1.0" encoding="utf-8"?>
-<p:notes xmlns:a="http://schemas.openxmlformats.org/drawingml/2006/main" xmlns:p="http://schemas.openxmlformats.org/presentationml/2006/main" xmlns:r="http://schemas.openxmlformats.org/officeDocument/2006/relationships">
-  <p:cSld>
-    <p:spTree>
-      <p:nvGrpSpPr>
-        <p:cNvPr id="1" name=""/>
-        <p:cNvGrpSpPr/>
-        <p:nvPr/>
-      </p:nvGrpSpPr>
-      <p:grpSpPr>
-        <a:xfrm>
-          <a:off x="0" y="0"/>
-          <a:ext cx="0" cy="0"/>
-          <a:chOff x="0" y="0"/>
-          <a:chExt cx="0" cy="0"/>
-        </a:xfrm>
-      </p:grpSpPr>
-      <p:sp>
-        <p:nvSpPr>
-          <p:cNvPr id="2" name="讲课提示"/>
-          <p:cNvSpPr txBox="1"/>
-          <p:nvPr/>
-        </p:nvSpPr>
-        <p:spPr>
-          <a:xfrm>
-            <a:off x="457200" y="457200"/>
-            <a:ext cx="6858000" cy="4800600"/>
-          </a:xfrm>
-          <a:prstGeom prst="rect">
-            <a:avLst/>
-          </a:prstGeom>
-        </p:spPr>
-        <p:txBody>
-          <a:bodyPr wrap="square"/>
-          <a:lstStyle/>
-          <a:p>
-            <a:r>
-              <a:rPr lang="zh-CN" dirty="0"/>
-              <a:t>第 23 节 · 字典：按名字找数据</a:t>
-            </a:r>
-          </a:p>
-          <a:p>
-            <a:r>
-              <a:rPr lang="zh-CN" dirty="0"/>
-              <a:t>单元 5 · 字典 · W5</a:t>
-            </a:r>
-          </a:p>
-          <a:p>
-            <a:r>
-              <a:rPr lang="zh-CN" dirty="0"/>
-              <a:t/>
-            </a:r>
-          </a:p>
-          <a:p>
-            <a:r>
-              <a:rPr lang="zh-CN" dirty="0"/>
-              <a:t>学习目标：理解「列表按位置找、字典按名字找」，掌握键值对增删改</a:t>
-            </a:r>
-          </a:p>
-          <a:p>
-            <a:r>
-              <a:rPr lang="zh-CN" dirty="0"/>
-              <a:t/>
-            </a:r>
-          </a:p>
-          <a:p>
-            <a:r>
-              <a:rPr lang="zh-CN" dirty="0"/>
-              <a:t>课堂实操（40 分钟，不看答案）：</a:t>
-            </a:r>
-          </a:p>
-          <a:p>
-            <a:r>
-              <a:rPr lang="zh-CN" dirty="0"/>
-              <a:t>· 现场把一个列表版数据改成字典版</a:t>
-            </a:r>
-          </a:p>
-          <a:p>
-            <a:r>
-              <a:rPr lang="zh-CN" dirty="0"/>
-              <a:t>· 演示赋值的新增 vs 修改两种含义</a:t>
-            </a:r>
-          </a:p>
-          <a:p>
-            <a:r>
-              <a:rPr lang="zh-CN" dirty="0"/>
-              <a:t/>
-            </a:r>
-          </a:p>
-          <a:p>
-            <a:r>
-              <a:rPr lang="zh-CN" dirty="0"/>
-              <a:t>课后作业：</a:t>
-            </a:r>
-          </a:p>
-          <a:p>
-            <a:r>
-              <a:rPr lang="zh-CN" dirty="0"/>
-              <a:t>· 完成动手练习 5-1 ~ 5-3</a:t>
-            </a:r>
-          </a:p>
-          <a:p>
-            <a:r>
-              <a:rPr lang="zh-CN" dirty="0"/>
-              <a:t/>
-            </a:r>
-          </a:p>
-          <a:p>
-            <a:r>
-              <a:rPr lang="zh-CN" dirty="0"/>
-              <a:t>节奏：讲 20 分钟 → 学员自己敲 40 分钟（不看答案）→ 对讲评自查 20 分钟 → 写作业 10 分钟。</a:t>
-            </a:r>
-          </a:p>
-        </p:txBody>
-      </p:sp>
-    </p:spTree>
-  </p:cSld>
-  <p:clrMapOvr>
-    <a:masterClrMapping/>
-  </p:clrMapOvr>
-</p:notes>
-</file>
-
-<file path=ppt/notesSlides/notesSlide3.xml><?xml version="1.0" encoding="utf-8"?>
-<p:notes xmlns:a="http://schemas.openxmlformats.org/drawingml/2006/main" xmlns:p="http://schemas.openxmlformats.org/presentationml/2006/main" xmlns:r="http://schemas.openxmlformats.org/officeDocument/2006/relationships">
-  <p:cSld>
-    <p:spTree>
-      <p:nvGrpSpPr>
-        <p:cNvPr id="1" name=""/>
-        <p:cNvGrpSpPr/>
-        <p:nvPr/>
-      </p:nvGrpSpPr>
-      <p:grpSpPr>
-        <a:xfrm>
-          <a:off x="0" y="0"/>
-          <a:ext cx="0" cy="0"/>
-          <a:chOff x="0" y="0"/>
-          <a:chExt cx="0" cy="0"/>
-        </a:xfrm>
-      </p:grpSpPr>
-      <p:sp>
-        <p:nvSpPr>
-          <p:cNvPr id="2" name="讲课提示"/>
-          <p:cNvSpPr txBox="1"/>
-          <p:nvPr/>
-        </p:nvSpPr>
-        <p:spPr>
-          <a:xfrm>
-            <a:off x="457200" y="457200"/>
-            <a:ext cx="6858000" cy="4800600"/>
-          </a:xfrm>
-          <a:prstGeom prst="rect">
-            <a:avLst/>
-          </a:prstGeom>
-        </p:spPr>
-        <p:txBody>
-          <a:bodyPr wrap="square"/>
-          <a:lstStyle/>
-          <a:p>
-            <a:r>
-              <a:rPr lang="zh-CN" dirty="0"/>
-              <a:t>第 23 节 · 核心知识点：字典：按名字找数据</a:t>
-            </a:r>
-          </a:p>
-          <a:p>
-            <a:r>
-              <a:rPr lang="zh-CN" dirty="0"/>
-              <a:t/>
-            </a:r>
-          </a:p>
-          <a:p>
-            <a:r>
-              <a:rPr lang="zh-CN" dirty="0"/>
-              <a:t>讲这一页时：先让学生说出上节课的结论，再逐块讲要点。</a:t>
-            </a:r>
-          </a:p>
-          <a:p>
-            <a:r>
-              <a:rPr lang="zh-CN" dirty="0"/>
-              <a:t>每讲完一块，问一句「这一步如果写错了，报错会长什么样？」——把错误提前讲。</a:t>
-            </a:r>
-          </a:p>
-          <a:p>
-            <a:r>
-              <a:rPr lang="zh-CN" dirty="0"/>
-              <a:t/>
-            </a:r>
-          </a:p>
-          <a:p>
-            <a:r>
-              <a:rPr lang="zh-CN" dirty="0"/>
-              <a:t>本节目标：理解「列表按位置找、字典按名字找」，掌握键值对增删改</a:t>
-            </a:r>
-          </a:p>
-          <a:p>
-            <a:r>
-              <a:rPr lang="zh-CN" dirty="0"/>
-              <a:t/>
-            </a:r>
-          </a:p>
-          <a:p>
-            <a:r>
-              <a:rPr lang="zh-CN" dirty="0"/>
-              <a:t>看不到懂的地方，回讲义对应小节读一遍，再回来对着这页复述一次——能讲出来才算真懂。</a:t>
-            </a:r>
-          </a:p>
-        </p:txBody>
-      </p:sp>
-    </p:spTree>
-  </p:cSld>
-  <p:clrMapOvr>
-    <a:masterClrMapping/>
-  </p:clrMapOvr>
-</p:notes>
-</file>
-
-<file path=ppt/notesSlides/notesSlide4.xml><?xml version="1.0" encoding="utf-8"?>
-<p:notes xmlns:a="http://schemas.openxmlformats.org/drawingml/2006/main" xmlns:p="http://schemas.openxmlformats.org/presentationml/2006/main" xmlns:r="http://schemas.openxmlformats.org/officeDocument/2006/relationships">
-  <p:cSld>
-    <p:spTree>
-      <p:nvGrpSpPr>
-        <p:cNvPr id="1" name=""/>
-        <p:cNvGrpSpPr/>
-        <p:nvPr/>
-      </p:nvGrpSpPr>
-      <p:grpSpPr>
-        <a:xfrm>
-          <a:off x="0" y="0"/>
-          <a:ext cx="0" cy="0"/>
-          <a:chOff x="0" y="0"/>
-          <a:chExt cx="0" cy="0"/>
-        </a:xfrm>
-      </p:grpSpPr>
-      <p:sp>
-        <p:nvSpPr>
-          <p:cNvPr id="2" name="讲课提示"/>
-          <p:cNvSpPr txBox="1"/>
-          <p:nvPr/>
-        </p:nvSpPr>
-        <p:spPr>
-          <a:xfrm>
-            <a:off x="457200" y="457200"/>
-            <a:ext cx="6858000" cy="4800600"/>
-          </a:xfrm>
-          <a:prstGeom prst="rect">
-            <a:avLst/>
-          </a:prstGeom>
-        </p:spPr>
-        <p:txBody>
-          <a:bodyPr wrap="square"/>
-          <a:lstStyle/>
-          <a:p>
-            <a:r>
-              <a:rPr lang="zh-CN" dirty="0"/>
-              <a:t>第 24 节 · 三种遍历与 get() 安全取值</a:t>
-            </a:r>
-          </a:p>
-          <a:p>
-            <a:r>
-              <a:rPr lang="zh-CN" dirty="0"/>
-              <a:t>单元 5 · 字典 · W5</a:t>
-            </a:r>
-          </a:p>
-          <a:p>
-            <a:r>
-              <a:rPr lang="zh-CN" dirty="0"/>
-              <a:t/>
-            </a:r>
-          </a:p>
-          <a:p>
-            <a:r>
-              <a:rPr lang="zh-CN" dirty="0"/>
-              <a:t>学习目标：掌握 items / keys / values 三种遍历，知道 get() 为什么不崩</a:t>
-            </a:r>
-          </a:p>
-          <a:p>
-            <a:r>
-              <a:rPr lang="zh-CN" dirty="0"/>
-              <a:t/>
-            </a:r>
-          </a:p>
-          <a:p>
-            <a:r>
-              <a:rPr lang="zh-CN" dirty="0"/>
-              <a:t>课堂实操（40 分钟，不看答案）：</a:t>
-            </a:r>
-          </a:p>
-          <a:p>
-            <a:r>
-              <a:rPr lang="zh-CN" dirty="0"/>
-              <a:t>· 对同一字典用三种方式遍历并比较输出</a:t>
-            </a:r>
-          </a:p>
-          <a:p>
-            <a:r>
-              <a:rPr lang="zh-CN" dirty="0"/>
-              <a:t>· 故意用 [] 取不存在的键看 KeyError</a:t>
-            </a:r>
-          </a:p>
-          <a:p>
-            <a:r>
-              <a:rPr lang="zh-CN" dirty="0"/>
-              <a:t/>
-            </a:r>
-          </a:p>
-          <a:p>
-            <a:r>
-              <a:rPr lang="zh-CN" dirty="0"/>
-              <a:t>课后作业：</a:t>
-            </a:r>
-          </a:p>
-          <a:p>
-            <a:r>
-              <a:rPr lang="zh-CN" dirty="0"/>
-              <a:t>· 完成动手练习 5-4 ~ 5-6</a:t>
-            </a:r>
-          </a:p>
-          <a:p>
-            <a:r>
-              <a:rPr lang="zh-CN" dirty="0"/>
-              <a:t/>
-            </a:r>
-          </a:p>
-          <a:p>
-            <a:r>
-              <a:rPr lang="zh-CN" dirty="0"/>
-              <a:t>节奏：讲 20 分钟 → 学员自己敲 40 分钟（不看答案）→ 对讲评自查 20 分钟 → 写作业 10 分钟。</a:t>
-            </a:r>
-          </a:p>
-        </p:txBody>
-      </p:sp>
-    </p:spTree>
-  </p:cSld>
-  <p:clrMapOvr>
-    <a:masterClrMapping/>
-  </p:clrMapOvr>
-</p:notes>
-</file>
-
-<file path=ppt/notesSlides/notesSlide5.xml><?xml version="1.0" encoding="utf-8"?>
-<p:notes xmlns:a="http://schemas.openxmlformats.org/drawingml/2006/main" xmlns:p="http://schemas.openxmlformats.org/presentationml/2006/main" xmlns:r="http://schemas.openxmlformats.org/officeDocument/2006/relationships">
-  <p:cSld>
-    <p:spTree>
-      <p:nvGrpSpPr>
-        <p:cNvPr id="1" name=""/>
-        <p:cNvGrpSpPr/>
-        <p:nvPr/>
-      </p:nvGrpSpPr>
-      <p:grpSpPr>
-        <a:xfrm>
-          <a:off x="0" y="0"/>
-          <a:ext cx="0" cy="0"/>
-          <a:chOff x="0" y="0"/>
-          <a:chExt cx="0" cy="0"/>
-        </a:xfrm>
-      </p:grpSpPr>
-      <p:sp>
-        <p:nvSpPr>
-          <p:cNvPr id="2" name="讲课提示"/>
-          <p:cNvSpPr txBox="1"/>
-          <p:nvPr/>
-        </p:nvSpPr>
-        <p:spPr>
-          <a:xfrm>
-            <a:off x="457200" y="457200"/>
-            <a:ext cx="6858000" cy="4800600"/>
-          </a:xfrm>
-          <a:prstGeom prst="rect">
-            <a:avLst/>
-          </a:prstGeom>
-        </p:spPr>
-        <p:txBody>
-          <a:bodyPr wrap="square"/>
-          <a:lstStyle/>
-          <a:p>
-            <a:r>
-              <a:rPr lang="zh-CN" dirty="0"/>
-              <a:t>第 24 节 · 核心知识点：三种遍历与 get() 安全取值</a:t>
-            </a:r>
-          </a:p>
-          <a:p>
-            <a:r>
-              <a:rPr lang="zh-CN" dirty="0"/>
-              <a:t/>
-            </a:r>
-          </a:p>
-          <a:p>
-            <a:r>
-              <a:rPr lang="zh-CN" dirty="0"/>
-              <a:t>讲这一页时：先让学生说出上节课的结论，再逐块讲要点。</a:t>
-            </a:r>
-          </a:p>
-          <a:p>
-            <a:r>
-              <a:rPr lang="zh-CN" dirty="0"/>
-              <a:t>每讲完一块，问一句「这一步如果写错了，报错会长什么样？」——把错误提前讲。</a:t>
-            </a:r>
-          </a:p>
-          <a:p>
-            <a:r>
-              <a:rPr lang="zh-CN" dirty="0"/>
-              <a:t/>
-            </a:r>
-          </a:p>
-          <a:p>
-            <a:r>
-              <a:rPr lang="zh-CN" dirty="0"/>
-              <a:t>本节目标：掌握 items / keys / values 三种遍历，知道 get() 为什么不崩</a:t>
-            </a:r>
-          </a:p>
-          <a:p>
-            <a:r>
-              <a:rPr lang="zh-CN" dirty="0"/>
-              <a:t/>
-            </a:r>
-          </a:p>
-          <a:p>
-            <a:r>
-              <a:rPr lang="zh-CN" dirty="0"/>
-              <a:t>看不到懂的地方，回讲义对应小节读一遍，再回来对着这页复述一次——能讲出来才算真懂。</a:t>
-            </a:r>
-          </a:p>
-        </p:txBody>
-      </p:sp>
-    </p:spTree>
-  </p:cSld>
-  <p:clrMapOvr>
-    <a:masterClrMapping/>
-  </p:clrMapOvr>
-</p:notes>
-</file>
-
-<file path=ppt/notesSlides/notesSlide6.xml><?xml version="1.0" encoding="utf-8"?>
-<p:notes xmlns:a="http://schemas.openxmlformats.org/drawingml/2006/main" xmlns:p="http://schemas.openxmlformats.org/presentationml/2006/main" xmlns:r="http://schemas.openxmlformats.org/officeDocument/2006/relationships">
-  <p:cSld>
-    <p:spTree>
-      <p:nvGrpSpPr>
-        <p:cNvPr id="1" name=""/>
-        <p:cNvGrpSpPr/>
-        <p:nvPr/>
-      </p:nvGrpSpPr>
-      <p:grpSpPr>
-        <a:xfrm>
-          <a:off x="0" y="0"/>
-          <a:ext cx="0" cy="0"/>
-          <a:chOff x="0" y="0"/>
-          <a:chExt cx="0" cy="0"/>
-        </a:xfrm>
-      </p:grpSpPr>
-      <p:sp>
-        <p:nvSpPr>
-          <p:cNvPr id="2" name="讲课提示"/>
-          <p:cNvSpPr txBox="1"/>
-          <p:nvPr/>
-        </p:nvSpPr>
-        <p:spPr>
-          <a:xfrm>
-            <a:off x="457200" y="457200"/>
-            <a:ext cx="6858000" cy="4800600"/>
-          </a:xfrm>
-          <a:prstGeom prst="rect">
-            <a:avLst/>
-          </a:prstGeom>
-        </p:spPr>
-        <p:txBody>
-          <a:bodyPr wrap="square"/>
-          <a:lstStyle/>
-          <a:p>
-            <a:r>
-              <a:rPr lang="zh-CN" dirty="0"/>
-              <a:t>第 25 节 · 遍历时修改与嵌套结构</a:t>
-            </a:r>
-          </a:p>
-          <a:p>
-            <a:r>
-              <a:rPr lang="zh-CN" dirty="0"/>
-              <a:t>单元 5 · 字典 · W5</a:t>
-            </a:r>
-          </a:p>
-          <a:p>
-            <a:r>
-              <a:rPr lang="zh-CN" dirty="0"/>
-              <a:t/>
-            </a:r>
-          </a:p>
-          <a:p>
-            <a:r>
-              <a:rPr lang="zh-CN" dirty="0"/>
-              <a:t>学习目标：能处理嵌套结构，为后面学 JSON 打基础</a:t>
-            </a:r>
-          </a:p>
-          <a:p>
-            <a:r>
-              <a:rPr lang="zh-CN" dirty="0"/>
-              <a:t/>
-            </a:r>
-          </a:p>
-          <a:p>
-            <a:r>
-              <a:rPr lang="zh-CN" dirty="0"/>
-              <a:t>课堂实操（40 分钟，不看答案）：</a:t>
-            </a:r>
-          </a:p>
-          <a:p>
-            <a:r>
-              <a:rPr lang="zh-CN" dirty="0"/>
-              <a:t>· 现场把三层嵌套数据一层层打印出来</a:t>
-            </a:r>
-          </a:p>
-          <a:p>
-            <a:r>
-              <a:rPr lang="zh-CN" dirty="0"/>
-              <a:t>· 讨论：为什么 JSON 能被 Python 直接读</a:t>
-            </a:r>
-          </a:p>
-          <a:p>
-            <a:r>
-              <a:rPr lang="zh-CN" dirty="0"/>
-              <a:t/>
-            </a:r>
-          </a:p>
-          <a:p>
-            <a:r>
-              <a:rPr lang="zh-CN" dirty="0"/>
-              <a:t>课后作业：</a:t>
-            </a:r>
-          </a:p>
-          <a:p>
-            <a:r>
-              <a:rPr lang="zh-CN" dirty="0"/>
-              <a:t>· ★ 动手项目 6.1–6.3 生日调查</a:t>
-            </a:r>
-          </a:p>
-          <a:p>
-            <a:r>
-              <a:rPr lang="zh-CN" dirty="0"/>
-              <a:t/>
-            </a:r>
-          </a:p>
-          <a:p>
-            <a:r>
-              <a:rPr lang="zh-CN" dirty="0"/>
-              <a:t>节奏：讲 20 分钟 → 学员自己敲 40 分钟（不看答案）→ 对讲评自查 20 分钟 → 写作业 10 分钟。</a:t>
-            </a:r>
-          </a:p>
-        </p:txBody>
-      </p:sp>
-    </p:spTree>
-  </p:cSld>
-  <p:clrMapOvr>
-    <a:masterClrMapping/>
-  </p:clrMapOvr>
-</p:notes>
-</file>
-
-<file path=ppt/notesSlides/notesSlide7.xml><?xml version="1.0" encoding="utf-8"?>
-<p:notes xmlns:a="http://schemas.openxmlformats.org/drawingml/2006/main" xmlns:p="http://schemas.openxmlformats.org/presentationml/2006/main" xmlns:r="http://schemas.openxmlformats.org/officeDocument/2006/relationships">
-  <p:cSld>
-    <p:spTree>
-      <p:nvGrpSpPr>
-        <p:cNvPr id="1" name=""/>
-        <p:cNvGrpSpPr/>
-        <p:nvPr/>
-      </p:nvGrpSpPr>
-      <p:grpSpPr>
-        <a:xfrm>
-          <a:off x="0" y="0"/>
-          <a:ext cx="0" cy="0"/>
-          <a:chOff x="0" y="0"/>
-          <a:chExt cx="0" cy="0"/>
-        </a:xfrm>
-      </p:grpSpPr>
-      <p:sp>
-        <p:nvSpPr>
-          <p:cNvPr id="2" name="讲课提示"/>
-          <p:cNvSpPr txBox="1"/>
-          <p:nvPr/>
-        </p:nvSpPr>
-        <p:spPr>
-          <a:xfrm>
-            <a:off x="457200" y="457200"/>
-            <a:ext cx="6858000" cy="4800600"/>
-          </a:xfrm>
-          <a:prstGeom prst="rect">
-            <a:avLst/>
-          </a:prstGeom>
-        </p:spPr>
-        <p:txBody>
-          <a:bodyPr wrap="square"/>
-          <a:lstStyle/>
-          <a:p>
-            <a:r>
-              <a:rPr lang="zh-CN" dirty="0"/>
-              <a:t>第 25 节 · 核心知识点：遍历时修改与嵌套结构</a:t>
-            </a:r>
-          </a:p>
-          <a:p>
-            <a:r>
-              <a:rPr lang="zh-CN" dirty="0"/>
-              <a:t/>
-            </a:r>
-          </a:p>
-          <a:p>
-            <a:r>
-              <a:rPr lang="zh-CN" dirty="0"/>
-              <a:t>讲这一页时：先让学生说出上节课的结论，再逐块讲要点。</a:t>
-            </a:r>
-          </a:p>
-          <a:p>
-            <a:r>
-              <a:rPr lang="zh-CN" dirty="0"/>
-              <a:t>每讲完一块，问一句「这一步如果写错了，报错会长什么样？」——把错误提前讲。</a:t>
-            </a:r>
-          </a:p>
-          <a:p>
-            <a:r>
-              <a:rPr lang="zh-CN" dirty="0"/>
-              <a:t/>
-            </a:r>
-          </a:p>
-          <a:p>
-            <a:r>
-              <a:rPr lang="zh-CN" dirty="0"/>
-              <a:t>本节目标：能处理嵌套结构，为后面学 JSON 打基础</a:t>
-            </a:r>
-          </a:p>
-          <a:p>
-            <a:r>
-              <a:rPr lang="zh-CN" dirty="0"/>
-              <a:t/>
-            </a:r>
-          </a:p>
-          <a:p>
-            <a:r>
-              <a:rPr lang="zh-CN" dirty="0"/>
-              <a:t>看不到懂的地方，回讲义对应小节读一遍，再回来对着这页复述一次——能讲出来才算真懂。</a:t>
-            </a:r>
-          </a:p>
-        </p:txBody>
-      </p:sp>
-    </p:spTree>
-  </p:cSld>
-  <p:clrMapOvr>
-    <a:masterClrMapping/>
-  </p:clrMapOvr>
-</p:notes>
-</file>
-
-<file path=ppt/notesSlides/notesSlide8.xml><?xml version="1.0" encoding="utf-8"?>
-<p:notes xmlns:a="http://schemas.openxmlformats.org/drawingml/2006/main" xmlns:p="http://schemas.openxmlformats.org/presentationml/2006/main" xmlns:r="http://schemas.openxmlformats.org/officeDocument/2006/relationships">
-  <p:cSld>
-    <p:spTree>
-      <p:nvGrpSpPr>
-        <p:cNvPr id="1" name=""/>
-        <p:cNvGrpSpPr/>
-        <p:nvPr/>
-      </p:nvGrpSpPr>
-      <p:grpSpPr>
-        <a:xfrm>
-          <a:off x="0" y="0"/>
-          <a:ext cx="0" cy="0"/>
-          <a:chOff x="0" y="0"/>
-          <a:chExt cx="0" cy="0"/>
-        </a:xfrm>
-      </p:grpSpPr>
-      <p:sp>
-        <p:nvSpPr>
-          <p:cNvPr id="2" name="讲课提示"/>
-          <p:cNvSpPr txBox="1"/>
-          <p:nvPr/>
-        </p:nvSpPr>
-        <p:spPr>
-          <a:xfrm>
-            <a:off x="457200" y="457200"/>
-            <a:ext cx="6858000" cy="4800600"/>
-          </a:xfrm>
-          <a:prstGeom prst="rect">
-            <a:avLst/>
-          </a:prstGeom>
-        </p:spPr>
-        <p:txBody>
-          <a:bodyPr wrap="square"/>
-          <a:lstStyle/>
-          <a:p>
-            <a:r>
-              <a:rPr lang="zh-CN" dirty="0"/>
-              <a:t>第 26 节 · 动手实战与答案讲评</a:t>
-            </a:r>
-          </a:p>
-          <a:p>
-            <a:r>
-              <a:rPr lang="zh-CN" dirty="0"/>
-              <a:t>单元 5 · 字典 · W5</a:t>
-            </a:r>
-          </a:p>
-          <a:p>
-            <a:r>
-              <a:rPr lang="zh-CN" dirty="0"/>
-              <a:t/>
-            </a:r>
-          </a:p>
-          <a:p>
-            <a:r>
-              <a:rPr lang="zh-CN" dirty="0"/>
-              <a:t>学习目标：独立完成单元 5 练习，能熟练遍历嵌套数据</a:t>
-            </a:r>
-          </a:p>
-          <a:p>
-            <a:r>
-              <a:rPr lang="zh-CN" dirty="0"/>
-              <a:t/>
-            </a:r>
-          </a:p>
-          <a:p>
-            <a:r>
-              <a:rPr lang="zh-CN" dirty="0"/>
-              <a:t>课堂实操（40 分钟，不看答案）：</a:t>
-            </a:r>
-          </a:p>
-          <a:p>
-            <a:r>
-              <a:rPr lang="zh-CN" dirty="0"/>
-              <a:t>· 限时 30 分钟独立完成基础档</a:t>
-            </a:r>
-          </a:p>
-          <a:p>
-            <a:r>
-              <a:rPr lang="zh-CN" dirty="0"/>
-              <a:t>· 逐题对照答案讲评</a:t>
-            </a:r>
-          </a:p>
-          <a:p>
-            <a:r>
-              <a:rPr lang="zh-CN" dirty="0"/>
-              <a:t/>
-            </a:r>
-          </a:p>
-          <a:p>
-            <a:r>
-              <a:rPr lang="zh-CN" dirty="0"/>
-              <a:t>课后作业：</a:t>
-            </a:r>
-          </a:p>
-          <a:p>
-            <a:r>
-              <a:rPr lang="zh-CN" dirty="0"/>
-              <a:t>· 产出：三种嵌套结构各一组</a:t>
-            </a:r>
-          </a:p>
-          <a:p>
-            <a:r>
-              <a:rPr lang="zh-CN" dirty="0"/>
-              <a:t/>
-            </a:r>
-          </a:p>
-          <a:p>
-            <a:r>
-              <a:rPr lang="zh-CN" dirty="0"/>
-              <a:t>节奏：讲 20 分钟 → 学员自己敲 40 分钟（不看答案）→ 对讲评自查 20 分钟 → 写作业 10 分钟。</a:t>
-            </a:r>
-          </a:p>
-        </p:txBody>
-      </p:sp>
-    </p:spTree>
-  </p:cSld>
-  <p:clrMapOvr>
-    <a:masterClrMapping/>
-  </p:clrMapOvr>
-</p:notes>
-</file>
-
-<file path=ppt/notesSlides/notesSlide9.xml><?xml version="1.0" encoding="utf-8"?>
-<p:notes xmlns:a="http://schemas.openxmlformats.org/drawingml/2006/main" xmlns:p="http://schemas.openxmlformats.org/presentationml/2006/main" xmlns:r="http://schemas.openxmlformats.org/officeDocument/2006/relationships">
-  <p:cSld>
-    <p:spTree>
-      <p:nvGrpSpPr>
-        <p:cNvPr id="1" name=""/>
-        <p:cNvGrpSpPr/>
-        <p:nvPr/>
-      </p:nvGrpSpPr>
-      <p:grpSpPr>
-        <a:xfrm>
-          <a:off x="0" y="0"/>
-          <a:ext cx="0" cy="0"/>
-          <a:chOff x="0" y="0"/>
-          <a:chExt cx="0" cy="0"/>
-        </a:xfrm>
-      </p:grpSpPr>
-      <p:sp>
-        <p:nvSpPr>
-          <p:cNvPr id="2" name="讲课提示"/>
-          <p:cNvSpPr txBox="1"/>
-          <p:nvPr/>
-        </p:nvSpPr>
-        <p:spPr>
-          <a:xfrm>
-            <a:off x="457200" y="457200"/>
-            <a:ext cx="6858000" cy="4800600"/>
-          </a:xfrm>
-          <a:prstGeom prst="rect">
-            <a:avLst/>
-          </a:prstGeom>
-        </p:spPr>
-        <p:txBody>
-          <a:bodyPr wrap="square"/>
-          <a:lstStyle/>
-          <a:p>
-            <a:r>
-              <a:rPr lang="zh-CN" dirty="0"/>
-              <a:t>第 26 节 · 核心知识点：动手实战与答案讲评</a:t>
-            </a:r>
-          </a:p>
-          <a:p>
-            <a:r>
-              <a:rPr lang="zh-CN" dirty="0"/>
-              <a:t/>
-            </a:r>
-          </a:p>
-          <a:p>
-            <a:r>
-              <a:rPr lang="zh-CN" dirty="0"/>
-              <a:t>讲这一页时：先让学生说出上节课的结论，再逐块讲要点。</a:t>
-            </a:r>
-          </a:p>
-          <a:p>
-            <a:r>
-              <a:rPr lang="zh-CN" dirty="0"/>
-              <a:t>每讲完一块，问一句「这一步如果写错了，报错会长什么样？」——把错误提前讲。</a:t>
-            </a:r>
-          </a:p>
-          <a:p>
-            <a:r>
-              <a:rPr lang="zh-CN" dirty="0"/>
-              <a:t/>
-            </a:r>
-          </a:p>
-          <a:p>
-            <a:r>
-              <a:rPr lang="zh-CN" dirty="0"/>
-              <a:t>本节目标：独立完成单元 5 练习，能熟练遍历嵌套数据</a:t>
-            </a:r>
-          </a:p>
-          <a:p>
-            <a:r>
-              <a:rPr lang="zh-CN" dirty="0"/>
-              <a:t/>
-            </a:r>
-          </a:p>
-          <a:p>
-            <a:r>
-              <a:rPr lang="zh-CN" dirty="0"/>
-              <a:t>看不到懂的地方，回讲义对应小节读一遍，再回来对着这页复述一次——能讲出来才算真懂。</a:t>
-            </a:r>
-          </a:p>
-        </p:txBody>
-      </p:sp>
-    </p:spTree>
-  </p:cSld>
-  <p:clrMapOvr>
-    <a:masterClrMapping/>
-  </p:clrMapOvr>
-</p:notes>
 </file>
 
 <file path=ppt/slideLayouts/slideLayout1.xml><?xml version="1.0" encoding="utf-8"?>

--- a/python-course-ppt/逐节课件/Python讲授课件-单元05.pptx
+++ b/python-course-ppt/逐节课件/Python讲授课件-单元05.pptx
@@ -236,6 +236,1260 @@
     </a:lvl9pPr>
   </p:notesStyle>
 </p:notesMaster>
+</file>
+
+<file path=ppt/notesSlides/notesSlide1.xml><?xml version="1.0" encoding="utf-8"?>
+<p:notes xmlns:a="http://schemas.openxmlformats.org/drawingml/2006/main" xmlns:p="http://schemas.openxmlformats.org/presentationml/2006/main" xmlns:r="http://schemas.openxmlformats.org/officeDocument/2006/relationships">
+  <p:cSld>
+    <p:spTree>
+      <p:nvGrpSpPr>
+        <p:cNvPr id="1" name=""/>
+        <p:cNvGrpSpPr/>
+        <p:nvPr/>
+      </p:nvGrpSpPr>
+      <p:grpSpPr>
+        <a:xfrm>
+          <a:off x="0" y="0"/>
+          <a:ext cx="0" cy="0"/>
+          <a:chOff x="0" y="0"/>
+          <a:chExt cx="0" cy="0"/>
+        </a:xfrm>
+      </p:grpSpPr>
+      <p:sp>
+        <p:nvSpPr>
+          <p:cNvPr id="2" name="讲课提示"/>
+          <p:cNvSpPr txBox="1"/>
+          <p:nvPr/>
+        </p:nvSpPr>
+        <p:spPr>
+          <a:xfrm>
+            <a:off x="457200" y="457200"/>
+            <a:ext cx="6858000" cy="4800600"/>
+          </a:xfrm>
+          <a:prstGeom prst="rect">
+            <a:avLst/>
+          </a:prstGeom>
+        </p:spPr>
+        <p:txBody>
+          <a:bodyPr wrap="square"/>
+          <a:lstStyle/>
+          <a:p>
+            <a:r>
+              <a:rPr lang="zh-CN" dirty="0"/>
+              <a:t>单元 5 · 单元 5 · 字典</a:t>
+            </a:r>
+          </a:p>
+          <a:p>
+            <a:r>
+              <a:rPr lang="zh-CN" dirty="0"/>
+              <a:t/>
+            </a:r>
+          </a:p>
+          <a:p>
+            <a:r>
+              <a:rPr lang="zh-CN" dirty="0"/>
+              <a:t>本单元包含以下课节：</a:t>
+            </a:r>
+          </a:p>
+          <a:p>
+            <a:r>
+              <a:rPr lang="zh-CN" dirty="0"/>
+              <a:t>· 第 23 节 字典：按名字找数据</a:t>
+            </a:r>
+          </a:p>
+          <a:p>
+            <a:r>
+              <a:rPr lang="zh-CN" dirty="0"/>
+              <a:t>· 第 24 节 三种遍历与 get() 安全取值</a:t>
+            </a:r>
+          </a:p>
+          <a:p>
+            <a:r>
+              <a:rPr lang="zh-CN" dirty="0"/>
+              <a:t>· 第 25 节 遍历时修改与嵌套结构</a:t>
+            </a:r>
+          </a:p>
+          <a:p>
+            <a:r>
+              <a:rPr lang="zh-CN" dirty="0"/>
+              <a:t>· 第 26 节 动手实战与答案讲评</a:t>
+            </a:r>
+          </a:p>
+          <a:p>
+            <a:r>
+              <a:rPr lang="zh-CN" dirty="0"/>
+              <a:t>· 第 27 节 单元 5 验收复盘</a:t>
+            </a:r>
+          </a:p>
+          <a:p>
+            <a:r>
+              <a:rPr lang="zh-CN" dirty="0"/>
+              <a:t/>
+            </a:r>
+          </a:p>
+          <a:p>
+            <a:r>
+              <a:rPr lang="zh-CN" dirty="0"/>
+              <a:t>开场用 3 分钟讲清：这个单元学完能做出什么，最后会被关卡怎么验。</a:t>
+            </a:r>
+          </a:p>
+        </p:txBody>
+      </p:sp>
+    </p:spTree>
+  </p:cSld>
+  <p:clrMapOvr>
+    <a:masterClrMapping/>
+  </p:clrMapOvr>
+</p:notes>
+</file>
+
+<file path=ppt/notesSlides/notesSlide10.xml><?xml version="1.0" encoding="utf-8"?>
+<p:notes xmlns:a="http://schemas.openxmlformats.org/drawingml/2006/main" xmlns:p="http://schemas.openxmlformats.org/presentationml/2006/main" xmlns:r="http://schemas.openxmlformats.org/officeDocument/2006/relationships">
+  <p:cSld>
+    <p:spTree>
+      <p:nvGrpSpPr>
+        <p:cNvPr id="1" name=""/>
+        <p:cNvGrpSpPr/>
+        <p:nvPr/>
+      </p:nvGrpSpPr>
+      <p:grpSpPr>
+        <a:xfrm>
+          <a:off x="0" y="0"/>
+          <a:ext cx="0" cy="0"/>
+          <a:chOff x="0" y="0"/>
+          <a:chExt cx="0" cy="0"/>
+        </a:xfrm>
+      </p:grpSpPr>
+      <p:sp>
+        <p:nvSpPr>
+          <p:cNvPr id="2" name="讲课提示"/>
+          <p:cNvSpPr txBox="1"/>
+          <p:nvPr/>
+        </p:nvSpPr>
+        <p:spPr>
+          <a:xfrm>
+            <a:off x="457200" y="457200"/>
+            <a:ext cx="6858000" cy="4800600"/>
+          </a:xfrm>
+          <a:prstGeom prst="rect">
+            <a:avLst/>
+          </a:prstGeom>
+        </p:spPr>
+        <p:txBody>
+          <a:bodyPr wrap="square"/>
+          <a:lstStyle/>
+          <a:p>
+            <a:r>
+              <a:rPr lang="zh-CN" dirty="0"/>
+              <a:t>第 27 节 · 单元 5 验收复盘</a:t>
+            </a:r>
+          </a:p>
+          <a:p>
+            <a:r>
+              <a:rPr lang="zh-CN" dirty="0"/>
+              <a:t>单元 5 · 字典 · W5</a:t>
+            </a:r>
+          </a:p>
+          <a:p>
+            <a:r>
+              <a:rPr lang="zh-CN" dirty="0"/>
+              <a:t/>
+            </a:r>
+          </a:p>
+          <a:p>
+            <a:r>
+              <a:rPr lang="zh-CN" dirty="0"/>
+              <a:t>学习目标：确认字典增删改查、三种遍历、嵌套都过关</a:t>
+            </a:r>
+          </a:p>
+          <a:p>
+            <a:r>
+              <a:rPr lang="zh-CN" dirty="0"/>
+              <a:t/>
+            </a:r>
+          </a:p>
+          <a:p>
+            <a:r>
+              <a:rPr lang="zh-CN" dirty="0"/>
+              <a:t>课堂实操（40 分钟，不看答案）：</a:t>
+            </a:r>
+          </a:p>
+          <a:p>
+            <a:r>
+              <a:rPr lang="zh-CN" dirty="0"/>
+              <a:t>· 逐条打勾验收自测</a:t>
+            </a:r>
+          </a:p>
+          <a:p>
+            <a:r>
+              <a:rPr lang="zh-CN" dirty="0"/>
+              <a:t>· 现场演示嵌套数据的提取</a:t>
+            </a:r>
+          </a:p>
+          <a:p>
+            <a:r>
+              <a:rPr lang="zh-CN" dirty="0"/>
+              <a:t/>
+            </a:r>
+          </a:p>
+          <a:p>
+            <a:r>
+              <a:rPr lang="zh-CN" dirty="0"/>
+              <a:t>课后作业：</a:t>
+            </a:r>
+          </a:p>
+          <a:p>
+            <a:r>
+              <a:rPr lang="zh-CN" dirty="0"/>
+              <a:t>· 完成本单元小结与产出检查</a:t>
+            </a:r>
+          </a:p>
+          <a:p>
+            <a:r>
+              <a:rPr lang="zh-CN" dirty="0"/>
+              <a:t/>
+            </a:r>
+          </a:p>
+          <a:p>
+            <a:r>
+              <a:rPr lang="zh-CN" dirty="0"/>
+              <a:t>节奏：讲 20 分钟 → 学员自己敲 40 分钟（不看答案）→ 对讲评自查 20 分钟 → 写作业 10 分钟。</a:t>
+            </a:r>
+          </a:p>
+        </p:txBody>
+      </p:sp>
+    </p:spTree>
+  </p:cSld>
+  <p:clrMapOvr>
+    <a:masterClrMapping/>
+  </p:clrMapOvr>
+</p:notes>
+</file>
+
+<file path=ppt/notesSlides/notesSlide11.xml><?xml version="1.0" encoding="utf-8"?>
+<p:notes xmlns:a="http://schemas.openxmlformats.org/drawingml/2006/main" xmlns:p="http://schemas.openxmlformats.org/presentationml/2006/main" xmlns:r="http://schemas.openxmlformats.org/officeDocument/2006/relationships">
+  <p:cSld>
+    <p:spTree>
+      <p:nvGrpSpPr>
+        <p:cNvPr id="1" name=""/>
+        <p:cNvGrpSpPr/>
+        <p:nvPr/>
+      </p:nvGrpSpPr>
+      <p:grpSpPr>
+        <a:xfrm>
+          <a:off x="0" y="0"/>
+          <a:ext cx="0" cy="0"/>
+          <a:chOff x="0" y="0"/>
+          <a:chExt cx="0" cy="0"/>
+        </a:xfrm>
+      </p:grpSpPr>
+      <p:sp>
+        <p:nvSpPr>
+          <p:cNvPr id="2" name="讲课提示"/>
+          <p:cNvSpPr txBox="1"/>
+          <p:nvPr/>
+        </p:nvSpPr>
+        <p:spPr>
+          <a:xfrm>
+            <a:off x="457200" y="457200"/>
+            <a:ext cx="6858000" cy="4800600"/>
+          </a:xfrm>
+          <a:prstGeom prst="rect">
+            <a:avLst/>
+          </a:prstGeom>
+        </p:spPr>
+        <p:txBody>
+          <a:bodyPr wrap="square"/>
+          <a:lstStyle/>
+          <a:p>
+            <a:r>
+              <a:rPr lang="zh-CN" dirty="0"/>
+              <a:t>第 27 节 · 核心知识点：单元 5 验收复盘</a:t>
+            </a:r>
+          </a:p>
+          <a:p>
+            <a:r>
+              <a:rPr lang="zh-CN" dirty="0"/>
+              <a:t/>
+            </a:r>
+          </a:p>
+          <a:p>
+            <a:r>
+              <a:rPr lang="zh-CN" dirty="0"/>
+              <a:t>讲这一页时：先让学生说出上节课的结论，再逐块讲要点。</a:t>
+            </a:r>
+          </a:p>
+          <a:p>
+            <a:r>
+              <a:rPr lang="zh-CN" dirty="0"/>
+              <a:t>每讲完一块，问一句「这一步如果写错了，报错会长什么样？」——把错误提前讲。</a:t>
+            </a:r>
+          </a:p>
+          <a:p>
+            <a:r>
+              <a:rPr lang="zh-CN" dirty="0"/>
+              <a:t/>
+            </a:r>
+          </a:p>
+          <a:p>
+            <a:r>
+              <a:rPr lang="zh-CN" dirty="0"/>
+              <a:t>本节目标：确认字典增删改查、三种遍历、嵌套都过关</a:t>
+            </a:r>
+          </a:p>
+          <a:p>
+            <a:r>
+              <a:rPr lang="zh-CN" dirty="0"/>
+              <a:t/>
+            </a:r>
+          </a:p>
+          <a:p>
+            <a:r>
+              <a:rPr lang="zh-CN" dirty="0"/>
+              <a:t>看不到懂的地方，回讲义对应小节读一遍，再回来对着这页复述一次——能讲出来才算真懂。</a:t>
+            </a:r>
+          </a:p>
+        </p:txBody>
+      </p:sp>
+    </p:spTree>
+  </p:cSld>
+  <p:clrMapOvr>
+    <a:masterClrMapping/>
+  </p:clrMapOvr>
+</p:notes>
+</file>
+
+<file path=ppt/notesSlides/notesSlide12.xml><?xml version="1.0" encoding="utf-8"?>
+<p:notes xmlns:a="http://schemas.openxmlformats.org/drawingml/2006/main" xmlns:p="http://schemas.openxmlformats.org/presentationml/2006/main" xmlns:r="http://schemas.openxmlformats.org/officeDocument/2006/relationships">
+  <p:cSld>
+    <p:spTree>
+      <p:nvGrpSpPr>
+        <p:cNvPr id="1" name=""/>
+        <p:cNvGrpSpPr/>
+        <p:nvPr/>
+      </p:nvGrpSpPr>
+      <p:grpSpPr>
+        <a:xfrm>
+          <a:off x="0" y="0"/>
+          <a:ext cx="0" cy="0"/>
+          <a:chOff x="0" y="0"/>
+          <a:chExt cx="0" cy="0"/>
+        </a:xfrm>
+      </p:grpSpPr>
+      <p:sp>
+        <p:nvSpPr>
+          <p:cNvPr id="2" name="讲课提示"/>
+          <p:cNvSpPr txBox="1"/>
+          <p:nvPr/>
+        </p:nvSpPr>
+        <p:spPr>
+          <a:xfrm>
+            <a:off x="457200" y="457200"/>
+            <a:ext cx="6858000" cy="4800600"/>
+          </a:xfrm>
+          <a:prstGeom prst="rect">
+            <a:avLst/>
+          </a:prstGeom>
+        </p:spPr>
+        <p:txBody>
+          <a:bodyPr wrap="square"/>
+          <a:lstStyle/>
+          <a:p>
+            <a:r>
+              <a:rPr lang="zh-CN" dirty="0"/>
+              <a:t>单元 5 小结 · 单元 5 · 小结</a:t>
+            </a:r>
+          </a:p>
+          <a:p>
+            <a:r>
+              <a:rPr lang="zh-CN" dirty="0"/>
+              <a:t/>
+            </a:r>
+          </a:p>
+          <a:p>
+            <a:r>
+              <a:rPr lang="zh-CN" dirty="0"/>
+              <a:t>收尾动作：让学生合上讲义，口述本单元三个最重要的结论；说不出来的，回对应课节。</a:t>
+            </a:r>
+          </a:p>
+          <a:p>
+            <a:r>
+              <a:rPr lang="zh-CN" dirty="0"/>
+              <a:t>然后当场勾一遍本单元课节的「已完成」，没打勾的进下一单元前补掉。</a:t>
+            </a:r>
+          </a:p>
+        </p:txBody>
+      </p:sp>
+    </p:spTree>
+  </p:cSld>
+  <p:clrMapOvr>
+    <a:masterClrMapping/>
+  </p:clrMapOvr>
+</p:notes>
+</file>
+
+<file path=ppt/notesSlides/notesSlide2.xml><?xml version="1.0" encoding="utf-8"?>
+<p:notes xmlns:a="http://schemas.openxmlformats.org/drawingml/2006/main" xmlns:p="http://schemas.openxmlformats.org/presentationml/2006/main" xmlns:r="http://schemas.openxmlformats.org/officeDocument/2006/relationships">
+  <p:cSld>
+    <p:spTree>
+      <p:nvGrpSpPr>
+        <p:cNvPr id="1" name=""/>
+        <p:cNvGrpSpPr/>
+        <p:nvPr/>
+      </p:nvGrpSpPr>
+      <p:grpSpPr>
+        <a:xfrm>
+          <a:off x="0" y="0"/>
+          <a:ext cx="0" cy="0"/>
+          <a:chOff x="0" y="0"/>
+          <a:chExt cx="0" cy="0"/>
+        </a:xfrm>
+      </p:grpSpPr>
+      <p:sp>
+        <p:nvSpPr>
+          <p:cNvPr id="2" name="讲课提示"/>
+          <p:cNvSpPr txBox="1"/>
+          <p:nvPr/>
+        </p:nvSpPr>
+        <p:spPr>
+          <a:xfrm>
+            <a:off x="457200" y="457200"/>
+            <a:ext cx="6858000" cy="4800600"/>
+          </a:xfrm>
+          <a:prstGeom prst="rect">
+            <a:avLst/>
+          </a:prstGeom>
+        </p:spPr>
+        <p:txBody>
+          <a:bodyPr wrap="square"/>
+          <a:lstStyle/>
+          <a:p>
+            <a:r>
+              <a:rPr lang="zh-CN" dirty="0"/>
+              <a:t>第 23 节 · 字典：按名字找数据</a:t>
+            </a:r>
+          </a:p>
+          <a:p>
+            <a:r>
+              <a:rPr lang="zh-CN" dirty="0"/>
+              <a:t>单元 5 · 字典 · W5</a:t>
+            </a:r>
+          </a:p>
+          <a:p>
+            <a:r>
+              <a:rPr lang="zh-CN" dirty="0"/>
+              <a:t/>
+            </a:r>
+          </a:p>
+          <a:p>
+            <a:r>
+              <a:rPr lang="zh-CN" dirty="0"/>
+              <a:t>学习目标：理解「列表按位置找、字典按名字找」，掌握键值对增删改</a:t>
+            </a:r>
+          </a:p>
+          <a:p>
+            <a:r>
+              <a:rPr lang="zh-CN" dirty="0"/>
+              <a:t/>
+            </a:r>
+          </a:p>
+          <a:p>
+            <a:r>
+              <a:rPr lang="zh-CN" dirty="0"/>
+              <a:t>课堂实操（40 分钟，不看答案）：</a:t>
+            </a:r>
+          </a:p>
+          <a:p>
+            <a:r>
+              <a:rPr lang="zh-CN" dirty="0"/>
+              <a:t>· 现场把一个列表版数据改成字典版</a:t>
+            </a:r>
+          </a:p>
+          <a:p>
+            <a:r>
+              <a:rPr lang="zh-CN" dirty="0"/>
+              <a:t>· 演示赋值的新增 vs 修改两种含义</a:t>
+            </a:r>
+          </a:p>
+          <a:p>
+            <a:r>
+              <a:rPr lang="zh-CN" dirty="0"/>
+              <a:t/>
+            </a:r>
+          </a:p>
+          <a:p>
+            <a:r>
+              <a:rPr lang="zh-CN" dirty="0"/>
+              <a:t>课后作业：</a:t>
+            </a:r>
+          </a:p>
+          <a:p>
+            <a:r>
+              <a:rPr lang="zh-CN" dirty="0"/>
+              <a:t>· 完成动手练习 5-1 ~ 5-3</a:t>
+            </a:r>
+          </a:p>
+          <a:p>
+            <a:r>
+              <a:rPr lang="zh-CN" dirty="0"/>
+              <a:t/>
+            </a:r>
+          </a:p>
+          <a:p>
+            <a:r>
+              <a:rPr lang="zh-CN" dirty="0"/>
+              <a:t>节奏：讲 20 分钟 → 学员自己敲 40 分钟（不看答案）→ 对讲评自查 20 分钟 → 写作业 10 分钟。</a:t>
+            </a:r>
+          </a:p>
+        </p:txBody>
+      </p:sp>
+    </p:spTree>
+  </p:cSld>
+  <p:clrMapOvr>
+    <a:masterClrMapping/>
+  </p:clrMapOvr>
+</p:notes>
+</file>
+
+<file path=ppt/notesSlides/notesSlide3.xml><?xml version="1.0" encoding="utf-8"?>
+<p:notes xmlns:a="http://schemas.openxmlformats.org/drawingml/2006/main" xmlns:p="http://schemas.openxmlformats.org/presentationml/2006/main" xmlns:r="http://schemas.openxmlformats.org/officeDocument/2006/relationships">
+  <p:cSld>
+    <p:spTree>
+      <p:nvGrpSpPr>
+        <p:cNvPr id="1" name=""/>
+        <p:cNvGrpSpPr/>
+        <p:nvPr/>
+      </p:nvGrpSpPr>
+      <p:grpSpPr>
+        <a:xfrm>
+          <a:off x="0" y="0"/>
+          <a:ext cx="0" cy="0"/>
+          <a:chOff x="0" y="0"/>
+          <a:chExt cx="0" cy="0"/>
+        </a:xfrm>
+      </p:grpSpPr>
+      <p:sp>
+        <p:nvSpPr>
+          <p:cNvPr id="2" name="讲课提示"/>
+          <p:cNvSpPr txBox="1"/>
+          <p:nvPr/>
+        </p:nvSpPr>
+        <p:spPr>
+          <a:xfrm>
+            <a:off x="457200" y="457200"/>
+            <a:ext cx="6858000" cy="4800600"/>
+          </a:xfrm>
+          <a:prstGeom prst="rect">
+            <a:avLst/>
+          </a:prstGeom>
+        </p:spPr>
+        <p:txBody>
+          <a:bodyPr wrap="square"/>
+          <a:lstStyle/>
+          <a:p>
+            <a:r>
+              <a:rPr lang="zh-CN" dirty="0"/>
+              <a:t>第 23 节 · 核心知识点：字典：按名字找数据</a:t>
+            </a:r>
+          </a:p>
+          <a:p>
+            <a:r>
+              <a:rPr lang="zh-CN" dirty="0"/>
+              <a:t/>
+            </a:r>
+          </a:p>
+          <a:p>
+            <a:r>
+              <a:rPr lang="zh-CN" dirty="0"/>
+              <a:t>讲这一页时：先让学生说出上节课的结论，再逐块讲要点。</a:t>
+            </a:r>
+          </a:p>
+          <a:p>
+            <a:r>
+              <a:rPr lang="zh-CN" dirty="0"/>
+              <a:t>每讲完一块，问一句「这一步如果写错了，报错会长什么样？」——把错误提前讲。</a:t>
+            </a:r>
+          </a:p>
+          <a:p>
+            <a:r>
+              <a:rPr lang="zh-CN" dirty="0"/>
+              <a:t/>
+            </a:r>
+          </a:p>
+          <a:p>
+            <a:r>
+              <a:rPr lang="zh-CN" dirty="0"/>
+              <a:t>本节目标：理解「列表按位置找、字典按名字找」，掌握键值对增删改</a:t>
+            </a:r>
+          </a:p>
+          <a:p>
+            <a:r>
+              <a:rPr lang="zh-CN" dirty="0"/>
+              <a:t/>
+            </a:r>
+          </a:p>
+          <a:p>
+            <a:r>
+              <a:rPr lang="zh-CN" dirty="0"/>
+              <a:t>看不到懂的地方，回讲义对应小节读一遍，再回来对着这页复述一次——能讲出来才算真懂。</a:t>
+            </a:r>
+          </a:p>
+        </p:txBody>
+      </p:sp>
+    </p:spTree>
+  </p:cSld>
+  <p:clrMapOvr>
+    <a:masterClrMapping/>
+  </p:clrMapOvr>
+</p:notes>
+</file>
+
+<file path=ppt/notesSlides/notesSlide4.xml><?xml version="1.0" encoding="utf-8"?>
+<p:notes xmlns:a="http://schemas.openxmlformats.org/drawingml/2006/main" xmlns:p="http://schemas.openxmlformats.org/presentationml/2006/main" xmlns:r="http://schemas.openxmlformats.org/officeDocument/2006/relationships">
+  <p:cSld>
+    <p:spTree>
+      <p:nvGrpSpPr>
+        <p:cNvPr id="1" name=""/>
+        <p:cNvGrpSpPr/>
+        <p:nvPr/>
+      </p:nvGrpSpPr>
+      <p:grpSpPr>
+        <a:xfrm>
+          <a:off x="0" y="0"/>
+          <a:ext cx="0" cy="0"/>
+          <a:chOff x="0" y="0"/>
+          <a:chExt cx="0" cy="0"/>
+        </a:xfrm>
+      </p:grpSpPr>
+      <p:sp>
+        <p:nvSpPr>
+          <p:cNvPr id="2" name="讲课提示"/>
+          <p:cNvSpPr txBox="1"/>
+          <p:nvPr/>
+        </p:nvSpPr>
+        <p:spPr>
+          <a:xfrm>
+            <a:off x="457200" y="457200"/>
+            <a:ext cx="6858000" cy="4800600"/>
+          </a:xfrm>
+          <a:prstGeom prst="rect">
+            <a:avLst/>
+          </a:prstGeom>
+        </p:spPr>
+        <p:txBody>
+          <a:bodyPr wrap="square"/>
+          <a:lstStyle/>
+          <a:p>
+            <a:r>
+              <a:rPr lang="zh-CN" dirty="0"/>
+              <a:t>第 24 节 · 三种遍历与 get() 安全取值</a:t>
+            </a:r>
+          </a:p>
+          <a:p>
+            <a:r>
+              <a:rPr lang="zh-CN" dirty="0"/>
+              <a:t>单元 5 · 字典 · W5</a:t>
+            </a:r>
+          </a:p>
+          <a:p>
+            <a:r>
+              <a:rPr lang="zh-CN" dirty="0"/>
+              <a:t/>
+            </a:r>
+          </a:p>
+          <a:p>
+            <a:r>
+              <a:rPr lang="zh-CN" dirty="0"/>
+              <a:t>学习目标：掌握 items / keys / values 三种遍历，知道 get() 为什么不崩</a:t>
+            </a:r>
+          </a:p>
+          <a:p>
+            <a:r>
+              <a:rPr lang="zh-CN" dirty="0"/>
+              <a:t/>
+            </a:r>
+          </a:p>
+          <a:p>
+            <a:r>
+              <a:rPr lang="zh-CN" dirty="0"/>
+              <a:t>课堂实操（40 分钟，不看答案）：</a:t>
+            </a:r>
+          </a:p>
+          <a:p>
+            <a:r>
+              <a:rPr lang="zh-CN" dirty="0"/>
+              <a:t>· 对同一字典用三种方式遍历并比较输出</a:t>
+            </a:r>
+          </a:p>
+          <a:p>
+            <a:r>
+              <a:rPr lang="zh-CN" dirty="0"/>
+              <a:t>· 故意用 [] 取不存在的键看 KeyError</a:t>
+            </a:r>
+          </a:p>
+          <a:p>
+            <a:r>
+              <a:rPr lang="zh-CN" dirty="0"/>
+              <a:t/>
+            </a:r>
+          </a:p>
+          <a:p>
+            <a:r>
+              <a:rPr lang="zh-CN" dirty="0"/>
+              <a:t>课后作业：</a:t>
+            </a:r>
+          </a:p>
+          <a:p>
+            <a:r>
+              <a:rPr lang="zh-CN" dirty="0"/>
+              <a:t>· 完成动手练习 5-4 ~ 5-6</a:t>
+            </a:r>
+          </a:p>
+          <a:p>
+            <a:r>
+              <a:rPr lang="zh-CN" dirty="0"/>
+              <a:t/>
+            </a:r>
+          </a:p>
+          <a:p>
+            <a:r>
+              <a:rPr lang="zh-CN" dirty="0"/>
+              <a:t>节奏：讲 20 分钟 → 学员自己敲 40 分钟（不看答案）→ 对讲评自查 20 分钟 → 写作业 10 分钟。</a:t>
+            </a:r>
+          </a:p>
+        </p:txBody>
+      </p:sp>
+    </p:spTree>
+  </p:cSld>
+  <p:clrMapOvr>
+    <a:masterClrMapping/>
+  </p:clrMapOvr>
+</p:notes>
+</file>
+
+<file path=ppt/notesSlides/notesSlide5.xml><?xml version="1.0" encoding="utf-8"?>
+<p:notes xmlns:a="http://schemas.openxmlformats.org/drawingml/2006/main" xmlns:p="http://schemas.openxmlformats.org/presentationml/2006/main" xmlns:r="http://schemas.openxmlformats.org/officeDocument/2006/relationships">
+  <p:cSld>
+    <p:spTree>
+      <p:nvGrpSpPr>
+        <p:cNvPr id="1" name=""/>
+        <p:cNvGrpSpPr/>
+        <p:nvPr/>
+      </p:nvGrpSpPr>
+      <p:grpSpPr>
+        <a:xfrm>
+          <a:off x="0" y="0"/>
+          <a:ext cx="0" cy="0"/>
+          <a:chOff x="0" y="0"/>
+          <a:chExt cx="0" cy="0"/>
+        </a:xfrm>
+      </p:grpSpPr>
+      <p:sp>
+        <p:nvSpPr>
+          <p:cNvPr id="2" name="讲课提示"/>
+          <p:cNvSpPr txBox="1"/>
+          <p:nvPr/>
+        </p:nvSpPr>
+        <p:spPr>
+          <a:xfrm>
+            <a:off x="457200" y="457200"/>
+            <a:ext cx="6858000" cy="4800600"/>
+          </a:xfrm>
+          <a:prstGeom prst="rect">
+            <a:avLst/>
+          </a:prstGeom>
+        </p:spPr>
+        <p:txBody>
+          <a:bodyPr wrap="square"/>
+          <a:lstStyle/>
+          <a:p>
+            <a:r>
+              <a:rPr lang="zh-CN" dirty="0"/>
+              <a:t>第 24 节 · 核心知识点：三种遍历与 get() 安全取值</a:t>
+            </a:r>
+          </a:p>
+          <a:p>
+            <a:r>
+              <a:rPr lang="zh-CN" dirty="0"/>
+              <a:t/>
+            </a:r>
+          </a:p>
+          <a:p>
+            <a:r>
+              <a:rPr lang="zh-CN" dirty="0"/>
+              <a:t>讲这一页时：先让学生说出上节课的结论，再逐块讲要点。</a:t>
+            </a:r>
+          </a:p>
+          <a:p>
+            <a:r>
+              <a:rPr lang="zh-CN" dirty="0"/>
+              <a:t>每讲完一块，问一句「这一步如果写错了，报错会长什么样？」——把错误提前讲。</a:t>
+            </a:r>
+          </a:p>
+          <a:p>
+            <a:r>
+              <a:rPr lang="zh-CN" dirty="0"/>
+              <a:t/>
+            </a:r>
+          </a:p>
+          <a:p>
+            <a:r>
+              <a:rPr lang="zh-CN" dirty="0"/>
+              <a:t>本节目标：掌握 items / keys / values 三种遍历，知道 get() 为什么不崩</a:t>
+            </a:r>
+          </a:p>
+          <a:p>
+            <a:r>
+              <a:rPr lang="zh-CN" dirty="0"/>
+              <a:t/>
+            </a:r>
+          </a:p>
+          <a:p>
+            <a:r>
+              <a:rPr lang="zh-CN" dirty="0"/>
+              <a:t>看不到懂的地方，回讲义对应小节读一遍，再回来对着这页复述一次——能讲出来才算真懂。</a:t>
+            </a:r>
+          </a:p>
+        </p:txBody>
+      </p:sp>
+    </p:spTree>
+  </p:cSld>
+  <p:clrMapOvr>
+    <a:masterClrMapping/>
+  </p:clrMapOvr>
+</p:notes>
+</file>
+
+<file path=ppt/notesSlides/notesSlide6.xml><?xml version="1.0" encoding="utf-8"?>
+<p:notes xmlns:a="http://schemas.openxmlformats.org/drawingml/2006/main" xmlns:p="http://schemas.openxmlformats.org/presentationml/2006/main" xmlns:r="http://schemas.openxmlformats.org/officeDocument/2006/relationships">
+  <p:cSld>
+    <p:spTree>
+      <p:nvGrpSpPr>
+        <p:cNvPr id="1" name=""/>
+        <p:cNvGrpSpPr/>
+        <p:nvPr/>
+      </p:nvGrpSpPr>
+      <p:grpSpPr>
+        <a:xfrm>
+          <a:off x="0" y="0"/>
+          <a:ext cx="0" cy="0"/>
+          <a:chOff x="0" y="0"/>
+          <a:chExt cx="0" cy="0"/>
+        </a:xfrm>
+      </p:grpSpPr>
+      <p:sp>
+        <p:nvSpPr>
+          <p:cNvPr id="2" name="讲课提示"/>
+          <p:cNvSpPr txBox="1"/>
+          <p:nvPr/>
+        </p:nvSpPr>
+        <p:spPr>
+          <a:xfrm>
+            <a:off x="457200" y="457200"/>
+            <a:ext cx="6858000" cy="4800600"/>
+          </a:xfrm>
+          <a:prstGeom prst="rect">
+            <a:avLst/>
+          </a:prstGeom>
+        </p:spPr>
+        <p:txBody>
+          <a:bodyPr wrap="square"/>
+          <a:lstStyle/>
+          <a:p>
+            <a:r>
+              <a:rPr lang="zh-CN" dirty="0"/>
+              <a:t>第 25 节 · 遍历时修改与嵌套结构</a:t>
+            </a:r>
+          </a:p>
+          <a:p>
+            <a:r>
+              <a:rPr lang="zh-CN" dirty="0"/>
+              <a:t>单元 5 · 字典 · W5</a:t>
+            </a:r>
+          </a:p>
+          <a:p>
+            <a:r>
+              <a:rPr lang="zh-CN" dirty="0"/>
+              <a:t/>
+            </a:r>
+          </a:p>
+          <a:p>
+            <a:r>
+              <a:rPr lang="zh-CN" dirty="0"/>
+              <a:t>学习目标：能处理嵌套结构，为后面学 JSON 打基础</a:t>
+            </a:r>
+          </a:p>
+          <a:p>
+            <a:r>
+              <a:rPr lang="zh-CN" dirty="0"/>
+              <a:t/>
+            </a:r>
+          </a:p>
+          <a:p>
+            <a:r>
+              <a:rPr lang="zh-CN" dirty="0"/>
+              <a:t>课堂实操（40 分钟，不看答案）：</a:t>
+            </a:r>
+          </a:p>
+          <a:p>
+            <a:r>
+              <a:rPr lang="zh-CN" dirty="0"/>
+              <a:t>· 现场把三层嵌套数据一层层打印出来</a:t>
+            </a:r>
+          </a:p>
+          <a:p>
+            <a:r>
+              <a:rPr lang="zh-CN" dirty="0"/>
+              <a:t>· 讨论：为什么 JSON 能被 Python 直接读</a:t>
+            </a:r>
+          </a:p>
+          <a:p>
+            <a:r>
+              <a:rPr lang="zh-CN" dirty="0"/>
+              <a:t/>
+            </a:r>
+          </a:p>
+          <a:p>
+            <a:r>
+              <a:rPr lang="zh-CN" dirty="0"/>
+              <a:t>课后作业：</a:t>
+            </a:r>
+          </a:p>
+          <a:p>
+            <a:r>
+              <a:rPr lang="zh-CN" dirty="0"/>
+              <a:t>· ★ 动手项目 6.1–6.3 生日调查</a:t>
+            </a:r>
+          </a:p>
+          <a:p>
+            <a:r>
+              <a:rPr lang="zh-CN" dirty="0"/>
+              <a:t/>
+            </a:r>
+          </a:p>
+          <a:p>
+            <a:r>
+              <a:rPr lang="zh-CN" dirty="0"/>
+              <a:t>节奏：讲 20 分钟 → 学员自己敲 40 分钟（不看答案）→ 对讲评自查 20 分钟 → 写作业 10 分钟。</a:t>
+            </a:r>
+          </a:p>
+        </p:txBody>
+      </p:sp>
+    </p:spTree>
+  </p:cSld>
+  <p:clrMapOvr>
+    <a:masterClrMapping/>
+  </p:clrMapOvr>
+</p:notes>
+</file>
+
+<file path=ppt/notesSlides/notesSlide7.xml><?xml version="1.0" encoding="utf-8"?>
+<p:notes xmlns:a="http://schemas.openxmlformats.org/drawingml/2006/main" xmlns:p="http://schemas.openxmlformats.org/presentationml/2006/main" xmlns:r="http://schemas.openxmlformats.org/officeDocument/2006/relationships">
+  <p:cSld>
+    <p:spTree>
+      <p:nvGrpSpPr>
+        <p:cNvPr id="1" name=""/>
+        <p:cNvGrpSpPr/>
+        <p:nvPr/>
+      </p:nvGrpSpPr>
+      <p:grpSpPr>
+        <a:xfrm>
+          <a:off x="0" y="0"/>
+          <a:ext cx="0" cy="0"/>
+          <a:chOff x="0" y="0"/>
+          <a:chExt cx="0" cy="0"/>
+        </a:xfrm>
+      </p:grpSpPr>
+      <p:sp>
+        <p:nvSpPr>
+          <p:cNvPr id="2" name="讲课提示"/>
+          <p:cNvSpPr txBox="1"/>
+          <p:nvPr/>
+        </p:nvSpPr>
+        <p:spPr>
+          <a:xfrm>
+            <a:off x="457200" y="457200"/>
+            <a:ext cx="6858000" cy="4800600"/>
+          </a:xfrm>
+          <a:prstGeom prst="rect">
+            <a:avLst/>
+          </a:prstGeom>
+        </p:spPr>
+        <p:txBody>
+          <a:bodyPr wrap="square"/>
+          <a:lstStyle/>
+          <a:p>
+            <a:r>
+              <a:rPr lang="zh-CN" dirty="0"/>
+              <a:t>第 25 节 · 核心知识点：遍历时修改与嵌套结构</a:t>
+            </a:r>
+          </a:p>
+          <a:p>
+            <a:r>
+              <a:rPr lang="zh-CN" dirty="0"/>
+              <a:t/>
+            </a:r>
+          </a:p>
+          <a:p>
+            <a:r>
+              <a:rPr lang="zh-CN" dirty="0"/>
+              <a:t>讲这一页时：先让学生说出上节课的结论，再逐块讲要点。</a:t>
+            </a:r>
+          </a:p>
+          <a:p>
+            <a:r>
+              <a:rPr lang="zh-CN" dirty="0"/>
+              <a:t>每讲完一块，问一句「这一步如果写错了，报错会长什么样？」——把错误提前讲。</a:t>
+            </a:r>
+          </a:p>
+          <a:p>
+            <a:r>
+              <a:rPr lang="zh-CN" dirty="0"/>
+              <a:t/>
+            </a:r>
+          </a:p>
+          <a:p>
+            <a:r>
+              <a:rPr lang="zh-CN" dirty="0"/>
+              <a:t>本节目标：能处理嵌套结构，为后面学 JSON 打基础</a:t>
+            </a:r>
+          </a:p>
+          <a:p>
+            <a:r>
+              <a:rPr lang="zh-CN" dirty="0"/>
+              <a:t/>
+            </a:r>
+          </a:p>
+          <a:p>
+            <a:r>
+              <a:rPr lang="zh-CN" dirty="0"/>
+              <a:t>看不到懂的地方，回讲义对应小节读一遍，再回来对着这页复述一次——能讲出来才算真懂。</a:t>
+            </a:r>
+          </a:p>
+        </p:txBody>
+      </p:sp>
+    </p:spTree>
+  </p:cSld>
+  <p:clrMapOvr>
+    <a:masterClrMapping/>
+  </p:clrMapOvr>
+</p:notes>
+</file>
+
+<file path=ppt/notesSlides/notesSlide8.xml><?xml version="1.0" encoding="utf-8"?>
+<p:notes xmlns:a="http://schemas.openxmlformats.org/drawingml/2006/main" xmlns:p="http://schemas.openxmlformats.org/presentationml/2006/main" xmlns:r="http://schemas.openxmlformats.org/officeDocument/2006/relationships">
+  <p:cSld>
+    <p:spTree>
+      <p:nvGrpSpPr>
+        <p:cNvPr id="1" name=""/>
+        <p:cNvGrpSpPr/>
+        <p:nvPr/>
+      </p:nvGrpSpPr>
+      <p:grpSpPr>
+        <a:xfrm>
+          <a:off x="0" y="0"/>
+          <a:ext cx="0" cy="0"/>
+          <a:chOff x="0" y="0"/>
+          <a:chExt cx="0" cy="0"/>
+        </a:xfrm>
+      </p:grpSpPr>
+      <p:sp>
+        <p:nvSpPr>
+          <p:cNvPr id="2" name="讲课提示"/>
+          <p:cNvSpPr txBox="1"/>
+          <p:nvPr/>
+        </p:nvSpPr>
+        <p:spPr>
+          <a:xfrm>
+            <a:off x="457200" y="457200"/>
+            <a:ext cx="6858000" cy="4800600"/>
+          </a:xfrm>
+          <a:prstGeom prst="rect">
+            <a:avLst/>
+          </a:prstGeom>
+        </p:spPr>
+        <p:txBody>
+          <a:bodyPr wrap="square"/>
+          <a:lstStyle/>
+          <a:p>
+            <a:r>
+              <a:rPr lang="zh-CN" dirty="0"/>
+              <a:t>第 26 节 · 动手实战与答案讲评</a:t>
+            </a:r>
+          </a:p>
+          <a:p>
+            <a:r>
+              <a:rPr lang="zh-CN" dirty="0"/>
+              <a:t>单元 5 · 字典 · W5</a:t>
+            </a:r>
+          </a:p>
+          <a:p>
+            <a:r>
+              <a:rPr lang="zh-CN" dirty="0"/>
+              <a:t/>
+            </a:r>
+          </a:p>
+          <a:p>
+            <a:r>
+              <a:rPr lang="zh-CN" dirty="0"/>
+              <a:t>学习目标：独立完成单元 5 练习，能熟练遍历嵌套数据</a:t>
+            </a:r>
+          </a:p>
+          <a:p>
+            <a:r>
+              <a:rPr lang="zh-CN" dirty="0"/>
+              <a:t/>
+            </a:r>
+          </a:p>
+          <a:p>
+            <a:r>
+              <a:rPr lang="zh-CN" dirty="0"/>
+              <a:t>课堂实操（40 分钟，不看答案）：</a:t>
+            </a:r>
+          </a:p>
+          <a:p>
+            <a:r>
+              <a:rPr lang="zh-CN" dirty="0"/>
+              <a:t>· 限时 30 分钟独立完成基础档</a:t>
+            </a:r>
+          </a:p>
+          <a:p>
+            <a:r>
+              <a:rPr lang="zh-CN" dirty="0"/>
+              <a:t>· 逐题对照答案讲评</a:t>
+            </a:r>
+          </a:p>
+          <a:p>
+            <a:r>
+              <a:rPr lang="zh-CN" dirty="0"/>
+              <a:t/>
+            </a:r>
+          </a:p>
+          <a:p>
+            <a:r>
+              <a:rPr lang="zh-CN" dirty="0"/>
+              <a:t>课后作业：</a:t>
+            </a:r>
+          </a:p>
+          <a:p>
+            <a:r>
+              <a:rPr lang="zh-CN" dirty="0"/>
+              <a:t>· 产出：三种嵌套结构各一组</a:t>
+            </a:r>
+          </a:p>
+          <a:p>
+            <a:r>
+              <a:rPr lang="zh-CN" dirty="0"/>
+              <a:t/>
+            </a:r>
+          </a:p>
+          <a:p>
+            <a:r>
+              <a:rPr lang="zh-CN" dirty="0"/>
+              <a:t>节奏：讲 20 分钟 → 学员自己敲 40 分钟（不看答案）→ 对讲评自查 20 分钟 → 写作业 10 分钟。</a:t>
+            </a:r>
+          </a:p>
+        </p:txBody>
+      </p:sp>
+    </p:spTree>
+  </p:cSld>
+  <p:clrMapOvr>
+    <a:masterClrMapping/>
+  </p:clrMapOvr>
+</p:notes>
+</file>
+
+<file path=ppt/notesSlides/notesSlide9.xml><?xml version="1.0" encoding="utf-8"?>
+<p:notes xmlns:a="http://schemas.openxmlformats.org/drawingml/2006/main" xmlns:p="http://schemas.openxmlformats.org/presentationml/2006/main" xmlns:r="http://schemas.openxmlformats.org/officeDocument/2006/relationships">
+  <p:cSld>
+    <p:spTree>
+      <p:nvGrpSpPr>
+        <p:cNvPr id="1" name=""/>
+        <p:cNvGrpSpPr/>
+        <p:nvPr/>
+      </p:nvGrpSpPr>
+      <p:grpSpPr>
+        <a:xfrm>
+          <a:off x="0" y="0"/>
+          <a:ext cx="0" cy="0"/>
+          <a:chOff x="0" y="0"/>
+          <a:chExt cx="0" cy="0"/>
+        </a:xfrm>
+      </p:grpSpPr>
+      <p:sp>
+        <p:nvSpPr>
+          <p:cNvPr id="2" name="讲课提示"/>
+          <p:cNvSpPr txBox="1"/>
+          <p:nvPr/>
+        </p:nvSpPr>
+        <p:spPr>
+          <a:xfrm>
+            <a:off x="457200" y="457200"/>
+            <a:ext cx="6858000" cy="4800600"/>
+          </a:xfrm>
+          <a:prstGeom prst="rect">
+            <a:avLst/>
+          </a:prstGeom>
+        </p:spPr>
+        <p:txBody>
+          <a:bodyPr wrap="square"/>
+          <a:lstStyle/>
+          <a:p>
+            <a:r>
+              <a:rPr lang="zh-CN" dirty="0"/>
+              <a:t>第 26 节 · 核心知识点：动手实战与答案讲评</a:t>
+            </a:r>
+          </a:p>
+          <a:p>
+            <a:r>
+              <a:rPr lang="zh-CN" dirty="0"/>
+              <a:t/>
+            </a:r>
+          </a:p>
+          <a:p>
+            <a:r>
+              <a:rPr lang="zh-CN" dirty="0"/>
+              <a:t>讲这一页时：先让学生说出上节课的结论，再逐块讲要点。</a:t>
+            </a:r>
+          </a:p>
+          <a:p>
+            <a:r>
+              <a:rPr lang="zh-CN" dirty="0"/>
+              <a:t>每讲完一块，问一句「这一步如果写错了，报错会长什么样？」——把错误提前讲。</a:t>
+            </a:r>
+          </a:p>
+          <a:p>
+            <a:r>
+              <a:rPr lang="zh-CN" dirty="0"/>
+              <a:t/>
+            </a:r>
+          </a:p>
+          <a:p>
+            <a:r>
+              <a:rPr lang="zh-CN" dirty="0"/>
+              <a:t>本节目标：独立完成单元 5 练习，能熟练遍历嵌套数据</a:t>
+            </a:r>
+          </a:p>
+          <a:p>
+            <a:r>
+              <a:rPr lang="zh-CN" dirty="0"/>
+              <a:t/>
+            </a:r>
+          </a:p>
+          <a:p>
+            <a:r>
+              <a:rPr lang="zh-CN" dirty="0"/>
+              <a:t>看不到懂的地方，回讲义对应小节读一遍，再回来对着这页复述一次——能讲出来才算真懂。</a:t>
+            </a:r>
+          </a:p>
+        </p:txBody>
+      </p:sp>
+    </p:spTree>
+  </p:cSld>
+  <p:clrMapOvr>
+    <a:masterClrMapping/>
+  </p:clrMapOvr>
+</p:notes>
 </file>
 
 <file path=ppt/slideLayouts/slideLayout1.xml><?xml version="1.0" encoding="utf-8"?>
@@ -2130,7 +3384,7 @@
   <p:cSld>
     <p:spTree>
       <p:nvGrpSpPr>
-        <p:cNvPr id="42" name="" descr="&lt;Slide style={{ width: '1280px', height: '720px', backgroundColor: '#FAFCFE', padding: 0, position: 'relative', overflow: 'hidden' }}&gt;&#13;&#10;    &lt;Box style={{ position: 'absolute', left: 64, top: 36, width: '1152px', flexDirection: 'row', alignItems: 'center', gap: 12 }}&gt;&#13;&#10;        &lt;Box style={{ background: '#0E9B78', borderRadius: 5, padding: '3px 11px' }}&gt;&#13;&#10;            &lt;Text style={{ fontSize: 14, fontWeight: 'bold', color: '#FFFFFF' }}&gt;第 23 节&lt;/Text&gt;&#13;&#10;        &lt;/Box&gt;&#13;&#10;        &lt;Text style={{ fontSize: 30, fontWeight: 'bold', color: '#16232E' }}&gt;核心知识点&lt;/Text&gt;&#13;&#10;        &lt;Text style={{ fontSize: 15, color: '#5A6B7A', marginTop: 10 }}&gt;· 字典：按名字找数据&lt;/Text&gt;&#13;&#10;    &lt;/Box&gt;&#13;&#10;    &lt;Box style={{ position: 'absolute', left: 0, top: 0, width: '1280px', height: '720px' }}&gt;&#13;&#10;        &lt;svg width='1280' height='720' viewBox='0 0 1280 720'&gt;&#13;&#10;            &lt;rect x='64' y='96' width='368' height='330' rx='12' fill='#FFFFFF' stroke='#D8E3EE' /&gt;&lt;rect x='64' y='96' width='368' height='4' rx='2' fill='#1F5FA8' /&gt;&lt;text x='82' y='130' fontSize='15.5' fontWeight='bold' fill='#1F5FA8' textAnchor='start' fontFamily='Microsoft YaHei'&gt;2.1 列表按位置找，字典按名字找&lt;/text&gt;&lt;text x='82' y='169.0' fontSize='13' fill='#3A4A58' textAnchor='start' fontFamily='Microsoft YaHei'&gt;· 列表 = 一排有编号的抽屉。找东西靠数编号（第 3 个&lt;/text&gt;&lt;text x='82' y='188.5' fontSize='13' fill='#3A4A58' textAnchor='start' fontFamily='Microsoft YaHei'&gt;、第 7 个）。&lt;/text&gt;&lt;text x='82' y='217.0' fontSize='13' fill='#3A4A58' textAnchor='start' fontFamily='Microsoft YaHei'&gt;· 字典 = 一个巨大的储物柜，每个柜门上都贴着标签。找&lt;/text&gt;&lt;text x='82' y='236.5' fontSize='13' fill='#3A4A58' textAnchor='start' fontFamily='Microsoft YaHei'&gt;东西靠读标签（&quot;小明&quot; → 拿到他的号码）。&lt;/text&gt;&lt;rect x='468' y='96' width='368' height='330' rx='12' fill='#FFFFFF' stroke='#D8E3EE' /&gt;&lt;rect x='468' y='96' width='368' height='4' rx='2' fill='#1F5FA8' /&gt;&lt;text x='486' y='130' fontSize='15.5' fontWeight='bold' fill='#1F5FA8' textAnchor='start' fontFamily='Microsoft YaHei'&gt;2.2 键值对：key → value&lt;/text&gt;&lt;text x='486' y='169.0' fontSize='13' fill='#3A4A58' textAnchor='start' fontFamily='Microsoft YaHei'&gt;· 键（key）：唯一的标签，充当索引&lt;/text&gt;&lt;text x='486' y='197.5' fontSize='13' fill='#3A4A58' textAnchor='start' fontFamily='Microsoft YaHei'&gt;· 值（value）：这个标签下存的东西&lt;/text&gt;&lt;rect x='872' y='96' width='368' height='330' rx='12' fill='#FFFFFF' stroke='#D8E3EE' /&gt;&lt;rect x='872' y='96' width='368' height='4' rx='2' fill='#1F5FA8' /&gt;&lt;text x='890' y='130' fontSize='15.5' fontWeight='bold' fill='#1F5FA8' textAnchor='start' fontFamily='Microsoft YaHei'&gt;2.3 新增 vs 修改：同一行代码，两种含义&lt;/text&gt;&lt;text x='890' y='169.0' fontSize='13' fill='#3A4A58' textAnchor='start' fontFamily='Microsoft YaHei'&gt;· 这是字典最容易困惑的一点：&lt;/text&gt;&lt;rect x='64' y='574' width='1152' height='66' rx='12' fill='#EEF5FB' /&gt;&lt;text x='84' y='616' fontSize='14' fill='#243444' textAnchor='start' fontFamily='Microsoft YaHei'&gt;看不懂的地方先回讲义对应小节读一遍，再回来对着这页复述一次——能讲出来才算真懂。&lt;/text&gt;&#13;&#10;            &lt;text x='64' y='684' fontSize='13' fill='#8A9AAA' fontFamily='Microsoft YaHei'&gt;Python 讲授课件 · 逐节版&lt;/text&gt;&#13;&#10;            &lt;text x='1216' y='684' fontSize='13' fill='#8A9AAA' textAnchor='end' fontFamily='Microsoft YaHei'&gt;单元 5 · 第 23 节&lt;/text&gt;&#13;&#10;        &lt;/svg&gt;&#13;&#10;    &lt;/Box&gt;&#13;&#10;&lt;/Slide&gt;&#13;&#10;"/>
+        <p:cNvPr id="42" name="" descr="&lt;Slide style={{ width: '1280px', height: '720px', backgroundColor: '#FAFCFE', padding: 0, position: 'relative', overflow: 'hidden' }}&gt;&#13;&#10;    &lt;Box style={{ position: 'absolute', left: 64, top: 36, width: '1152px', flexDirection: 'row', alignItems: 'center', gap: 12 }}&gt;&#13;&#10;        &lt;Box style={{ background: '#0E9B78', borderRadius: 5, padding: '3px 11px' }}&gt;&#13;&#10;            &lt;Text style={{ fontSize: 14, fontWeight: 'bold', color: '#FFFFFF' }}&gt;第 23 节&lt;/Text&gt;&#13;&#10;        &lt;/Box&gt;&#13;&#10;        &lt;Text style={{ fontSize: 30, fontWeight: 'bold', color: '#16232E' }}&gt;核心知识点&lt;/Text&gt;&#13;&#10;        &lt;Text style={{ fontSize: 15, color: '#5A6B7A', marginTop: 10 }}&gt;· 字典：按名字找数据&lt;/Text&gt;&#13;&#10;    &lt;/Box&gt;&#13;&#10;    &lt;Box style={{ position: 'absolute', left: 0, top: 0, width: '1280px', height: '720px' }}&gt;&#13;&#10;        &lt;svg width='1280' height='720' viewBox='0 0 1280 720'&gt;&#13;&#10;            &lt;rect x='64' y='96' width='368' height='330' rx='12' fill='#FFFFFF' stroke='#D8E3EE' /&gt;&lt;rect x='64' y='96' width='368' height='4' rx='2' fill='#1F5FA8' /&gt;&lt;text x='82' y='130' fontSize='15.5' fontWeight='bold' fill='#1F5FA8' textAnchor='start' fontFamily='Microsoft YaHei'&gt;2.1 列表按位置找，字典按名字找&lt;/text&gt;&lt;text x='82' y='169.0' fontSize='13' fill='#3A4A58' textAnchor='start' fontFamily='Microsoft YaHei'&gt;· 列表 = 一排有编号的抽屉。找东西靠数编号（第 3&lt;/text&gt;&lt;text x='82' y='188.5' fontSize='13' fill='#3A4A58' textAnchor='start' fontFamily='Microsoft YaHei'&gt;个、第 7 个）。&lt;/text&gt;&lt;text x='82' y='217.0' fontSize='13' fill='#3A4A58' textAnchor='start' fontFamily='Microsoft YaHei'&gt;· 字典 = 一个巨大的储物柜，每个柜门上都贴着标签。&lt;/text&gt;&lt;text x='82' y='236.5' fontSize='13' fill='#3A4A58' textAnchor='start' fontFamily='Microsoft YaHei'&gt;找东西靠读标签（&quot;小明&quot; → 拿到他的号码）。&lt;/text&gt;&lt;rect x='468' y='96' width='368' height='330' rx='12' fill='#FFFFFF' stroke='#D8E3EE' /&gt;&lt;rect x='468' y='96' width='368' height='4' rx='2' fill='#1F5FA8' /&gt;&lt;text x='486' y='130' fontSize='15.5' fontWeight='bold' fill='#1F5FA8' textAnchor='start' fontFamily='Microsoft YaHei'&gt;2.2 键值对：key → value&lt;/text&gt;&lt;text x='486' y='169.0' fontSize='13' fill='#3A4A58' textAnchor='start' fontFamily='Microsoft YaHei'&gt;· 键（key）：唯一的标签，充当索引&lt;/text&gt;&lt;text x='486' y='197.5' fontSize='13' fill='#3A4A58' textAnchor='start' fontFamily='Microsoft YaHei'&gt;· 值（value）：这个标签下存的东西&lt;/text&gt;&lt;rect x='872' y='96' width='368' height='330' rx='12' fill='#FFFFFF' stroke='#D8E3EE' /&gt;&lt;rect x='872' y='96' width='368' height='4' rx='2' fill='#1F5FA8' /&gt;&lt;text x='890' y='130' fontSize='15.5' fontWeight='bold' fill='#1F5FA8' textAnchor='start' fontFamily='Microsoft YaHei'&gt;2.3 新增 vs 修改：同一行代码，两种含义&lt;/text&gt;&lt;text x='890' y='169.0' fontSize='13' fill='#3A4A58' textAnchor='start' fontFamily='Microsoft YaHei'&gt;· 这是字典最容易困惑的一点：&lt;/text&gt;&lt;rect x='64' y='574' width='1152' height='66' rx='12' fill='#EEF5FB' /&gt;&lt;text x='84' y='616' fontSize='14' fill='#243444' textAnchor='start' fontFamily='Microsoft YaHei'&gt;看不懂的地方先回讲义对应小节读一遍，再回来对着这页复述一次——能讲出来才算真懂。&lt;/text&gt;&#13;&#10;            &lt;text x='64' y='684' fontSize='13' fill='#8A9AAA' fontFamily='Microsoft YaHei'&gt;Python 讲授课件 · 逐节版&lt;/text&gt;&#13;&#10;            &lt;text x='1216' y='684' fontSize='13' fill='#8A9AAA' textAnchor='end' fontFamily='Microsoft YaHei'&gt;单元 5 · 第 23 节&lt;/text&gt;&#13;&#10;        &lt;/svg&gt;&#13;&#10;    &lt;/Box&gt;&#13;&#10;&lt;/Slide&gt;&#13;&#10;"/>
         <p:cNvGrpSpPr/>
         <p:nvPr/>
       </p:nvGrpSpPr>
@@ -2581,7 +3835,7 @@
   <p:cSld>
     <p:spTree>
       <p:nvGrpSpPr>
-        <p:cNvPr id="55" name="" descr="&lt;Slide style={{ width: '1280px', height: '720px', backgroundColor: '#FAFCFE', padding: 0, position: 'relative', overflow: 'hidden' }}&gt;&#13;&#10;    &lt;Box style={{ position: 'absolute', left: 64, top: 36, width: '1152px', flexDirection: 'row', alignItems: 'center', gap: 12 }}&gt;&#13;&#10;        &lt;Box style={{ background: '#0E9B78', borderRadius: 5, padding: '3px 11px' }}&gt;&#13;&#10;            &lt;Text style={{ fontSize: 14, fontWeight: 'bold', color: '#FFFFFF' }}&gt;第 24 节&lt;/Text&gt;&#13;&#10;        &lt;/Box&gt;&#13;&#10;        &lt;Text style={{ fontSize: 30, fontWeight: 'bold', color: '#16232E' }}&gt;核心知识点&lt;/Text&gt;&#13;&#10;        &lt;Text style={{ fontSize: 15, color: '#5A6B7A', marginTop: 10 }}&gt;· 三种遍历与 get() 安全取值&lt;/Text&gt;&#13;&#10;    &lt;/Box&gt;&#13;&#10;    &lt;Box style={{ position: 'absolute', left: 0, top: 0, width: '1280px', height: '720px' }}&gt;&#13;&#10;        &lt;svg width='1280' height='720' viewBox='0 0 1280 720'&gt;&#13;&#10;            &lt;rect x='64' y='96' width='548' height='330' rx='12' fill='#FFFFFF' stroke='#D8E3EE' /&gt;&lt;rect x='64' y='96' width='548' height='4' rx='2' fill='#1F5FA8' /&gt;&lt;text x='82' y='130' fontSize='15.5' fontWeight='bold' fill='#1F5FA8' textAnchor='start' fontFamily='Microsoft YaHei'&gt;2.4 三种遍历方式&lt;/text&gt;&lt;text x='82' y='169.0' fontSize='13' fill='#3A4A58' textAnchor='start' fontFamily='Microsoft YaHei'&gt;· for key in dict 实际等于 for key in dict.keys()，因为 dict…&lt;/text&gt;&lt;rect x='668' y='96' width='548' height='330' rx='12' fill='#FFFFFF' stroke='#D8E3EE' /&gt;&lt;rect x='668' y='96' width='548' height='4' rx='2' fill='#1F5FA8' /&gt;&lt;text x='686' y='130' fontSize='15.5' fontWeight='bold' fill='#1F5FA8' textAnchor='start' fontFamily='Microsoft YaHei'&gt;2.5 .get()：不 crash 的取值方式&lt;/text&gt;&lt;text x='686' y='169.0' fontSize='13' fill='#3A4A58' textAnchor='start' fontFamily='Microsoft YaHei'&gt;· scores = ｛&quot;语文&quot;: 90, &quot;数学&quot;: 85｝&lt;/text&gt;&lt;rect x='64' y='574' width='1152' height='66' rx='12' fill='#EEF5FB' /&gt;&lt;text x='84' y='616' fontSize='14' fill='#243444' textAnchor='start' fontFamily='Microsoft YaHei'&gt;看不懂的地方先回讲义对应小节读一遍，再回来对着这页复述一次——能讲出来才算真懂。&lt;/text&gt;&#13;&#10;            &lt;text x='64' y='684' fontSize='13' fill='#8A9AAA' fontFamily='Microsoft YaHei'&gt;Python 讲授课件 · 逐节版&lt;/text&gt;&#13;&#10;            &lt;text x='1216' y='684' fontSize='13' fill='#8A9AAA' textAnchor='end' fontFamily='Microsoft YaHei'&gt;单元 5 · 第 24 节&lt;/text&gt;&#13;&#10;        &lt;/svg&gt;&#13;&#10;    &lt;/Box&gt;&#13;&#10;&lt;/Slide&gt;&#13;&#10;"/>
+        <p:cNvPr id="55" name="" descr="&lt;Slide style={{ width: '1280px', height: '720px', backgroundColor: '#FAFCFE', padding: 0, position: 'relative', overflow: 'hidden' }}&gt;&#13;&#10;    &lt;Box style={{ position: 'absolute', left: 64, top: 36, width: '1152px', flexDirection: 'row', alignItems: 'center', gap: 12 }}&gt;&#13;&#10;        &lt;Box style={{ background: '#0E9B78', borderRadius: 5, padding: '3px 11px' }}&gt;&#13;&#10;            &lt;Text style={{ fontSize: 14, fontWeight: 'bold', color: '#FFFFFF' }}&gt;第 24 节&lt;/Text&gt;&#13;&#10;        &lt;/Box&gt;&#13;&#10;        &lt;Text style={{ fontSize: 30, fontWeight: 'bold', color: '#16232E' }}&gt;核心知识点&lt;/Text&gt;&#13;&#10;        &lt;Text style={{ fontSize: 15, color: '#5A6B7A', marginTop: 10 }}&gt;· 三种遍历与 get() 安全取值&lt;/Text&gt;&#13;&#10;    &lt;/Box&gt;&#13;&#10;    &lt;Box style={{ position: 'absolute', left: 0, top: 0, width: '1280px', height: '720px' }}&gt;&#13;&#10;        &lt;svg width='1280' height='720' viewBox='0 0 1280 720'&gt;&#13;&#10;            &lt;rect x='64' y='96' width='548' height='330' rx='12' fill='#FFFFFF' stroke='#D8E3EE' /&gt;&lt;rect x='64' y='96' width='548' height='4' rx='2' fill='#1F5FA8' /&gt;&lt;text x='82' y='130' fontSize='15.5' fontWeight='bold' fill='#1F5FA8' textAnchor='start' fontFamily='Microsoft YaHei'&gt;2.4 三种遍历方式&lt;/text&gt;&lt;text x='82' y='169.0' fontSize='13' fill='#3A4A58' textAnchor='start' fontFamily='Microsoft YaHei'&gt;· for key in dict 实际等于 for key in dict.keys()&lt;/text&gt;&lt;rect x='668' y='96' width='548' height='330' rx='12' fill='#FFFFFF' stroke='#D8E3EE' /&gt;&lt;rect x='668' y='96' width='548' height='4' rx='2' fill='#1F5FA8' /&gt;&lt;text x='686' y='130' fontSize='15.5' fontWeight='bold' fill='#1F5FA8' textAnchor='start' fontFamily='Microsoft YaHei'&gt;2.5 .get()：不 crash 的取值方式&lt;/text&gt;&lt;text x='686' y='169.0' fontSize='13' fill='#3A4A58' textAnchor='start' fontFamily='Microsoft YaHei'&gt;· scores = ｛&quot;语文&quot;: 90, &quot;数学&quot;: 85｝&lt;/text&gt;&lt;rect x='64' y='574' width='1152' height='66' rx='12' fill='#EEF5FB' /&gt;&lt;text x='84' y='616' fontSize='14' fill='#243444' textAnchor='start' fontFamily='Microsoft YaHei'&gt;看不懂的地方先回讲义对应小节读一遍，再回来对着这页复述一次——能讲出来才算真懂。&lt;/text&gt;&#13;&#10;            &lt;text x='64' y='684' fontSize='13' fill='#8A9AAA' fontFamily='Microsoft YaHei'&gt;Python 讲授课件 · 逐节版&lt;/text&gt;&#13;&#10;            &lt;text x='1216' y='684' fontSize='13' fill='#8A9AAA' textAnchor='end' fontFamily='Microsoft YaHei'&gt;单元 5 · 第 24 节&lt;/text&gt;&#13;&#10;        &lt;/svg&gt;&#13;&#10;    &lt;/Box&gt;&#13;&#10;&lt;/Slide&gt;&#13;&#10;"/>
         <p:cNvGrpSpPr/>
         <p:nvPr/>
       </p:nvGrpSpPr>
@@ -3032,7 +4286,7 @@
   <p:cSld>
     <p:spTree>
       <p:nvGrpSpPr>
-        <p:cNvPr id="68" name="" descr="&lt;Slide style={{ width: '1280px', height: '720px', backgroundColor: '#FAFCFE', padding: 0, position: 'relative', overflow: 'hidden' }}&gt;&#13;&#10;    &lt;Box style={{ position: 'absolute', left: 64, top: 36, width: '1152px', flexDirection: 'row', alignItems: 'center', gap: 12 }}&gt;&#13;&#10;        &lt;Box style={{ background: '#0E9B78', borderRadius: 5, padding: '3px 11px' }}&gt;&#13;&#10;            &lt;Text style={{ fontSize: 14, fontWeight: 'bold', color: '#FFFFFF' }}&gt;第 25 节&lt;/Text&gt;&#13;&#10;        &lt;/Box&gt;&#13;&#10;        &lt;Text style={{ fontSize: 30, fontWeight: 'bold', color: '#16232E' }}&gt;核心知识点&lt;/Text&gt;&#13;&#10;        &lt;Text style={{ fontSize: 15, color: '#5A6B7A', marginTop: 10 }}&gt;· 遍历时修改与嵌套结构&lt;/Text&gt;&#13;&#10;    &lt;/Box&gt;&#13;&#10;    &lt;Box style={{ position: 'absolute', left: 0, top: 0, width: '1280px', height: '720px' }}&gt;&#13;&#10;        &lt;svg width='1280' height='720' viewBox='0 0 1280 720'&gt;&#13;&#10;            &lt;rect x='64' y='96' width='548' height='330' rx='12' fill='#FFFFFF' stroke='#D8E3EE' /&gt;&lt;rect x='64' y='96' width='548' height='4' rx='2' fill='#1F5FA8' /&gt;&lt;text x='82' y='130' fontSize='15.5' fontWeight='bold' fill='#1F5FA8' textAnchor='start' fontFamily='Microsoft YaHei'&gt;2.6 遍历时能修改字典吗&lt;/text&gt;&lt;text x='82' y='169.0' fontSize='13' fill='#3A4A58' textAnchor='start' fontFamily='Microsoft YaHei'&gt;· 不能。 遍历过程中修改字典会报 RuntimeError: dictionary changed si…&lt;/text&gt;&lt;rect x='668' y='96' width='548' height='330' rx='12' fill='#FFFFFF' stroke='#D8E3EE' /&gt;&lt;rect x='668' y='96' width='548' height='4' rx='2' fill='#1F5FA8' /&gt;&lt;text x='686' y='130' fontSize='15.5' fontWeight='bold' fill='#1F5FA8' textAnchor='start' fontFamily='Microsoft YaHei'&gt;2.7 嵌套结构：字典的真正威力&lt;/text&gt;&lt;text x='686' y='169.0' fontSize='13' fill='#3A4A58' textAnchor='start' fontFamily='Microsoft YaHei'&gt;· 真实数据几乎都是嵌套的：&lt;/text&gt;&lt;text x='64' y='470' fontSize='14.5' fontWeight='bold' fill='#0E9B78' textAnchor='start' fontFamily='Microsoft YaHei'&gt;本节的代码示例&lt;/text&gt;&lt;text x='64' y='500' fontSize='13' fill='#3A4A58' textAnchor='start' fontFamily='Microsoft YaHei'&gt;· 创建与基本访问&lt;/text&gt;&lt;text x='468' y='500' fontSize='13' fill='#3A4A58' textAnchor='start' fontFamily='Microsoft YaHei'&gt;· 新增、修改、删除&lt;/text&gt;&lt;text x='872' y='500' fontSize='13' fill='#3A4A58' textAnchor='start' fontFamily='Microsoft YaHei'&gt;· 三种遍历方式&lt;/text&gt;&lt;rect x='64' y='574' width='1152' height='66' rx='12' fill='#EEF5FB' /&gt;&lt;text x='84' y='616' fontSize='14' fill='#243444' textAnchor='start' fontFamily='Microsoft YaHei'&gt;看不懂的地方先回讲义对应小节读一遍，再回来对着这页复述一次——能讲出来才算真懂。&lt;/text&gt;&#13;&#10;            &lt;text x='64' y='684' fontSize='13' fill='#8A9AAA' fontFamily='Microsoft YaHei'&gt;Python 讲授课件 · 逐节版&lt;/text&gt;&#13;&#10;            &lt;text x='1216' y='684' fontSize='13' fill='#8A9AAA' textAnchor='end' fontFamily='Microsoft YaHei'&gt;单元 5 · 第 25 节&lt;/text&gt;&#13;&#10;        &lt;/svg&gt;&#13;&#10;    &lt;/Box&gt;&#13;&#10;&lt;/Slide&gt;&#13;&#10;"/>
+        <p:cNvPr id="68" name="" descr="&lt;Slide style={{ width: '1280px', height: '720px', backgroundColor: '#FAFCFE', padding: 0, position: 'relative', overflow: 'hidden' }}&gt;&#13;&#10;    &lt;Box style={{ position: 'absolute', left: 64, top: 36, width: '1152px', flexDirection: 'row', alignItems: 'center', gap: 12 }}&gt;&#13;&#10;        &lt;Box style={{ background: '#0E9B78', borderRadius: 5, padding: '3px 11px' }}&gt;&#13;&#10;            &lt;Text style={{ fontSize: 14, fontWeight: 'bold', color: '#FFFFFF' }}&gt;第 25 节&lt;/Text&gt;&#13;&#10;        &lt;/Box&gt;&#13;&#10;        &lt;Text style={{ fontSize: 30, fontWeight: 'bold', color: '#16232E' }}&gt;核心知识点&lt;/Text&gt;&#13;&#10;        &lt;Text style={{ fontSize: 15, color: '#5A6B7A', marginTop: 10 }}&gt;· 遍历时修改与嵌套结构&lt;/Text&gt;&#13;&#10;    &lt;/Box&gt;&#13;&#10;    &lt;Box style={{ position: 'absolute', left: 0, top: 0, width: '1280px', height: '720px' }}&gt;&#13;&#10;        &lt;svg width='1280' height='720' viewBox='0 0 1280 720'&gt;&#13;&#10;            &lt;rect x='64' y='96' width='548' height='330' rx='12' fill='#FFFFFF' stroke='#D8E3EE' /&gt;&lt;rect x='64' y='96' width='548' height='4' rx='2' fill='#1F5FA8' /&gt;&lt;text x='82' y='130' fontSize='15.5' fontWeight='bold' fill='#1F5FA8' textAnchor='start' fontFamily='Microsoft YaHei'&gt;2.6 遍历时能修改字典吗&lt;/text&gt;&lt;text x='82' y='169.0' fontSize='13' fill='#3A4A58' textAnchor='start' fontFamily='Microsoft YaHei'&gt;· 不能。&lt;/text&gt;&lt;rect x='668' y='96' width='548' height='330' rx='12' fill='#FFFFFF' stroke='#D8E3EE' /&gt;&lt;rect x='668' y='96' width='548' height='4' rx='2' fill='#1F5FA8' /&gt;&lt;text x='686' y='130' fontSize='15.5' fontWeight='bold' fill='#1F5FA8' textAnchor='start' fontFamily='Microsoft YaHei'&gt;2.7 嵌套结构：字典的真正威力&lt;/text&gt;&lt;text x='686' y='169.0' fontSize='13' fill='#3A4A58' textAnchor='start' fontFamily='Microsoft YaHei'&gt;· 真实数据几乎都是嵌套的：&lt;/text&gt;&lt;text x='64' y='470' fontSize='14.5' fontWeight='bold' fill='#0E9B78' textAnchor='start' fontFamily='Microsoft YaHei'&gt;本节的代码示例&lt;/text&gt;&lt;text x='64' y='500' fontSize='13' fill='#3A4A58' textAnchor='start' fontFamily='Microsoft YaHei'&gt;· 创建与基本访问&lt;/text&gt;&lt;text x='468' y='500' fontSize='13' fill='#3A4A58' textAnchor='start' fontFamily='Microsoft YaHei'&gt;· 新增、修改、删除&lt;/text&gt;&lt;text x='872' y='500' fontSize='13' fill='#3A4A58' textAnchor='start' fontFamily='Microsoft YaHei'&gt;· 三种遍历方式&lt;/text&gt;&lt;rect x='64' y='574' width='1152' height='66' rx='12' fill='#EEF5FB' /&gt;&lt;text x='84' y='616' fontSize='14' fill='#243444' textAnchor='start' fontFamily='Microsoft YaHei'&gt;看不懂的地方先回讲义对应小节读一遍，再回来对着这页复述一次——能讲出来才算真懂。&lt;/text&gt;&#13;&#10;            &lt;text x='64' y='684' fontSize='13' fill='#8A9AAA' fontFamily='Microsoft YaHei'&gt;Python 讲授课件 · 逐节版&lt;/text&gt;&#13;&#10;            &lt;text x='1216' y='684' fontSize='13' fill='#8A9AAA' textAnchor='end' fontFamily='Microsoft YaHei'&gt;单元 5 · 第 25 节&lt;/text&gt;&#13;&#10;        &lt;/svg&gt;&#13;&#10;    &lt;/Box&gt;&#13;&#10;&lt;/Slide&gt;&#13;&#10;"/>
         <p:cNvGrpSpPr/>
         <p:nvPr/>
       </p:nvGrpSpPr>

--- a/python-course-ppt/逐节课件/Python讲授课件-单元05.pptx
+++ b/python-course-ppt/逐节课件/Python讲授课件-单元05.pptx
@@ -238,1260 +238,6 @@
 </p:notesMaster>
 </file>
 
-<file path=ppt/notesSlides/notesSlide1.xml><?xml version="1.0" encoding="utf-8"?>
-<p:notes xmlns:a="http://schemas.openxmlformats.org/drawingml/2006/main" xmlns:p="http://schemas.openxmlformats.org/presentationml/2006/main" xmlns:r="http://schemas.openxmlformats.org/officeDocument/2006/relationships">
-  <p:cSld>
-    <p:spTree>
-      <p:nvGrpSpPr>
-        <p:cNvPr id="1" name=""/>
-        <p:cNvGrpSpPr/>
-        <p:nvPr/>
-      </p:nvGrpSpPr>
-      <p:grpSpPr>
-        <a:xfrm>
-          <a:off x="0" y="0"/>
-          <a:ext cx="0" cy="0"/>
-          <a:chOff x="0" y="0"/>
-          <a:chExt cx="0" cy="0"/>
-        </a:xfrm>
-      </p:grpSpPr>
-      <p:sp>
-        <p:nvSpPr>
-          <p:cNvPr id="2" name="讲课提示"/>
-          <p:cNvSpPr txBox="1"/>
-          <p:nvPr/>
-        </p:nvSpPr>
-        <p:spPr>
-          <a:xfrm>
-            <a:off x="457200" y="457200"/>
-            <a:ext cx="6858000" cy="4800600"/>
-          </a:xfrm>
-          <a:prstGeom prst="rect">
-            <a:avLst/>
-          </a:prstGeom>
-        </p:spPr>
-        <p:txBody>
-          <a:bodyPr wrap="square"/>
-          <a:lstStyle/>
-          <a:p>
-            <a:r>
-              <a:rPr lang="zh-CN" dirty="0"/>
-              <a:t>单元 5 · 单元 5 · 字典</a:t>
-            </a:r>
-          </a:p>
-          <a:p>
-            <a:r>
-              <a:rPr lang="zh-CN" dirty="0"/>
-              <a:t/>
-            </a:r>
-          </a:p>
-          <a:p>
-            <a:r>
-              <a:rPr lang="zh-CN" dirty="0"/>
-              <a:t>本单元包含以下课节：</a:t>
-            </a:r>
-          </a:p>
-          <a:p>
-            <a:r>
-              <a:rPr lang="zh-CN" dirty="0"/>
-              <a:t>· 第 23 节 字典：按名字找数据</a:t>
-            </a:r>
-          </a:p>
-          <a:p>
-            <a:r>
-              <a:rPr lang="zh-CN" dirty="0"/>
-              <a:t>· 第 24 节 三种遍历与 get() 安全取值</a:t>
-            </a:r>
-          </a:p>
-          <a:p>
-            <a:r>
-              <a:rPr lang="zh-CN" dirty="0"/>
-              <a:t>· 第 25 节 遍历时修改与嵌套结构</a:t>
-            </a:r>
-          </a:p>
-          <a:p>
-            <a:r>
-              <a:rPr lang="zh-CN" dirty="0"/>
-              <a:t>· 第 26 节 动手实战与答案讲评</a:t>
-            </a:r>
-          </a:p>
-          <a:p>
-            <a:r>
-              <a:rPr lang="zh-CN" dirty="0"/>
-              <a:t>· 第 27 节 单元 5 验收复盘</a:t>
-            </a:r>
-          </a:p>
-          <a:p>
-            <a:r>
-              <a:rPr lang="zh-CN" dirty="0"/>
-              <a:t/>
-            </a:r>
-          </a:p>
-          <a:p>
-            <a:r>
-              <a:rPr lang="zh-CN" dirty="0"/>
-              <a:t>开场用 3 分钟讲清：这个单元学完能做出什么，最后会被关卡怎么验。</a:t>
-            </a:r>
-          </a:p>
-        </p:txBody>
-      </p:sp>
-    </p:spTree>
-  </p:cSld>
-  <p:clrMapOvr>
-    <a:masterClrMapping/>
-  </p:clrMapOvr>
-</p:notes>
-</file>
-
-<file path=ppt/notesSlides/notesSlide10.xml><?xml version="1.0" encoding="utf-8"?>
-<p:notes xmlns:a="http://schemas.openxmlformats.org/drawingml/2006/main" xmlns:p="http://schemas.openxmlformats.org/presentationml/2006/main" xmlns:r="http://schemas.openxmlformats.org/officeDocument/2006/relationships">
-  <p:cSld>
-    <p:spTree>
-      <p:nvGrpSpPr>
-        <p:cNvPr id="1" name=""/>
-        <p:cNvGrpSpPr/>
-        <p:nvPr/>
-      </p:nvGrpSpPr>
-      <p:grpSpPr>
-        <a:xfrm>
-          <a:off x="0" y="0"/>
-          <a:ext cx="0" cy="0"/>
-          <a:chOff x="0" y="0"/>
-          <a:chExt cx="0" cy="0"/>
-        </a:xfrm>
-      </p:grpSpPr>
-      <p:sp>
-        <p:nvSpPr>
-          <p:cNvPr id="2" name="讲课提示"/>
-          <p:cNvSpPr txBox="1"/>
-          <p:nvPr/>
-        </p:nvSpPr>
-        <p:spPr>
-          <a:xfrm>
-            <a:off x="457200" y="457200"/>
-            <a:ext cx="6858000" cy="4800600"/>
-          </a:xfrm>
-          <a:prstGeom prst="rect">
-            <a:avLst/>
-          </a:prstGeom>
-        </p:spPr>
-        <p:txBody>
-          <a:bodyPr wrap="square"/>
-          <a:lstStyle/>
-          <a:p>
-            <a:r>
-              <a:rPr lang="zh-CN" dirty="0"/>
-              <a:t>第 27 节 · 单元 5 验收复盘</a:t>
-            </a:r>
-          </a:p>
-          <a:p>
-            <a:r>
-              <a:rPr lang="zh-CN" dirty="0"/>
-              <a:t>单元 5 · 字典 · W5</a:t>
-            </a:r>
-          </a:p>
-          <a:p>
-            <a:r>
-              <a:rPr lang="zh-CN" dirty="0"/>
-              <a:t/>
-            </a:r>
-          </a:p>
-          <a:p>
-            <a:r>
-              <a:rPr lang="zh-CN" dirty="0"/>
-              <a:t>学习目标：确认字典增删改查、三种遍历、嵌套都过关</a:t>
-            </a:r>
-          </a:p>
-          <a:p>
-            <a:r>
-              <a:rPr lang="zh-CN" dirty="0"/>
-              <a:t/>
-            </a:r>
-          </a:p>
-          <a:p>
-            <a:r>
-              <a:rPr lang="zh-CN" dirty="0"/>
-              <a:t>课堂实操（40 分钟，不看答案）：</a:t>
-            </a:r>
-          </a:p>
-          <a:p>
-            <a:r>
-              <a:rPr lang="zh-CN" dirty="0"/>
-              <a:t>· 逐条打勾验收自测</a:t>
-            </a:r>
-          </a:p>
-          <a:p>
-            <a:r>
-              <a:rPr lang="zh-CN" dirty="0"/>
-              <a:t>· 现场演示嵌套数据的提取</a:t>
-            </a:r>
-          </a:p>
-          <a:p>
-            <a:r>
-              <a:rPr lang="zh-CN" dirty="0"/>
-              <a:t/>
-            </a:r>
-          </a:p>
-          <a:p>
-            <a:r>
-              <a:rPr lang="zh-CN" dirty="0"/>
-              <a:t>课后作业：</a:t>
-            </a:r>
-          </a:p>
-          <a:p>
-            <a:r>
-              <a:rPr lang="zh-CN" dirty="0"/>
-              <a:t>· 完成本单元小结与产出检查</a:t>
-            </a:r>
-          </a:p>
-          <a:p>
-            <a:r>
-              <a:rPr lang="zh-CN" dirty="0"/>
-              <a:t/>
-            </a:r>
-          </a:p>
-          <a:p>
-            <a:r>
-              <a:rPr lang="zh-CN" dirty="0"/>
-              <a:t>节奏：讲 20 分钟 → 学员自己敲 40 分钟（不看答案）→ 对讲评自查 20 分钟 → 写作业 10 分钟。</a:t>
-            </a:r>
-          </a:p>
-        </p:txBody>
-      </p:sp>
-    </p:spTree>
-  </p:cSld>
-  <p:clrMapOvr>
-    <a:masterClrMapping/>
-  </p:clrMapOvr>
-</p:notes>
-</file>
-
-<file path=ppt/notesSlides/notesSlide11.xml><?xml version="1.0" encoding="utf-8"?>
-<p:notes xmlns:a="http://schemas.openxmlformats.org/drawingml/2006/main" xmlns:p="http://schemas.openxmlformats.org/presentationml/2006/main" xmlns:r="http://schemas.openxmlformats.org/officeDocument/2006/relationships">
-  <p:cSld>
-    <p:spTree>
-      <p:nvGrpSpPr>
-        <p:cNvPr id="1" name=""/>
-        <p:cNvGrpSpPr/>
-        <p:nvPr/>
-      </p:nvGrpSpPr>
-      <p:grpSpPr>
-        <a:xfrm>
-          <a:off x="0" y="0"/>
-          <a:ext cx="0" cy="0"/>
-          <a:chOff x="0" y="0"/>
-          <a:chExt cx="0" cy="0"/>
-        </a:xfrm>
-      </p:grpSpPr>
-      <p:sp>
-        <p:nvSpPr>
-          <p:cNvPr id="2" name="讲课提示"/>
-          <p:cNvSpPr txBox="1"/>
-          <p:nvPr/>
-        </p:nvSpPr>
-        <p:spPr>
-          <a:xfrm>
-            <a:off x="457200" y="457200"/>
-            <a:ext cx="6858000" cy="4800600"/>
-          </a:xfrm>
-          <a:prstGeom prst="rect">
-            <a:avLst/>
-          </a:prstGeom>
-        </p:spPr>
-        <p:txBody>
-          <a:bodyPr wrap="square"/>
-          <a:lstStyle/>
-          <a:p>
-            <a:r>
-              <a:rPr lang="zh-CN" dirty="0"/>
-              <a:t>第 27 节 · 核心知识点：单元 5 验收复盘</a:t>
-            </a:r>
-          </a:p>
-          <a:p>
-            <a:r>
-              <a:rPr lang="zh-CN" dirty="0"/>
-              <a:t/>
-            </a:r>
-          </a:p>
-          <a:p>
-            <a:r>
-              <a:rPr lang="zh-CN" dirty="0"/>
-              <a:t>讲这一页时：先让学生说出上节课的结论，再逐块讲要点。</a:t>
-            </a:r>
-          </a:p>
-          <a:p>
-            <a:r>
-              <a:rPr lang="zh-CN" dirty="0"/>
-              <a:t>每讲完一块，问一句「这一步如果写错了，报错会长什么样？」——把错误提前讲。</a:t>
-            </a:r>
-          </a:p>
-          <a:p>
-            <a:r>
-              <a:rPr lang="zh-CN" dirty="0"/>
-              <a:t/>
-            </a:r>
-          </a:p>
-          <a:p>
-            <a:r>
-              <a:rPr lang="zh-CN" dirty="0"/>
-              <a:t>本节目标：确认字典增删改查、三种遍历、嵌套都过关</a:t>
-            </a:r>
-          </a:p>
-          <a:p>
-            <a:r>
-              <a:rPr lang="zh-CN" dirty="0"/>
-              <a:t/>
-            </a:r>
-          </a:p>
-          <a:p>
-            <a:r>
-              <a:rPr lang="zh-CN" dirty="0"/>
-              <a:t>看不到懂的地方，回讲义对应小节读一遍，再回来对着这页复述一次——能讲出来才算真懂。</a:t>
-            </a:r>
-          </a:p>
-        </p:txBody>
-      </p:sp>
-    </p:spTree>
-  </p:cSld>
-  <p:clrMapOvr>
-    <a:masterClrMapping/>
-  </p:clrMapOvr>
-</p:notes>
-</file>
-
-<file path=ppt/notesSlides/notesSlide12.xml><?xml version="1.0" encoding="utf-8"?>
-<p:notes xmlns:a="http://schemas.openxmlformats.org/drawingml/2006/main" xmlns:p="http://schemas.openxmlformats.org/presentationml/2006/main" xmlns:r="http://schemas.openxmlformats.org/officeDocument/2006/relationships">
-  <p:cSld>
-    <p:spTree>
-      <p:nvGrpSpPr>
-        <p:cNvPr id="1" name=""/>
-        <p:cNvGrpSpPr/>
-        <p:nvPr/>
-      </p:nvGrpSpPr>
-      <p:grpSpPr>
-        <a:xfrm>
-          <a:off x="0" y="0"/>
-          <a:ext cx="0" cy="0"/>
-          <a:chOff x="0" y="0"/>
-          <a:chExt cx="0" cy="0"/>
-        </a:xfrm>
-      </p:grpSpPr>
-      <p:sp>
-        <p:nvSpPr>
-          <p:cNvPr id="2" name="讲课提示"/>
-          <p:cNvSpPr txBox="1"/>
-          <p:nvPr/>
-        </p:nvSpPr>
-        <p:spPr>
-          <a:xfrm>
-            <a:off x="457200" y="457200"/>
-            <a:ext cx="6858000" cy="4800600"/>
-          </a:xfrm>
-          <a:prstGeom prst="rect">
-            <a:avLst/>
-          </a:prstGeom>
-        </p:spPr>
-        <p:txBody>
-          <a:bodyPr wrap="square"/>
-          <a:lstStyle/>
-          <a:p>
-            <a:r>
-              <a:rPr lang="zh-CN" dirty="0"/>
-              <a:t>单元 5 小结 · 单元 5 · 小结</a:t>
-            </a:r>
-          </a:p>
-          <a:p>
-            <a:r>
-              <a:rPr lang="zh-CN" dirty="0"/>
-              <a:t/>
-            </a:r>
-          </a:p>
-          <a:p>
-            <a:r>
-              <a:rPr lang="zh-CN" dirty="0"/>
-              <a:t>收尾动作：让学生合上讲义，口述本单元三个最重要的结论；说不出来的，回对应课节。</a:t>
-            </a:r>
-          </a:p>
-          <a:p>
-            <a:r>
-              <a:rPr lang="zh-CN" dirty="0"/>
-              <a:t>然后当场勾一遍本单元课节的「已完成」，没打勾的进下一单元前补掉。</a:t>
-            </a:r>
-          </a:p>
-        </p:txBody>
-      </p:sp>
-    </p:spTree>
-  </p:cSld>
-  <p:clrMapOvr>
-    <a:masterClrMapping/>
-  </p:clrMapOvr>
-</p:notes>
-</file>
-
-<file path=ppt/notesSlides/notesSlide2.xml><?xml version="1.0" encoding="utf-8"?>
-<p:notes xmlns:a="http://schemas.openxmlformats.org/drawingml/2006/main" xmlns:p="http://schemas.openxmlformats.org/presentationml/2006/main" xmlns:r="http://schemas.openxmlformats.org/officeDocument/2006/relationships">
-  <p:cSld>
-    <p:spTree>
-      <p:nvGrpSpPr>
-        <p:cNvPr id="1" name=""/>
-        <p:cNvGrpSpPr/>
-        <p:nvPr/>
-      </p:nvGrpSpPr>
-      <p:grpSpPr>
-        <a:xfrm>
-          <a:off x="0" y="0"/>
-          <a:ext cx="0" cy="0"/>
-          <a:chOff x="0" y="0"/>
-          <a:chExt cx="0" cy="0"/>
-        </a:xfrm>
-      </p:grpSpPr>
-      <p:sp>
-        <p:nvSpPr>
-          <p:cNvPr id="2" name="讲课提示"/>
-          <p:cNvSpPr txBox="1"/>
-          <p:nvPr/>
-        </p:nvSpPr>
-        <p:spPr>
-          <a:xfrm>
-            <a:off x="457200" y="457200"/>
-            <a:ext cx="6858000" cy="4800600"/>
-          </a:xfrm>
-          <a:prstGeom prst="rect">
-            <a:avLst/>
-          </a:prstGeom>
-        </p:spPr>
-        <p:txBody>
-          <a:bodyPr wrap="square"/>
-          <a:lstStyle/>
-          <a:p>
-            <a:r>
-              <a:rPr lang="zh-CN" dirty="0"/>
-              <a:t>第 23 节 · 字典：按名字找数据</a:t>
-            </a:r>
-          </a:p>
-          <a:p>
-            <a:r>
-              <a:rPr lang="zh-CN" dirty="0"/>
-              <a:t>单元 5 · 字典 · W5</a:t>
-            </a:r>
-          </a:p>
-          <a:p>
-            <a:r>
-              <a:rPr lang="zh-CN" dirty="0"/>
-              <a:t/>
-            </a:r>
-          </a:p>
-          <a:p>
-            <a:r>
-              <a:rPr lang="zh-CN" dirty="0"/>
-              <a:t>学习目标：理解「列表按位置找、字典按名字找」，掌握键值对增删改</a:t>
-            </a:r>
-          </a:p>
-          <a:p>
-            <a:r>
-              <a:rPr lang="zh-CN" dirty="0"/>
-              <a:t/>
-            </a:r>
-          </a:p>
-          <a:p>
-            <a:r>
-              <a:rPr lang="zh-CN" dirty="0"/>
-              <a:t>课堂实操（40 分钟，不看答案）：</a:t>
-            </a:r>
-          </a:p>
-          <a:p>
-            <a:r>
-              <a:rPr lang="zh-CN" dirty="0"/>
-              <a:t>· 现场把一个列表版数据改成字典版</a:t>
-            </a:r>
-          </a:p>
-          <a:p>
-            <a:r>
-              <a:rPr lang="zh-CN" dirty="0"/>
-              <a:t>· 演示赋值的新增 vs 修改两种含义</a:t>
-            </a:r>
-          </a:p>
-          <a:p>
-            <a:r>
-              <a:rPr lang="zh-CN" dirty="0"/>
-              <a:t/>
-            </a:r>
-          </a:p>
-          <a:p>
-            <a:r>
-              <a:rPr lang="zh-CN" dirty="0"/>
-              <a:t>课后作业：</a:t>
-            </a:r>
-          </a:p>
-          <a:p>
-            <a:r>
-              <a:rPr lang="zh-CN" dirty="0"/>
-              <a:t>· 完成动手练习 5-1 ~ 5-3</a:t>
-            </a:r>
-          </a:p>
-          <a:p>
-            <a:r>
-              <a:rPr lang="zh-CN" dirty="0"/>
-              <a:t/>
-            </a:r>
-          </a:p>
-          <a:p>
-            <a:r>
-              <a:rPr lang="zh-CN" dirty="0"/>
-              <a:t>节奏：讲 20 分钟 → 学员自己敲 40 分钟（不看答案）→ 对讲评自查 20 分钟 → 写作业 10 分钟。</a:t>
-            </a:r>
-          </a:p>
-        </p:txBody>
-      </p:sp>
-    </p:spTree>
-  </p:cSld>
-  <p:clrMapOvr>
-    <a:masterClrMapping/>
-  </p:clrMapOvr>
-</p:notes>
-</file>
-
-<file path=ppt/notesSlides/notesSlide3.xml><?xml version="1.0" encoding="utf-8"?>
-<p:notes xmlns:a="http://schemas.openxmlformats.org/drawingml/2006/main" xmlns:p="http://schemas.openxmlformats.org/presentationml/2006/main" xmlns:r="http://schemas.openxmlformats.org/officeDocument/2006/relationships">
-  <p:cSld>
-    <p:spTree>
-      <p:nvGrpSpPr>
-        <p:cNvPr id="1" name=""/>
-        <p:cNvGrpSpPr/>
-        <p:nvPr/>
-      </p:nvGrpSpPr>
-      <p:grpSpPr>
-        <a:xfrm>
-          <a:off x="0" y="0"/>
-          <a:ext cx="0" cy="0"/>
-          <a:chOff x="0" y="0"/>
-          <a:chExt cx="0" cy="0"/>
-        </a:xfrm>
-      </p:grpSpPr>
-      <p:sp>
-        <p:nvSpPr>
-          <p:cNvPr id="2" name="讲课提示"/>
-          <p:cNvSpPr txBox="1"/>
-          <p:nvPr/>
-        </p:nvSpPr>
-        <p:spPr>
-          <a:xfrm>
-            <a:off x="457200" y="457200"/>
-            <a:ext cx="6858000" cy="4800600"/>
-          </a:xfrm>
-          <a:prstGeom prst="rect">
-            <a:avLst/>
-          </a:prstGeom>
-        </p:spPr>
-        <p:txBody>
-          <a:bodyPr wrap="square"/>
-          <a:lstStyle/>
-          <a:p>
-            <a:r>
-              <a:rPr lang="zh-CN" dirty="0"/>
-              <a:t>第 23 节 · 核心知识点：字典：按名字找数据</a:t>
-            </a:r>
-          </a:p>
-          <a:p>
-            <a:r>
-              <a:rPr lang="zh-CN" dirty="0"/>
-              <a:t/>
-            </a:r>
-          </a:p>
-          <a:p>
-            <a:r>
-              <a:rPr lang="zh-CN" dirty="0"/>
-              <a:t>讲这一页时：先让学生说出上节课的结论，再逐块讲要点。</a:t>
-            </a:r>
-          </a:p>
-          <a:p>
-            <a:r>
-              <a:rPr lang="zh-CN" dirty="0"/>
-              <a:t>每讲完一块，问一句「这一步如果写错了，报错会长什么样？」——把错误提前讲。</a:t>
-            </a:r>
-          </a:p>
-          <a:p>
-            <a:r>
-              <a:rPr lang="zh-CN" dirty="0"/>
-              <a:t/>
-            </a:r>
-          </a:p>
-          <a:p>
-            <a:r>
-              <a:rPr lang="zh-CN" dirty="0"/>
-              <a:t>本节目标：理解「列表按位置找、字典按名字找」，掌握键值对增删改</a:t>
-            </a:r>
-          </a:p>
-          <a:p>
-            <a:r>
-              <a:rPr lang="zh-CN" dirty="0"/>
-              <a:t/>
-            </a:r>
-          </a:p>
-          <a:p>
-            <a:r>
-              <a:rPr lang="zh-CN" dirty="0"/>
-              <a:t>看不到懂的地方，回讲义对应小节读一遍，再回来对着这页复述一次——能讲出来才算真懂。</a:t>
-            </a:r>
-          </a:p>
-        </p:txBody>
-      </p:sp>
-    </p:spTree>
-  </p:cSld>
-  <p:clrMapOvr>
-    <a:masterClrMapping/>
-  </p:clrMapOvr>
-</p:notes>
-</file>
-
-<file path=ppt/notesSlides/notesSlide4.xml><?xml version="1.0" encoding="utf-8"?>
-<p:notes xmlns:a="http://schemas.openxmlformats.org/drawingml/2006/main" xmlns:p="http://schemas.openxmlformats.org/presentationml/2006/main" xmlns:r="http://schemas.openxmlformats.org/officeDocument/2006/relationships">
-  <p:cSld>
-    <p:spTree>
-      <p:nvGrpSpPr>
-        <p:cNvPr id="1" name=""/>
-        <p:cNvGrpSpPr/>
-        <p:nvPr/>
-      </p:nvGrpSpPr>
-      <p:grpSpPr>
-        <a:xfrm>
-          <a:off x="0" y="0"/>
-          <a:ext cx="0" cy="0"/>
-          <a:chOff x="0" y="0"/>
-          <a:chExt cx="0" cy="0"/>
-        </a:xfrm>
-      </p:grpSpPr>
-      <p:sp>
-        <p:nvSpPr>
-          <p:cNvPr id="2" name="讲课提示"/>
-          <p:cNvSpPr txBox="1"/>
-          <p:nvPr/>
-        </p:nvSpPr>
-        <p:spPr>
-          <a:xfrm>
-            <a:off x="457200" y="457200"/>
-            <a:ext cx="6858000" cy="4800600"/>
-          </a:xfrm>
-          <a:prstGeom prst="rect">
-            <a:avLst/>
-          </a:prstGeom>
-        </p:spPr>
-        <p:txBody>
-          <a:bodyPr wrap="square"/>
-          <a:lstStyle/>
-          <a:p>
-            <a:r>
-              <a:rPr lang="zh-CN" dirty="0"/>
-              <a:t>第 24 节 · 三种遍历与 get() 安全取值</a:t>
-            </a:r>
-          </a:p>
-          <a:p>
-            <a:r>
-              <a:rPr lang="zh-CN" dirty="0"/>
-              <a:t>单元 5 · 字典 · W5</a:t>
-            </a:r>
-          </a:p>
-          <a:p>
-            <a:r>
-              <a:rPr lang="zh-CN" dirty="0"/>
-              <a:t/>
-            </a:r>
-          </a:p>
-          <a:p>
-            <a:r>
-              <a:rPr lang="zh-CN" dirty="0"/>
-              <a:t>学习目标：掌握 items / keys / values 三种遍历，知道 get() 为什么不崩</a:t>
-            </a:r>
-          </a:p>
-          <a:p>
-            <a:r>
-              <a:rPr lang="zh-CN" dirty="0"/>
-              <a:t/>
-            </a:r>
-          </a:p>
-          <a:p>
-            <a:r>
-              <a:rPr lang="zh-CN" dirty="0"/>
-              <a:t>课堂实操（40 分钟，不看答案）：</a:t>
-            </a:r>
-          </a:p>
-          <a:p>
-            <a:r>
-              <a:rPr lang="zh-CN" dirty="0"/>
-              <a:t>· 对同一字典用三种方式遍历并比较输出</a:t>
-            </a:r>
-          </a:p>
-          <a:p>
-            <a:r>
-              <a:rPr lang="zh-CN" dirty="0"/>
-              <a:t>· 故意用 [] 取不存在的键看 KeyError</a:t>
-            </a:r>
-          </a:p>
-          <a:p>
-            <a:r>
-              <a:rPr lang="zh-CN" dirty="0"/>
-              <a:t/>
-            </a:r>
-          </a:p>
-          <a:p>
-            <a:r>
-              <a:rPr lang="zh-CN" dirty="0"/>
-              <a:t>课后作业：</a:t>
-            </a:r>
-          </a:p>
-          <a:p>
-            <a:r>
-              <a:rPr lang="zh-CN" dirty="0"/>
-              <a:t>· 完成动手练习 5-4 ~ 5-6</a:t>
-            </a:r>
-          </a:p>
-          <a:p>
-            <a:r>
-              <a:rPr lang="zh-CN" dirty="0"/>
-              <a:t/>
-            </a:r>
-          </a:p>
-          <a:p>
-            <a:r>
-              <a:rPr lang="zh-CN" dirty="0"/>
-              <a:t>节奏：讲 20 分钟 → 学员自己敲 40 分钟（不看答案）→ 对讲评自查 20 分钟 → 写作业 10 分钟。</a:t>
-            </a:r>
-          </a:p>
-        </p:txBody>
-      </p:sp>
-    </p:spTree>
-  </p:cSld>
-  <p:clrMapOvr>
-    <a:masterClrMapping/>
-  </p:clrMapOvr>
-</p:notes>
-</file>
-
-<file path=ppt/notesSlides/notesSlide5.xml><?xml version="1.0" encoding="utf-8"?>
-<p:notes xmlns:a="http://schemas.openxmlformats.org/drawingml/2006/main" xmlns:p="http://schemas.openxmlformats.org/presentationml/2006/main" xmlns:r="http://schemas.openxmlformats.org/officeDocument/2006/relationships">
-  <p:cSld>
-    <p:spTree>
-      <p:nvGrpSpPr>
-        <p:cNvPr id="1" name=""/>
-        <p:cNvGrpSpPr/>
-        <p:nvPr/>
-      </p:nvGrpSpPr>
-      <p:grpSpPr>
-        <a:xfrm>
-          <a:off x="0" y="0"/>
-          <a:ext cx="0" cy="0"/>
-          <a:chOff x="0" y="0"/>
-          <a:chExt cx="0" cy="0"/>
-        </a:xfrm>
-      </p:grpSpPr>
-      <p:sp>
-        <p:nvSpPr>
-          <p:cNvPr id="2" name="讲课提示"/>
-          <p:cNvSpPr txBox="1"/>
-          <p:nvPr/>
-        </p:nvSpPr>
-        <p:spPr>
-          <a:xfrm>
-            <a:off x="457200" y="457200"/>
-            <a:ext cx="6858000" cy="4800600"/>
-          </a:xfrm>
-          <a:prstGeom prst="rect">
-            <a:avLst/>
-          </a:prstGeom>
-        </p:spPr>
-        <p:txBody>
-          <a:bodyPr wrap="square"/>
-          <a:lstStyle/>
-          <a:p>
-            <a:r>
-              <a:rPr lang="zh-CN" dirty="0"/>
-              <a:t>第 24 节 · 核心知识点：三种遍历与 get() 安全取值</a:t>
-            </a:r>
-          </a:p>
-          <a:p>
-            <a:r>
-              <a:rPr lang="zh-CN" dirty="0"/>
-              <a:t/>
-            </a:r>
-          </a:p>
-          <a:p>
-            <a:r>
-              <a:rPr lang="zh-CN" dirty="0"/>
-              <a:t>讲这一页时：先让学生说出上节课的结论，再逐块讲要点。</a:t>
-            </a:r>
-          </a:p>
-          <a:p>
-            <a:r>
-              <a:rPr lang="zh-CN" dirty="0"/>
-              <a:t>每讲完一块，问一句「这一步如果写错了，报错会长什么样？」——把错误提前讲。</a:t>
-            </a:r>
-          </a:p>
-          <a:p>
-            <a:r>
-              <a:rPr lang="zh-CN" dirty="0"/>
-              <a:t/>
-            </a:r>
-          </a:p>
-          <a:p>
-            <a:r>
-              <a:rPr lang="zh-CN" dirty="0"/>
-              <a:t>本节目标：掌握 items / keys / values 三种遍历，知道 get() 为什么不崩</a:t>
-            </a:r>
-          </a:p>
-          <a:p>
-            <a:r>
-              <a:rPr lang="zh-CN" dirty="0"/>
-              <a:t/>
-            </a:r>
-          </a:p>
-          <a:p>
-            <a:r>
-              <a:rPr lang="zh-CN" dirty="0"/>
-              <a:t>看不到懂的地方，回讲义对应小节读一遍，再回来对着这页复述一次——能讲出来才算真懂。</a:t>
-            </a:r>
-          </a:p>
-        </p:txBody>
-      </p:sp>
-    </p:spTree>
-  </p:cSld>
-  <p:clrMapOvr>
-    <a:masterClrMapping/>
-  </p:clrMapOvr>
-</p:notes>
-</file>
-
-<file path=ppt/notesSlides/notesSlide6.xml><?xml version="1.0" encoding="utf-8"?>
-<p:notes xmlns:a="http://schemas.openxmlformats.org/drawingml/2006/main" xmlns:p="http://schemas.openxmlformats.org/presentationml/2006/main" xmlns:r="http://schemas.openxmlformats.org/officeDocument/2006/relationships">
-  <p:cSld>
-    <p:spTree>
-      <p:nvGrpSpPr>
-        <p:cNvPr id="1" name=""/>
-        <p:cNvGrpSpPr/>
-        <p:nvPr/>
-      </p:nvGrpSpPr>
-      <p:grpSpPr>
-        <a:xfrm>
-          <a:off x="0" y="0"/>
-          <a:ext cx="0" cy="0"/>
-          <a:chOff x="0" y="0"/>
-          <a:chExt cx="0" cy="0"/>
-        </a:xfrm>
-      </p:grpSpPr>
-      <p:sp>
-        <p:nvSpPr>
-          <p:cNvPr id="2" name="讲课提示"/>
-          <p:cNvSpPr txBox="1"/>
-          <p:nvPr/>
-        </p:nvSpPr>
-        <p:spPr>
-          <a:xfrm>
-            <a:off x="457200" y="457200"/>
-            <a:ext cx="6858000" cy="4800600"/>
-          </a:xfrm>
-          <a:prstGeom prst="rect">
-            <a:avLst/>
-          </a:prstGeom>
-        </p:spPr>
-        <p:txBody>
-          <a:bodyPr wrap="square"/>
-          <a:lstStyle/>
-          <a:p>
-            <a:r>
-              <a:rPr lang="zh-CN" dirty="0"/>
-              <a:t>第 25 节 · 遍历时修改与嵌套结构</a:t>
-            </a:r>
-          </a:p>
-          <a:p>
-            <a:r>
-              <a:rPr lang="zh-CN" dirty="0"/>
-              <a:t>单元 5 · 字典 · W5</a:t>
-            </a:r>
-          </a:p>
-          <a:p>
-            <a:r>
-              <a:rPr lang="zh-CN" dirty="0"/>
-              <a:t/>
-            </a:r>
-          </a:p>
-          <a:p>
-            <a:r>
-              <a:rPr lang="zh-CN" dirty="0"/>
-              <a:t>学习目标：能处理嵌套结构，为后面学 JSON 打基础</a:t>
-            </a:r>
-          </a:p>
-          <a:p>
-            <a:r>
-              <a:rPr lang="zh-CN" dirty="0"/>
-              <a:t/>
-            </a:r>
-          </a:p>
-          <a:p>
-            <a:r>
-              <a:rPr lang="zh-CN" dirty="0"/>
-              <a:t>课堂实操（40 分钟，不看答案）：</a:t>
-            </a:r>
-          </a:p>
-          <a:p>
-            <a:r>
-              <a:rPr lang="zh-CN" dirty="0"/>
-              <a:t>· 现场把三层嵌套数据一层层打印出来</a:t>
-            </a:r>
-          </a:p>
-          <a:p>
-            <a:r>
-              <a:rPr lang="zh-CN" dirty="0"/>
-              <a:t>· 讨论：为什么 JSON 能被 Python 直接读</a:t>
-            </a:r>
-          </a:p>
-          <a:p>
-            <a:r>
-              <a:rPr lang="zh-CN" dirty="0"/>
-              <a:t/>
-            </a:r>
-          </a:p>
-          <a:p>
-            <a:r>
-              <a:rPr lang="zh-CN" dirty="0"/>
-              <a:t>课后作业：</a:t>
-            </a:r>
-          </a:p>
-          <a:p>
-            <a:r>
-              <a:rPr lang="zh-CN" dirty="0"/>
-              <a:t>· ★ 动手项目 6.1–6.3 生日调查</a:t>
-            </a:r>
-          </a:p>
-          <a:p>
-            <a:r>
-              <a:rPr lang="zh-CN" dirty="0"/>
-              <a:t/>
-            </a:r>
-          </a:p>
-          <a:p>
-            <a:r>
-              <a:rPr lang="zh-CN" dirty="0"/>
-              <a:t>节奏：讲 20 分钟 → 学员自己敲 40 分钟（不看答案）→ 对讲评自查 20 分钟 → 写作业 10 分钟。</a:t>
-            </a:r>
-          </a:p>
-        </p:txBody>
-      </p:sp>
-    </p:spTree>
-  </p:cSld>
-  <p:clrMapOvr>
-    <a:masterClrMapping/>
-  </p:clrMapOvr>
-</p:notes>
-</file>
-
-<file path=ppt/notesSlides/notesSlide7.xml><?xml version="1.0" encoding="utf-8"?>
-<p:notes xmlns:a="http://schemas.openxmlformats.org/drawingml/2006/main" xmlns:p="http://schemas.openxmlformats.org/presentationml/2006/main" xmlns:r="http://schemas.openxmlformats.org/officeDocument/2006/relationships">
-  <p:cSld>
-    <p:spTree>
-      <p:nvGrpSpPr>
-        <p:cNvPr id="1" name=""/>
-        <p:cNvGrpSpPr/>
-        <p:nvPr/>
-      </p:nvGrpSpPr>
-      <p:grpSpPr>
-        <a:xfrm>
-          <a:off x="0" y="0"/>
-          <a:ext cx="0" cy="0"/>
-          <a:chOff x="0" y="0"/>
-          <a:chExt cx="0" cy="0"/>
-        </a:xfrm>
-      </p:grpSpPr>
-      <p:sp>
-        <p:nvSpPr>
-          <p:cNvPr id="2" name="讲课提示"/>
-          <p:cNvSpPr txBox="1"/>
-          <p:nvPr/>
-        </p:nvSpPr>
-        <p:spPr>
-          <a:xfrm>
-            <a:off x="457200" y="457200"/>
-            <a:ext cx="6858000" cy="4800600"/>
-          </a:xfrm>
-          <a:prstGeom prst="rect">
-            <a:avLst/>
-          </a:prstGeom>
-        </p:spPr>
-        <p:txBody>
-          <a:bodyPr wrap="square"/>
-          <a:lstStyle/>
-          <a:p>
-            <a:r>
-              <a:rPr lang="zh-CN" dirty="0"/>
-              <a:t>第 25 节 · 核心知识点：遍历时修改与嵌套结构</a:t>
-            </a:r>
-          </a:p>
-          <a:p>
-            <a:r>
-              <a:rPr lang="zh-CN" dirty="0"/>
-              <a:t/>
-            </a:r>
-          </a:p>
-          <a:p>
-            <a:r>
-              <a:rPr lang="zh-CN" dirty="0"/>
-              <a:t>讲这一页时：先让学生说出上节课的结论，再逐块讲要点。</a:t>
-            </a:r>
-          </a:p>
-          <a:p>
-            <a:r>
-              <a:rPr lang="zh-CN" dirty="0"/>
-              <a:t>每讲完一块，问一句「这一步如果写错了，报错会长什么样？」——把错误提前讲。</a:t>
-            </a:r>
-          </a:p>
-          <a:p>
-            <a:r>
-              <a:rPr lang="zh-CN" dirty="0"/>
-              <a:t/>
-            </a:r>
-          </a:p>
-          <a:p>
-            <a:r>
-              <a:rPr lang="zh-CN" dirty="0"/>
-              <a:t>本节目标：能处理嵌套结构，为后面学 JSON 打基础</a:t>
-            </a:r>
-          </a:p>
-          <a:p>
-            <a:r>
-              <a:rPr lang="zh-CN" dirty="0"/>
-              <a:t/>
-            </a:r>
-          </a:p>
-          <a:p>
-            <a:r>
-              <a:rPr lang="zh-CN" dirty="0"/>
-              <a:t>看不到懂的地方，回讲义对应小节读一遍，再回来对着这页复述一次——能讲出来才算真懂。</a:t>
-            </a:r>
-          </a:p>
-        </p:txBody>
-      </p:sp>
-    </p:spTree>
-  </p:cSld>
-  <p:clrMapOvr>
-    <a:masterClrMapping/>
-  </p:clrMapOvr>
-</p:notes>
-</file>
-
-<file path=ppt/notesSlides/notesSlide8.xml><?xml version="1.0" encoding="utf-8"?>
-<p:notes xmlns:a="http://schemas.openxmlformats.org/drawingml/2006/main" xmlns:p="http://schemas.openxmlformats.org/presentationml/2006/main" xmlns:r="http://schemas.openxmlformats.org/officeDocument/2006/relationships">
-  <p:cSld>
-    <p:spTree>
-      <p:nvGrpSpPr>
-        <p:cNvPr id="1" name=""/>
-        <p:cNvGrpSpPr/>
-        <p:nvPr/>
-      </p:nvGrpSpPr>
-      <p:grpSpPr>
-        <a:xfrm>
-          <a:off x="0" y="0"/>
-          <a:ext cx="0" cy="0"/>
-          <a:chOff x="0" y="0"/>
-          <a:chExt cx="0" cy="0"/>
-        </a:xfrm>
-      </p:grpSpPr>
-      <p:sp>
-        <p:nvSpPr>
-          <p:cNvPr id="2" name="讲课提示"/>
-          <p:cNvSpPr txBox="1"/>
-          <p:nvPr/>
-        </p:nvSpPr>
-        <p:spPr>
-          <a:xfrm>
-            <a:off x="457200" y="457200"/>
-            <a:ext cx="6858000" cy="4800600"/>
-          </a:xfrm>
-          <a:prstGeom prst="rect">
-            <a:avLst/>
-          </a:prstGeom>
-        </p:spPr>
-        <p:txBody>
-          <a:bodyPr wrap="square"/>
-          <a:lstStyle/>
-          <a:p>
-            <a:r>
-              <a:rPr lang="zh-CN" dirty="0"/>
-              <a:t>第 26 节 · 动手实战与答案讲评</a:t>
-            </a:r>
-          </a:p>
-          <a:p>
-            <a:r>
-              <a:rPr lang="zh-CN" dirty="0"/>
-              <a:t>单元 5 · 字典 · W5</a:t>
-            </a:r>
-          </a:p>
-          <a:p>
-            <a:r>
-              <a:rPr lang="zh-CN" dirty="0"/>
-              <a:t/>
-            </a:r>
-          </a:p>
-          <a:p>
-            <a:r>
-              <a:rPr lang="zh-CN" dirty="0"/>
-              <a:t>学习目标：独立完成单元 5 练习，能熟练遍历嵌套数据</a:t>
-            </a:r>
-          </a:p>
-          <a:p>
-            <a:r>
-              <a:rPr lang="zh-CN" dirty="0"/>
-              <a:t/>
-            </a:r>
-          </a:p>
-          <a:p>
-            <a:r>
-              <a:rPr lang="zh-CN" dirty="0"/>
-              <a:t>课堂实操（40 分钟，不看答案）：</a:t>
-            </a:r>
-          </a:p>
-          <a:p>
-            <a:r>
-              <a:rPr lang="zh-CN" dirty="0"/>
-              <a:t>· 限时 30 分钟独立完成基础档</a:t>
-            </a:r>
-          </a:p>
-          <a:p>
-            <a:r>
-              <a:rPr lang="zh-CN" dirty="0"/>
-              <a:t>· 逐题对照答案讲评</a:t>
-            </a:r>
-          </a:p>
-          <a:p>
-            <a:r>
-              <a:rPr lang="zh-CN" dirty="0"/>
-              <a:t/>
-            </a:r>
-          </a:p>
-          <a:p>
-            <a:r>
-              <a:rPr lang="zh-CN" dirty="0"/>
-              <a:t>课后作业：</a:t>
-            </a:r>
-          </a:p>
-          <a:p>
-            <a:r>
-              <a:rPr lang="zh-CN" dirty="0"/>
-              <a:t>· 产出：三种嵌套结构各一组</a:t>
-            </a:r>
-          </a:p>
-          <a:p>
-            <a:r>
-              <a:rPr lang="zh-CN" dirty="0"/>
-              <a:t/>
-            </a:r>
-          </a:p>
-          <a:p>
-            <a:r>
-              <a:rPr lang="zh-CN" dirty="0"/>
-              <a:t>节奏：讲 20 分钟 → 学员自己敲 40 分钟（不看答案）→ 对讲评自查 20 分钟 → 写作业 10 分钟。</a:t>
-            </a:r>
-          </a:p>
-        </p:txBody>
-      </p:sp>
-    </p:spTree>
-  </p:cSld>
-  <p:clrMapOvr>
-    <a:masterClrMapping/>
-  </p:clrMapOvr>
-</p:notes>
-</file>
-
-<file path=ppt/notesSlides/notesSlide9.xml><?xml version="1.0" encoding="utf-8"?>
-<p:notes xmlns:a="http://schemas.openxmlformats.org/drawingml/2006/main" xmlns:p="http://schemas.openxmlformats.org/presentationml/2006/main" xmlns:r="http://schemas.openxmlformats.org/officeDocument/2006/relationships">
-  <p:cSld>
-    <p:spTree>
-      <p:nvGrpSpPr>
-        <p:cNvPr id="1" name=""/>
-        <p:cNvGrpSpPr/>
-        <p:nvPr/>
-      </p:nvGrpSpPr>
-      <p:grpSpPr>
-        <a:xfrm>
-          <a:off x="0" y="0"/>
-          <a:ext cx="0" cy="0"/>
-          <a:chOff x="0" y="0"/>
-          <a:chExt cx="0" cy="0"/>
-        </a:xfrm>
-      </p:grpSpPr>
-      <p:sp>
-        <p:nvSpPr>
-          <p:cNvPr id="2" name="讲课提示"/>
-          <p:cNvSpPr txBox="1"/>
-          <p:nvPr/>
-        </p:nvSpPr>
-        <p:spPr>
-          <a:xfrm>
-            <a:off x="457200" y="457200"/>
-            <a:ext cx="6858000" cy="4800600"/>
-          </a:xfrm>
-          <a:prstGeom prst="rect">
-            <a:avLst/>
-          </a:prstGeom>
-        </p:spPr>
-        <p:txBody>
-          <a:bodyPr wrap="square"/>
-          <a:lstStyle/>
-          <a:p>
-            <a:r>
-              <a:rPr lang="zh-CN" dirty="0"/>
-              <a:t>第 26 节 · 核心知识点：动手实战与答案讲评</a:t>
-            </a:r>
-          </a:p>
-          <a:p>
-            <a:r>
-              <a:rPr lang="zh-CN" dirty="0"/>
-              <a:t/>
-            </a:r>
-          </a:p>
-          <a:p>
-            <a:r>
-              <a:rPr lang="zh-CN" dirty="0"/>
-              <a:t>讲这一页时：先让学生说出上节课的结论，再逐块讲要点。</a:t>
-            </a:r>
-          </a:p>
-          <a:p>
-            <a:r>
-              <a:rPr lang="zh-CN" dirty="0"/>
-              <a:t>每讲完一块，问一句「这一步如果写错了，报错会长什么样？」——把错误提前讲。</a:t>
-            </a:r>
-          </a:p>
-          <a:p>
-            <a:r>
-              <a:rPr lang="zh-CN" dirty="0"/>
-              <a:t/>
-            </a:r>
-          </a:p>
-          <a:p>
-            <a:r>
-              <a:rPr lang="zh-CN" dirty="0"/>
-              <a:t>本节目标：独立完成单元 5 练习，能熟练遍历嵌套数据</a:t>
-            </a:r>
-          </a:p>
-          <a:p>
-            <a:r>
-              <a:rPr lang="zh-CN" dirty="0"/>
-              <a:t/>
-            </a:r>
-          </a:p>
-          <a:p>
-            <a:r>
-              <a:rPr lang="zh-CN" dirty="0"/>
-              <a:t>看不到懂的地方，回讲义对应小节读一遍，再回来对着这页复述一次——能讲出来才算真懂。</a:t>
-            </a:r>
-          </a:p>
-        </p:txBody>
-      </p:sp>
-    </p:spTree>
-  </p:cSld>
-  <p:clrMapOvr>
-    <a:masterClrMapping/>
-  </p:clrMapOvr>
-</p:notes>
-</file>
-
 <file path=ppt/slideLayouts/slideLayout1.xml><?xml version="1.0" encoding="utf-8"?>
 <p:sldLayout xmlns:p="http://schemas.openxmlformats.org/presentationml/2006/main" xmlns:a="http://schemas.openxmlformats.org/drawingml/2006/main">
   <p:cSld name="DEFAULT">
@@ -1809,7 +555,7 @@
   <p:cSld>
     <p:spTree>
       <p:nvGrpSpPr>
-        <p:cNvPr id="1" name="" descr="&lt;Slide style={{ width: '1280px', height: '720px', backgroundColor: '#FAFCFE', padding: 0, position: 'relative', overflow: 'hidden' }}&gt;&#13;&#10;    &lt;Box style={{ position: 'absolute', left: 0, top: 0, width: '1280px', height: '150px', background: '#1F5FA8' }} /&gt;&#13;&#10;    &lt;Box style={{ position: 'absolute', left: 64, top: 34, width: '1152px', flexDirection: 'column' }}&gt;&#13;&#10;        &lt;Text style={{ fontSize: 15, fontWeight: 'bold', color: '#BFD9F2', letterSpacing: 2 }}&gt;阶段 1 · 单元 5&lt;/Text&gt;&#13;&#10;        &lt;Text style={{ fontSize: 38, fontWeight: 'bold', color: '#FFFFFF', marginTop: 6 }}&gt;字典&lt;/Text&gt;&#13;&#10;    &lt;/Box&gt;&#13;&#10;    &lt;Box style={{ position: 'absolute', left: 64, top: 168, width: '1152px', height: 470 }}&gt;&#13;&#10;        &lt;svg width='1152' height='470' viewBox='0 0 1152 470'&gt;&#13;&#10;            &lt;text x='0' y='18' fontSize='15' fontWeight='bold' fill='#16232E' fontFamily='Microsoft YaHei'&gt;本单元共 5 节课&lt;/text&gt;&#13;&#10;            &lt;rect x='0' y='196' width='1152' height='38' rx='7' fill='#FFFFFF' /&gt;&lt;text x='16' y='221' fontSize='15' fontWeight='bold' fill='#1F5FA8' fontFamily='Microsoft YaHei'&gt;第 23 节&lt;/text&gt;&lt;text x='96' y='221' fontSize='15' fill='#16232E' fontFamily='Microsoft YaHei'&gt;字典：按名字找数据&lt;/text&gt;&lt;text x='1080' y='221' fontSize='13' fill='#5A6B7A' textAnchor='end' fontFamily='Microsoft YaHei'&gt;W5&lt;/text&gt;&lt;rect x='0' y='238' width='1152' height='38' rx='7' fill='#F2F7FD' /&gt;&lt;text x='16' y='263' fontSize='15' fontWeight='bold' fill='#1F5FA8' fontFamily='Microsoft YaHei'&gt;第 24 节&lt;/text&gt;&lt;text x='96' y='263' fontSize='15' fill='#16232E' fontFamily='Microsoft YaHei'&gt;三种遍历与 get() 安全取值&lt;/text&gt;&lt;text x='1080' y='263' fontSize='13' fill='#5A6B7A' textAnchor='end' fontFamily='Microsoft YaHei'&gt;W5&lt;/text&gt;&lt;rect x='0' y='280' width='1152' height='38' rx='7' fill='#FFFFFF' /&gt;&lt;text x='16' y='305' fontSize='15' fontWeight='bold' fill='#1F5FA8' fontFamily='Microsoft YaHei'&gt;第 25 节&lt;/text&gt;&lt;text x='96' y='305' fontSize='15' fill='#16232E' fontFamily='Microsoft YaHei'&gt;遍历时修改与嵌套结构&lt;/text&gt;&lt;text x='1080' y='305' fontSize='13' fill='#5A6B7A' textAnchor='end' fontFamily='Microsoft YaHei'&gt;W5&lt;/text&gt;&lt;rect x='0' y='322' width='1152' height='38' rx='7' fill='#F2F7FD' /&gt;&lt;text x='16' y='347' fontSize='15' fontWeight='bold' fill='#1F5FA8' fontFamily='Microsoft YaHei'&gt;第 26 节&lt;/text&gt;&lt;text x='96' y='347' fontSize='15' fill='#16232E' fontFamily='Microsoft YaHei'&gt;动手实战与答案讲评&lt;/text&gt;&lt;text x='1080' y='347' fontSize='13' fill='#5A6B7A' textAnchor='end' fontFamily='Microsoft YaHei'&gt;W5&lt;/text&gt;&lt;rect x='0' y='364' width='1152' height='38' rx='7' fill='#FFFFFF' /&gt;&lt;text x='16' y='389' fontSize='15' fontWeight='bold' fill='#1F5FA8' fontFamily='Microsoft YaHei'&gt;第 27 节&lt;/text&gt;&lt;text x='96' y='389' fontSize='15' fill='#16232E' fontFamily='Microsoft YaHei'&gt;单元 5 验收复盘&lt;/text&gt;&lt;text x='1080' y='389' fontSize='13' fill='#5A6B7A' textAnchor='end' fontFamily='Microsoft YaHei'&gt;W5&lt;/text&gt;&#13;&#10;        &lt;/svg&gt;&#13;&#10;    &lt;/Box&gt;&#13;&#10;    &lt;Box style={{ position: 'absolute', left: 64, bottom: 22, width: '1152px', flexDirection: 'row', justifyContent: 'space-between' }}&gt;&#13;&#10;        &lt;Text style={{ fontSize: 13, color: '#8A9AAA' }}&gt;Python 讲授课件 · 逐节版&lt;/Text&gt;&#13;&#10;        &lt;Text style={{ fontSize: 13, color: '#8A9AAA' }}&gt;单元 5 · 封面&lt;/Text&gt;&#13;&#10;    &lt;/Box&gt;&#13;&#10;&lt;/Slide&gt;&#13;&#10;"/>
+        <p:cNvPr id="1" name="" descr="&lt;Slide style={{ width: '1280px', height: '720px', backgroundColor: '#FAFCFE', padding: 0, position: 'relative', overflow: 'hidden' }}&gt;&#13;&#10;    &lt;Box style={{ position: 'absolute', left: 0, top: 0, width: '1280px', height: '150px', background: '#1F5FA8' }} /&gt;&#13;&#10;    &lt;Box style={{ position: 'absolute', left: 64, top: 34, width: '1152px', flexDirection: 'column' }}&gt;&#13;&#10;        &lt;Text style={{ fontSize: 15, fontWeight: 'bold', color: '#BFD9F2', letterSpacing: 2 }}&gt;阶段 1 · 单元 5&lt;/Text&gt;&#13;&#10;        &lt;Text style={{ fontSize: 38, fontWeight: 'bold', color: '#FFFFFF', marginTop: 6 }}&gt;字典&lt;/Text&gt;&#13;&#10;    &lt;/Box&gt;&#13;&#10;    &lt;Box style={{ position: 'absolute', left: 64, top: 168, width: '1152px', height: 470 }}&gt;&#13;&#10;        &lt;svg width='1152' height='470' viewBox='0 0 1152 470'&gt;&#13;&#10;            &lt;text x='0' y='18' fontSize='15' fontWeight='bold' fill='#16232E' fontFamily='Microsoft YaHei'&gt;本单元共 5 节课&lt;/text&gt;&#13;&#10;            &lt;rect x='0' y='56.0' width='1152' height='48.0' rx='7' fill='#FFFFFF' /&gt;&lt;text x='16' y='85.0' fontSize='15' fontWeight='bold' fill='#1F5FA8' fontFamily='Microsoft YaHei'&gt;第 23 节&lt;/text&gt;&lt;text x='96' y='85.0' fontSize='15' fill='#16232E' fontFamily='Microsoft YaHei'&gt;字典：按名字找数据&lt;/text&gt;&lt;text x='1080' y='85.0' fontSize='13' fill='#5A6B7A' textAnchor='end' fontFamily='Microsoft YaHei'&gt;W5&lt;/text&gt;&lt;rect x='0' y='135.2' width='1152' height='48.0' rx='7' fill='#F2F7FD' /&gt;&lt;text x='16' y='164.2' fontSize='15' fontWeight='bold' fill='#1F5FA8' fontFamily='Microsoft YaHei'&gt;第 24 节&lt;/text&gt;&lt;text x='96' y='164.2' fontSize='15' fill='#16232E' fontFamily='Microsoft YaHei'&gt;三种遍历与 get() 安全取值&lt;/text&gt;&lt;text x='1080' y='164.2' fontSize='13' fill='#5A6B7A' textAnchor='end' fontFamily='Microsoft YaHei'&gt;W5&lt;/text&gt;&lt;rect x='0' y='214.4' width='1152' height='48.0' rx='7' fill='#FFFFFF' /&gt;&lt;text x='16' y='243.4' fontSize='15' fontWeight='bold' fill='#1F5FA8' fontFamily='Microsoft YaHei'&gt;第 25 节&lt;/text&gt;&lt;text x='96' y='243.4' fontSize='15' fill='#16232E' fontFamily='Microsoft YaHei'&gt;遍历时修改与嵌套结构&lt;/text&gt;&lt;text x='1080' y='243.4' fontSize='13' fill='#5A6B7A' textAnchor='end' fontFamily='Microsoft YaHei'&gt;W5&lt;/text&gt;&lt;rect x='0' y='293.6' width='1152' height='48.0' rx='7' fill='#F2F7FD' /&gt;&lt;text x='16' y='322.6' fontSize='15' fontWeight='bold' fill='#1F5FA8' fontFamily='Microsoft YaHei'&gt;第 26 节&lt;/text&gt;&lt;text x='96' y='322.6' fontSize='15' fill='#16232E' fontFamily='Microsoft YaHei'&gt;动手实战与答案讲评&lt;/text&gt;&lt;text x='1080' y='322.6' fontSize='13' fill='#5A6B7A' textAnchor='end' fontFamily='Microsoft YaHei'&gt;W5&lt;/text&gt;&lt;rect x='0' y='372.8' width='1152' height='48.0' rx='7' fill='#FFFFFF' /&gt;&lt;text x='16' y='401.8' fontSize='15' fontWeight='bold' fill='#1F5FA8' fontFamily='Microsoft YaHei'&gt;第 27 节&lt;/text&gt;&lt;text x='96' y='401.8' fontSize='15' fill='#16232E' fontFamily='Microsoft YaHei'&gt;单元 5 验收复盘&lt;/text&gt;&lt;text x='1080' y='401.8' fontSize='13' fill='#5A6B7A' textAnchor='end' fontFamily='Microsoft YaHei'&gt;W5&lt;/text&gt;&#13;&#10;        &lt;/svg&gt;&#13;&#10;    &lt;/Box&gt;&#13;&#10;    &lt;Box style={{ position: 'absolute', left: 64, bottom: 22, width: '1152px', flexDirection: 'row', justifyContent: 'space-between' }}&gt;&#13;&#10;        &lt;Text style={{ fontSize: 13, color: '#8A9AAA' }}&gt;Python 讲授课件 · 逐节版&lt;/Text&gt;&#13;&#10;        &lt;Text style={{ fontSize: 13, color: '#8A9AAA' }}&gt;单元 5 · 封面&lt;/Text&gt;&#13;&#10;    &lt;/Box&gt;&#13;&#10;&lt;/Slide&gt;&#13;&#10;"/>
         <p:cNvGrpSpPr/>
         <p:nvPr/>
       </p:nvGrpSpPr>
@@ -3384,7 +2130,7 @@
   <p:cSld>
     <p:spTree>
       <p:nvGrpSpPr>
-        <p:cNvPr id="42" name="" descr="&lt;Slide style={{ width: '1280px', height: '720px', backgroundColor: '#FAFCFE', padding: 0, position: 'relative', overflow: 'hidden' }}&gt;&#13;&#10;    &lt;Box style={{ position: 'absolute', left: 64, top: 36, width: '1152px', flexDirection: 'row', alignItems: 'center', gap: 12 }}&gt;&#13;&#10;        &lt;Box style={{ background: '#0E9B78', borderRadius: 5, padding: '3px 11px' }}&gt;&#13;&#10;            &lt;Text style={{ fontSize: 14, fontWeight: 'bold', color: '#FFFFFF' }}&gt;第 23 节&lt;/Text&gt;&#13;&#10;        &lt;/Box&gt;&#13;&#10;        &lt;Text style={{ fontSize: 30, fontWeight: 'bold', color: '#16232E' }}&gt;核心知识点&lt;/Text&gt;&#13;&#10;        &lt;Text style={{ fontSize: 15, color: '#5A6B7A', marginTop: 10 }}&gt;· 字典：按名字找数据&lt;/Text&gt;&#13;&#10;    &lt;/Box&gt;&#13;&#10;    &lt;Box style={{ position: 'absolute', left: 0, top: 0, width: '1280px', height: '720px' }}&gt;&#13;&#10;        &lt;svg width='1280' height='720' viewBox='0 0 1280 720'&gt;&#13;&#10;            &lt;rect x='64' y='96' width='368' height='330' rx='12' fill='#FFFFFF' stroke='#D8E3EE' /&gt;&lt;rect x='64' y='96' width='368' height='4' rx='2' fill='#1F5FA8' /&gt;&lt;text x='82' y='130' fontSize='15.5' fontWeight='bold' fill='#1F5FA8' textAnchor='start' fontFamily='Microsoft YaHei'&gt;2.1 列表按位置找，字典按名字找&lt;/text&gt;&lt;text x='82' y='169.0' fontSize='13' fill='#3A4A58' textAnchor='start' fontFamily='Microsoft YaHei'&gt;· 列表 = 一排有编号的抽屉。找东西靠数编号（第 3&lt;/text&gt;&lt;text x='82' y='188.5' fontSize='13' fill='#3A4A58' textAnchor='start' fontFamily='Microsoft YaHei'&gt;个、第 7 个）。&lt;/text&gt;&lt;text x='82' y='217.0' fontSize='13' fill='#3A4A58' textAnchor='start' fontFamily='Microsoft YaHei'&gt;· 字典 = 一个巨大的储物柜，每个柜门上都贴着标签。&lt;/text&gt;&lt;text x='82' y='236.5' fontSize='13' fill='#3A4A58' textAnchor='start' fontFamily='Microsoft YaHei'&gt;找东西靠读标签（&quot;小明&quot; → 拿到他的号码）。&lt;/text&gt;&lt;rect x='468' y='96' width='368' height='330' rx='12' fill='#FFFFFF' stroke='#D8E3EE' /&gt;&lt;rect x='468' y='96' width='368' height='4' rx='2' fill='#1F5FA8' /&gt;&lt;text x='486' y='130' fontSize='15.5' fontWeight='bold' fill='#1F5FA8' textAnchor='start' fontFamily='Microsoft YaHei'&gt;2.2 键值对：key → value&lt;/text&gt;&lt;text x='486' y='169.0' fontSize='13' fill='#3A4A58' textAnchor='start' fontFamily='Microsoft YaHei'&gt;· 键（key）：唯一的标签，充当索引&lt;/text&gt;&lt;text x='486' y='197.5' fontSize='13' fill='#3A4A58' textAnchor='start' fontFamily='Microsoft YaHei'&gt;· 值（value）：这个标签下存的东西&lt;/text&gt;&lt;rect x='872' y='96' width='368' height='330' rx='12' fill='#FFFFFF' stroke='#D8E3EE' /&gt;&lt;rect x='872' y='96' width='368' height='4' rx='2' fill='#1F5FA8' /&gt;&lt;text x='890' y='130' fontSize='15.5' fontWeight='bold' fill='#1F5FA8' textAnchor='start' fontFamily='Microsoft YaHei'&gt;2.3 新增 vs 修改：同一行代码，两种含义&lt;/text&gt;&lt;text x='890' y='169.0' fontSize='13' fill='#3A4A58' textAnchor='start' fontFamily='Microsoft YaHei'&gt;· 这是字典最容易困惑的一点：&lt;/text&gt;&lt;rect x='64' y='574' width='1152' height='66' rx='12' fill='#EEF5FB' /&gt;&lt;text x='84' y='616' fontSize='14' fill='#243444' textAnchor='start' fontFamily='Microsoft YaHei'&gt;看不懂的地方先回讲义对应小节读一遍，再回来对着这页复述一次——能讲出来才算真懂。&lt;/text&gt;&#13;&#10;            &lt;text x='64' y='684' fontSize='13' fill='#8A9AAA' fontFamily='Microsoft YaHei'&gt;Python 讲授课件 · 逐节版&lt;/text&gt;&#13;&#10;            &lt;text x='1216' y='684' fontSize='13' fill='#8A9AAA' textAnchor='end' fontFamily='Microsoft YaHei'&gt;单元 5 · 第 23 节&lt;/text&gt;&#13;&#10;        &lt;/svg&gt;&#13;&#10;    &lt;/Box&gt;&#13;&#10;&lt;/Slide&gt;&#13;&#10;"/>
+        <p:cNvPr id="42" name="" descr="&lt;Slide style={{ width: '1280px', height: '720px', backgroundColor: '#FAFCFE', padding: 0, position: 'relative', overflow: 'hidden' }}&gt;&#13;&#10;    &lt;Box style={{ position: 'absolute', left: 64, top: 36, width: '1152px', flexDirection: 'row', alignItems: 'center', gap: 12 }}&gt;&#13;&#10;        &lt;Box style={{ background: '#0E9B78', borderRadius: 5, padding: '3px 11px' }}&gt;&#13;&#10;            &lt;Text style={{ fontSize: 14, fontWeight: 'bold', color: '#FFFFFF' }}&gt;第 23 节&lt;/Text&gt;&#13;&#10;        &lt;/Box&gt;&#13;&#10;        &lt;Text style={{ fontSize: 30, fontWeight: 'bold', color: '#16232E' }}&gt;核心知识点&lt;/Text&gt;&#13;&#10;        &lt;Text style={{ fontSize: 15, color: '#5A6B7A', marginTop: 10 }}&gt;· 字典：按名字找数据&lt;/Text&gt;&#13;&#10;    &lt;/Box&gt;&#13;&#10;    &lt;Box style={{ position: 'absolute', left: 0, top: 0, width: '1280px', height: '720px' }}&gt;&#13;&#10;        &lt;svg width='1280' height='720' viewBox='0 0 1280 720'&gt;&#13;&#10;            &lt;rect x='64' y='96' width='368' height='330' rx='12' fill='#FFFFFF' stroke='#D8E3EE' /&gt;&lt;rect x='64' y='96' width='368' height='4' rx='2' fill='#1F5FA8' /&gt;&lt;text x='82' y='130' fontSize='15.5' fontWeight='bold' fill='#1F5FA8' textAnchor='start' fontFamily='Microsoft YaHei'&gt;2.1 列表按位置找，字典按名字找&lt;/text&gt;&lt;text x='82' y='169.0' fontSize='13' fill='#3A4A58' textAnchor='start' fontFamily='Microsoft YaHei'&gt;· 列表 = 一排有编号的抽屉。找东西靠数编号（第 3&lt;/text&gt;&lt;text x='82' y='188.5' fontSize='13' fill='#3A4A58' textAnchor='start' fontFamily='Microsoft YaHei'&gt;个、第 7 个）。&lt;/text&gt;&lt;text x='82' y='217.0' fontSize='13' fill='#3A4A58' textAnchor='start' fontFamily='Microsoft YaHei'&gt;· 字典 = 一个巨大的储物柜，每个柜门上都贴着标签。&lt;/text&gt;&lt;text x='82' y='236.5' fontSize='13' fill='#3A4A58' textAnchor='start' fontFamily='Microsoft YaHei'&gt;找东西靠读标签（&quot;小明&quot; → 拿到他的号码）。&lt;/text&gt;&lt;rect x='468' y='96' width='368' height='330' rx='12' fill='#FFFFFF' stroke='#D8E3EE' /&gt;&lt;rect x='468' y='96' width='368' height='4' rx='2' fill='#1F5FA8' /&gt;&lt;text x='486' y='130' fontSize='15.5' fontWeight='bold' fill='#1F5FA8' textAnchor='start' fontFamily='Microsoft YaHei'&gt;2.2 键值对：key → value&lt;/text&gt;&lt;text x='486' y='169.0' fontSize='13' fill='#3A4A58' textAnchor='start' fontFamily='Microsoft YaHei'&gt;· 键（key）：唯一的标签，充当索引&lt;/text&gt;&lt;text x='486' y='197.5' fontSize='13' fill='#3A4A58' textAnchor='start' fontFamily='Microsoft YaHei'&gt;· 值（value）：这个标签下存的东西&lt;/text&gt;&lt;rect x='872' y='96' width='368' height='330' rx='12' fill='#FFFFFF' stroke='#D8E3EE' /&gt;&lt;rect x='872' y='96' width='368' height='4' rx='2' fill='#1F5FA8' /&gt;&lt;text x='890' y='130' fontSize='15.5' fontWeight='bold' fill='#1F5FA8' textAnchor='start' fontFamily='Microsoft YaHei'&gt;2.3 新增 vs 修改：同一行代码，两种含义&lt;/text&gt;&lt;text x='890' y='169.0' fontSize='13' fill='#3A4A58' textAnchor='start' fontFamily='Microsoft YaHei'&gt;· Python 用最优雅的方式处理了这个问题：&lt;/text&gt;&lt;text x='890' y='188.5' fontSize='13' fill='#3A4A58' textAnchor='start' fontFamily='Microsoft YaHei'&gt;赋值语句不关心是新增还是修改，它只看这个键在不在。&lt;/text&gt;&lt;rect x='64' y='574' width='1152' height='66' rx='12' fill='#EEF5FB' /&gt;&lt;text x='84' y='616' fontSize='14' fill='#243444' textAnchor='start' fontFamily='Microsoft YaHei'&gt;看不懂的地方先回讲义对应小节读一遍，再回来对着这页复述一次——能讲出来才算真懂。&lt;/text&gt;&#13;&#10;            &lt;text x='64' y='684' fontSize='13' fill='#8A9AAA' fontFamily='Microsoft YaHei'&gt;Python 讲授课件 · 逐节版&lt;/text&gt;&#13;&#10;            &lt;text x='1216' y='684' fontSize='13' fill='#8A9AAA' textAnchor='end' fontFamily='Microsoft YaHei'&gt;单元 5 · 第 23 节&lt;/text&gt;&#13;&#10;        &lt;/svg&gt;&#13;&#10;    &lt;/Box&gt;&#13;&#10;&lt;/Slide&gt;&#13;&#10;"/>
         <p:cNvGrpSpPr/>
         <p:nvPr/>
       </p:nvGrpSpPr>
@@ -3835,7 +2581,7 @@
   <p:cSld>
     <p:spTree>
       <p:nvGrpSpPr>
-        <p:cNvPr id="55" name="" descr="&lt;Slide style={{ width: '1280px', height: '720px', backgroundColor: '#FAFCFE', padding: 0, position: 'relative', overflow: 'hidden' }}&gt;&#13;&#10;    &lt;Box style={{ position: 'absolute', left: 64, top: 36, width: '1152px', flexDirection: 'row', alignItems: 'center', gap: 12 }}&gt;&#13;&#10;        &lt;Box style={{ background: '#0E9B78', borderRadius: 5, padding: '3px 11px' }}&gt;&#13;&#10;            &lt;Text style={{ fontSize: 14, fontWeight: 'bold', color: '#FFFFFF' }}&gt;第 24 节&lt;/Text&gt;&#13;&#10;        &lt;/Box&gt;&#13;&#10;        &lt;Text style={{ fontSize: 30, fontWeight: 'bold', color: '#16232E' }}&gt;核心知识点&lt;/Text&gt;&#13;&#10;        &lt;Text style={{ fontSize: 15, color: '#5A6B7A', marginTop: 10 }}&gt;· 三种遍历与 get() 安全取值&lt;/Text&gt;&#13;&#10;    &lt;/Box&gt;&#13;&#10;    &lt;Box style={{ position: 'absolute', left: 0, top: 0, width: '1280px', height: '720px' }}&gt;&#13;&#10;        &lt;svg width='1280' height='720' viewBox='0 0 1280 720'&gt;&#13;&#10;            &lt;rect x='64' y='96' width='548' height='330' rx='12' fill='#FFFFFF' stroke='#D8E3EE' /&gt;&lt;rect x='64' y='96' width='548' height='4' rx='2' fill='#1F5FA8' /&gt;&lt;text x='82' y='130' fontSize='15.5' fontWeight='bold' fill='#1F5FA8' textAnchor='start' fontFamily='Microsoft YaHei'&gt;2.4 三种遍历方式&lt;/text&gt;&lt;text x='82' y='169.0' fontSize='13' fill='#3A4A58' textAnchor='start' fontFamily='Microsoft YaHei'&gt;· for key in dict 实际等于 for key in dict.keys()&lt;/text&gt;&lt;rect x='668' y='96' width='548' height='330' rx='12' fill='#FFFFFF' stroke='#D8E3EE' /&gt;&lt;rect x='668' y='96' width='548' height='4' rx='2' fill='#1F5FA8' /&gt;&lt;text x='686' y='130' fontSize='15.5' fontWeight='bold' fill='#1F5FA8' textAnchor='start' fontFamily='Microsoft YaHei'&gt;2.5 .get()：不 crash 的取值方式&lt;/text&gt;&lt;text x='686' y='169.0' fontSize='13' fill='#3A4A58' textAnchor='start' fontFamily='Microsoft YaHei'&gt;· scores = ｛&quot;语文&quot;: 90, &quot;数学&quot;: 85｝&lt;/text&gt;&lt;rect x='64' y='574' width='1152' height='66' rx='12' fill='#EEF5FB' /&gt;&lt;text x='84' y='616' fontSize='14' fill='#243444' textAnchor='start' fontFamily='Microsoft YaHei'&gt;看不懂的地方先回讲义对应小节读一遍，再回来对着这页复述一次——能讲出来才算真懂。&lt;/text&gt;&#13;&#10;            &lt;text x='64' y='684' fontSize='13' fill='#8A9AAA' fontFamily='Microsoft YaHei'&gt;Python 讲授课件 · 逐节版&lt;/text&gt;&#13;&#10;            &lt;text x='1216' y='684' fontSize='13' fill='#8A9AAA' textAnchor='end' fontFamily='Microsoft YaHei'&gt;单元 5 · 第 24 节&lt;/text&gt;&#13;&#10;        &lt;/svg&gt;&#13;&#10;    &lt;/Box&gt;&#13;&#10;&lt;/Slide&gt;&#13;&#10;"/>
+        <p:cNvPr id="55" name="" descr="&lt;Slide style={{ width: '1280px', height: '720px', backgroundColor: '#FAFCFE', padding: 0, position: 'relative', overflow: 'hidden' }}&gt;&#13;&#10;    &lt;Box style={{ position: 'absolute', left: 64, top: 36, width: '1152px', flexDirection: 'row', alignItems: 'center', gap: 12 }}&gt;&#13;&#10;        &lt;Box style={{ background: '#0E9B78', borderRadius: 5, padding: '3px 11px' }}&gt;&#13;&#10;            &lt;Text style={{ fontSize: 14, fontWeight: 'bold', color: '#FFFFFF' }}&gt;第 24 节&lt;/Text&gt;&#13;&#10;        &lt;/Box&gt;&#13;&#10;        &lt;Text style={{ fontSize: 30, fontWeight: 'bold', color: '#16232E' }}&gt;核心知识点&lt;/Text&gt;&#13;&#10;        &lt;Text style={{ fontSize: 15, color: '#5A6B7A', marginTop: 10 }}&gt;· 三种遍历与 get() 安全取值&lt;/Text&gt;&#13;&#10;    &lt;/Box&gt;&#13;&#10;    &lt;Box style={{ position: 'absolute', left: 0, top: 0, width: '1280px', height: '720px' }}&gt;&#13;&#10;        &lt;svg width='1280' height='720' viewBox='0 0 1280 720'&gt;&#13;&#10;            &lt;rect x='64' y='96' width='548' height='330' rx='12' fill='#FFFFFF' stroke='#D8E3EE' /&gt;&lt;rect x='64' y='96' width='548' height='4' rx='2' fill='#1F5FA8' /&gt;&lt;text x='82' y='130' fontSize='15.5' fontWeight='bold' fill='#1F5FA8' textAnchor='start' fontFamily='Microsoft YaHei'&gt;2.4 三种遍历方式&lt;/text&gt;&lt;text x='82' y='169.0' fontSize='13' fill='#3A4A58' textAnchor='start' fontFamily='Microsoft YaHei'&gt;· for key in dict 实际等于 for key in dict.keys()&lt;/text&gt;&lt;rect x='668' y='96' width='548' height='330' rx='12' fill='#FFFFFF' stroke='#D8E3EE' /&gt;&lt;rect x='668' y='96' width='548' height='4' rx='2' fill='#1F5FA8' /&gt;&lt;text x='686' y='130' fontSize='15.5' fontWeight='bold' fill='#1F5FA8' textAnchor='start' fontFamily='Microsoft YaHei'&gt;2.5 .get()：不 crash 的取值方式&lt;/text&gt;&lt;text x='686' y='169.0' fontSize='13' fill='#3A4A58' textAnchor='start' fontFamily='Microsoft YaHei'&gt;· scores[&quot;英语&quot;] 像直接拉开一个可能不存在的抽屉（柜子会&quot;咔哒&quot;响一声表示没有）&lt;/text&gt;&lt;text x='686' y='188.5' fontSize='13' fill='#3A4A58' textAnchor='start' fontFamily='Microsoft YaHei'&gt;…&lt;/text&gt;&lt;text x='686' y='217.0' fontSize='13' fill='#3A4A58' textAnchor='start' fontFamily='Microsoft YaHei'&gt;· .get() 还有一个更妙的地方：链式访问&lt;/text&gt;&lt;text x='686' y='245.5' fontSize='13' fill='#3A4A58' textAnchor='start' fontFamily='Microsoft YaHei'&gt;· 最后那个空字典 ｛｝ 是这个技巧的灵魂——它保证链条不会因为某层缺失而断掉。&lt;/text&gt;&lt;rect x='64' y='574' width='1152' height='66' rx='12' fill='#EEF5FB' /&gt;&lt;text x='84' y='616' fontSize='14' fill='#243444' textAnchor='start' fontFamily='Microsoft YaHei'&gt;看不懂的地方先回讲义对应小节读一遍，再回来对着这页复述一次——能讲出来才算真懂。&lt;/text&gt;&#13;&#10;            &lt;text x='64' y='684' fontSize='13' fill='#8A9AAA' fontFamily='Microsoft YaHei'&gt;Python 讲授课件 · 逐节版&lt;/text&gt;&#13;&#10;            &lt;text x='1216' y='684' fontSize='13' fill='#8A9AAA' textAnchor='end' fontFamily='Microsoft YaHei'&gt;单元 5 · 第 24 节&lt;/text&gt;&#13;&#10;        &lt;/svg&gt;&#13;&#10;    &lt;/Box&gt;&#13;&#10;&lt;/Slide&gt;&#13;&#10;"/>
         <p:cNvGrpSpPr/>
         <p:nvPr/>
       </p:nvGrpSpPr>
@@ -4286,7 +3032,7 @@
   <p:cSld>
     <p:spTree>
       <p:nvGrpSpPr>
-        <p:cNvPr id="68" name="" descr="&lt;Slide style={{ width: '1280px', height: '720px', backgroundColor: '#FAFCFE', padding: 0, position: 'relative', overflow: 'hidden' }}&gt;&#13;&#10;    &lt;Box style={{ position: 'absolute', left: 64, top: 36, width: '1152px', flexDirection: 'row', alignItems: 'center', gap: 12 }}&gt;&#13;&#10;        &lt;Box style={{ background: '#0E9B78', borderRadius: 5, padding: '3px 11px' }}&gt;&#13;&#10;            &lt;Text style={{ fontSize: 14, fontWeight: 'bold', color: '#FFFFFF' }}&gt;第 25 节&lt;/Text&gt;&#13;&#10;        &lt;/Box&gt;&#13;&#10;        &lt;Text style={{ fontSize: 30, fontWeight: 'bold', color: '#16232E' }}&gt;核心知识点&lt;/Text&gt;&#13;&#10;        &lt;Text style={{ fontSize: 15, color: '#5A6B7A', marginTop: 10 }}&gt;· 遍历时修改与嵌套结构&lt;/Text&gt;&#13;&#10;    &lt;/Box&gt;&#13;&#10;    &lt;Box style={{ position: 'absolute', left: 0, top: 0, width: '1280px', height: '720px' }}&gt;&#13;&#10;        &lt;svg width='1280' height='720' viewBox='0 0 1280 720'&gt;&#13;&#10;            &lt;rect x='64' y='96' width='548' height='330' rx='12' fill='#FFFFFF' stroke='#D8E3EE' /&gt;&lt;rect x='64' y='96' width='548' height='4' rx='2' fill='#1F5FA8' /&gt;&lt;text x='82' y='130' fontSize='15.5' fontWeight='bold' fill='#1F5FA8' textAnchor='start' fontFamily='Microsoft YaHei'&gt;2.6 遍历时能修改字典吗&lt;/text&gt;&lt;text x='82' y='169.0' fontSize='13' fill='#3A4A58' textAnchor='start' fontFamily='Microsoft YaHei'&gt;· 不能。&lt;/text&gt;&lt;rect x='668' y='96' width='548' height='330' rx='12' fill='#FFFFFF' stroke='#D8E3EE' /&gt;&lt;rect x='668' y='96' width='548' height='4' rx='2' fill='#1F5FA8' /&gt;&lt;text x='686' y='130' fontSize='15.5' fontWeight='bold' fill='#1F5FA8' textAnchor='start' fontFamily='Microsoft YaHei'&gt;2.7 嵌套结构：字典的真正威力&lt;/text&gt;&lt;text x='686' y='169.0' fontSize='13' fill='#3A4A58' textAnchor='start' fontFamily='Microsoft YaHei'&gt;· 真实数据几乎都是嵌套的：&lt;/text&gt;&lt;text x='64' y='470' fontSize='14.5' fontWeight='bold' fill='#0E9B78' textAnchor='start' fontFamily='Microsoft YaHei'&gt;本节的代码示例&lt;/text&gt;&lt;text x='64' y='500' fontSize='13' fill='#3A4A58' textAnchor='start' fontFamily='Microsoft YaHei'&gt;· 创建与基本访问&lt;/text&gt;&lt;text x='468' y='500' fontSize='13' fill='#3A4A58' textAnchor='start' fontFamily='Microsoft YaHei'&gt;· 新增、修改、删除&lt;/text&gt;&lt;text x='872' y='500' fontSize='13' fill='#3A4A58' textAnchor='start' fontFamily='Microsoft YaHei'&gt;· 三种遍历方式&lt;/text&gt;&lt;rect x='64' y='574' width='1152' height='66' rx='12' fill='#EEF5FB' /&gt;&lt;text x='84' y='616' fontSize='14' fill='#243444' textAnchor='start' fontFamily='Microsoft YaHei'&gt;看不懂的地方先回讲义对应小节读一遍，再回来对着这页复述一次——能讲出来才算真懂。&lt;/text&gt;&#13;&#10;            &lt;text x='64' y='684' fontSize='13' fill='#8A9AAA' fontFamily='Microsoft YaHei'&gt;Python 讲授课件 · 逐节版&lt;/text&gt;&#13;&#10;            &lt;text x='1216' y='684' fontSize='13' fill='#8A9AAA' textAnchor='end' fontFamily='Microsoft YaHei'&gt;单元 5 · 第 25 节&lt;/text&gt;&#13;&#10;        &lt;/svg&gt;&#13;&#10;    &lt;/Box&gt;&#13;&#10;&lt;/Slide&gt;&#13;&#10;"/>
+        <p:cNvPr id="68" name="" descr="&lt;Slide style={{ width: '1280px', height: '720px', backgroundColor: '#FAFCFE', padding: 0, position: 'relative', overflow: 'hidden' }}&gt;&#13;&#10;    &lt;Box style={{ position: 'absolute', left: 64, top: 36, width: '1152px', flexDirection: 'row', alignItems: 'center', gap: 12 }}&gt;&#13;&#10;        &lt;Box style={{ background: '#0E9B78', borderRadius: 5, padding: '3px 11px' }}&gt;&#13;&#10;            &lt;Text style={{ fontSize: 14, fontWeight: 'bold', color: '#FFFFFF' }}&gt;第 25 节&lt;/Text&gt;&#13;&#10;        &lt;/Box&gt;&#13;&#10;        &lt;Text style={{ fontSize: 30, fontWeight: 'bold', color: '#16232E' }}&gt;核心知识点&lt;/Text&gt;&#13;&#10;        &lt;Text style={{ fontSize: 15, color: '#5A6B7A', marginTop: 10 }}&gt;· 遍历时修改与嵌套结构&lt;/Text&gt;&#13;&#10;    &lt;/Box&gt;&#13;&#10;    &lt;Box style={{ position: 'absolute', left: 0, top: 0, width: '1280px', height: '720px' }}&gt;&#13;&#10;        &lt;svg width='1280' height='720' viewBox='0 0 1280 720'&gt;&#13;&#10;            &lt;rect x='64' y='96' width='548' height='330' rx='12' fill='#FFFFFF' stroke='#D8E3EE' /&gt;&lt;rect x='64' y='96' width='548' height='4' rx='2' fill='#1F5FA8' /&gt;&lt;text x='82' y='130' fontSize='15.5' fontWeight='bold' fill='#1F5FA8' textAnchor='start' fontFamily='Microsoft YaHei'&gt;2.6 遍历时能修改字典吗&lt;/text&gt;&lt;text x='82' y='169.0' fontSize='13' fill='#3A4A58' textAnchor='start' fontFamily='Microsoft YaHei'&gt;· 你在点名册上边点名边划掉名字——划掉之后册子的页数变了，念到后面就会跳行出错。&lt;/text&gt;&lt;text x='82' y='197.5' fontSize='13' fill='#3A4A58' textAnchor='start' fontFamily='Microsoft YaHei'&gt;· list(d.keys()) 是浅拷贝键列表，够用了，因为键本身是不可变的。&lt;/text&gt;&lt;rect x='668' y='96' width='548' height='330' rx='12' fill='#FFFFFF' stroke='#D8E3EE' /&gt;&lt;rect x='668' y='96' width='548' height='4' rx='2' fill='#1F5FA8' /&gt;&lt;text x='686' y='130' fontSize='15.5' fontWeight='bold' fill='#1F5FA8' textAnchor='start' fontFamily='Microsoft YaHei'&gt;2.7 嵌套结构：字典的真正威力&lt;/text&gt;&lt;text x='686' y='169.0' fontSize='13' fill='#3A4A58' textAnchor='start' fontFamily='Microsoft YaHei'&gt;· 这一段代码就是单元 11 那个&quot;投票分析器&quot;的核心结构。&lt;/text&gt;&lt;text x='64' y='470' fontSize='14.5' fontWeight='bold' fill='#0E9B78' textAnchor='start' fontFamily='Microsoft YaHei'&gt;本节的代码示例&lt;/text&gt;&lt;text x='64' y='500' fontSize='13' fill='#3A4A58' textAnchor='start' fontFamily='Microsoft YaHei'&gt;· 创建与基本访问&lt;/text&gt;&lt;text x='468' y='500' fontSize='13' fill='#3A4A58' textAnchor='start' fontFamily='Microsoft YaHei'&gt;· 新增、修改、删除&lt;/text&gt;&lt;text x='872' y='500' fontSize='13' fill='#3A4A58' textAnchor='start' fontFamily='Microsoft YaHei'&gt;· 三种遍历方式&lt;/text&gt;&lt;rect x='64' y='574' width='1152' height='66' rx='12' fill='#EEF5FB' /&gt;&lt;text x='84' y='616' fontSize='14' fill='#243444' textAnchor='start' fontFamily='Microsoft YaHei'&gt;看不懂的地方先回讲义对应小节读一遍，再回来对着这页复述一次——能讲出来才算真懂。&lt;/text&gt;&#13;&#10;            &lt;text x='64' y='684' fontSize='13' fill='#8A9AAA' fontFamily='Microsoft YaHei'&gt;Python 讲授课件 · 逐节版&lt;/text&gt;&#13;&#10;            &lt;text x='1216' y='684' fontSize='13' fill='#8A9AAA' textAnchor='end' fontFamily='Microsoft YaHei'&gt;单元 5 · 第 25 节&lt;/text&gt;&#13;&#10;        &lt;/svg&gt;&#13;&#10;    &lt;/Box&gt;&#13;&#10;&lt;/Slide&gt;&#13;&#10;"/>
         <p:cNvGrpSpPr/>
         <p:nvPr/>
       </p:nvGrpSpPr>
@@ -4717,7 +3463,7 @@
   <p:cSld>
     <p:spTree>
       <p:nvGrpSpPr>
-        <p:cNvPr id="81" name="" descr="&lt;Slide style={{ width: '1280px', height: '720px', backgroundColor: '#FAFCFE', padding: 0, position: 'relative', overflow: 'hidden' }}&gt;&#13;&#10;    &lt;Box style={{ position: 'absolute', left: 64, top: 36, width: '1152px', flexDirection: 'row', alignItems: 'center', gap: 12 }}&gt;&#13;&#10;        &lt;Box style={{ background: '#0E9B78', borderRadius: 5, padding: '3px 11px' }}&gt;&#13;&#10;            &lt;Text style={{ fontSize: 14, fontWeight: 'bold', color: '#FFFFFF' }}&gt;第 26 节&lt;/Text&gt;&#13;&#10;        &lt;/Box&gt;&#13;&#10;        &lt;Text style={{ fontSize: 30, fontWeight: 'bold', color: '#16232E' }}&gt;核心知识点&lt;/Text&gt;&#13;&#10;        &lt;Text style={{ fontSize: 15, color: '#5A6B7A', marginTop: 10 }}&gt;· 动手实战与答案讲评&lt;/Text&gt;&#13;&#10;    &lt;/Box&gt;&#13;&#10;    &lt;Box style={{ position: 'absolute', left: 0, top: 0, width: '1280px', height: '720px' }}&gt;&#13;&#10;        &lt;svg width='1280' height='720' viewBox='0 0 1280 720'&gt;&#13;&#10;            &lt;rect x='64' y='96' width='368' height='330' rx='12' fill='#FFFFFF' stroke='#D8E3EE' /&gt;&lt;rect x='64' y='96' width='368' height='4' rx='2' fill='#1F5FA8' /&gt;&lt;text x='82' y='130' fontSize='15.5' fontWeight='bold' fill='#1F5FA8' textAnchor='start' fontFamily='Microsoft YaHei'&gt;基础档&lt;/text&gt;&lt;text x='82' y='169.0' fontSize='13' fill='#3A4A58' textAnchor='start' fontFamily='Microsoft YaHei'&gt;· 练习 5-1【个人信息字典】&lt;/text&gt;&lt;text x='82' y='197.5' fontSize='13' fill='#3A4A58' textAnchor='start' fontFamily='Microsoft YaHei'&gt;· 练习 5-2【通讯录】&lt;/text&gt;&lt;text x='82' y='226.0' fontSize='13' fill='#3A4A58' textAnchor='start' fontFamily='Microsoft YaHei'&gt;· 练习 5-3【成绩单】&lt;/text&gt;&lt;rect x='468' y='96' width='368' height='330' rx='12' fill='#FFFFFF' stroke='#D8E3EE' /&gt;&lt;rect x='468' y='96' width='368' height='4' rx='2' fill='#1F5FA8' /&gt;&lt;text x='486' y='130' fontSize='15.5' fontWeight='bold' fill='#1F5FA8' textAnchor='start' fontFamily='Microsoft YaHei'&gt;进阶档&lt;/text&gt;&lt;text x='486' y='169.0' fontSize='13' fill='#3A4A58' textAnchor='start' fontFamily='Microsoft YaHei'&gt;· 练习 5-4【词频统计器】&lt;/text&gt;&lt;text x='486' y='197.5' fontSize='13' fill='#3A4A58' textAnchor='start' fontFamily='Microsoft YaHei'&gt;· 文本先转小写（.lower()）&lt;/text&gt;&lt;text x='486' y='226.0' fontSize='13' fill='#3A4A58' textAnchor='start' fontFamily='Microsoft YaHei'&gt;· 按空格 split 成单词列表&lt;/text&gt;&lt;rect x='872' y='96' width='368' height='330' rx='12' fill='#FFFFFF' stroke='#D8E3EE' /&gt;&lt;rect x='872' y='96' width='368' height='4' rx='2' fill='#1F5FA8' /&gt;&lt;text x='890' y='130' fontSize='15.5' fontWeight='bold' fill='#1F5FA8' textAnchor='start' fontFamily='Microsoft YaHei'&gt;参考答案 5-1&lt;/text&gt;&lt;text x='890' y='169.0' fontSize='13' fill='#3A4A58' textAnchor='start' fontFamily='Microsoft YaHei'&gt;· me = ｛&lt;/text&gt;&lt;rect x='64' y='574' width='1152' height='66' rx='12' fill='#EEF5FB' /&gt;&lt;text x='84' y='616' fontSize='14' fill='#243444' textAnchor='start' fontFamily='Microsoft YaHei'&gt;看不懂的地方先回讲义对应小节读一遍，再回来对着这页复述一次——能讲出来才算真懂。&lt;/text&gt;&#13;&#10;            &lt;text x='64' y='684' fontSize='13' fill='#8A9AAA' fontFamily='Microsoft YaHei'&gt;Python 讲授课件 · 逐节版&lt;/text&gt;&#13;&#10;            &lt;text x='1216' y='684' fontSize='13' fill='#8A9AAA' textAnchor='end' fontFamily='Microsoft YaHei'&gt;单元 5 · 第 26 节&lt;/text&gt;&#13;&#10;        &lt;/svg&gt;&#13;&#10;    &lt;/Box&gt;&#13;&#10;&lt;/Slide&gt;&#13;&#10;"/>
+        <p:cNvPr id="81" name="" descr="&lt;Slide style={{ width: '1280px', height: '720px', backgroundColor: '#FAFCFE', padding: 0, position: 'relative', overflow: 'hidden' }}&gt;&#13;&#10;    &lt;Box style={{ position: 'absolute', left: 64, top: 36, width: '1152px', flexDirection: 'row', alignItems: 'center', gap: 12 }}&gt;&#13;&#10;        &lt;Box style={{ background: '#0E9B78', borderRadius: 5, padding: '3px 11px' }}&gt;&#13;&#10;            &lt;Text style={{ fontSize: 14, fontWeight: 'bold', color: '#FFFFFF' }}&gt;第 26 节&lt;/Text&gt;&#13;&#10;        &lt;/Box&gt;&#13;&#10;        &lt;Text style={{ fontSize: 30, fontWeight: 'bold', color: '#16232E' }}&gt;核心知识点&lt;/Text&gt;&#13;&#10;        &lt;Text style={{ fontSize: 15, color: '#5A6B7A', marginTop: 10 }}&gt;· 动手实战与答案讲评&lt;/Text&gt;&#13;&#10;    &lt;/Box&gt;&#13;&#10;    &lt;Box style={{ position: 'absolute', left: 0, top: 0, width: '1280px', height: '720px' }}&gt;&#13;&#10;        &lt;svg width='1280' height='720' viewBox='0 0 1280 720'&gt;&#13;&#10;            &lt;rect x='64' y='96' width='368' height='330' rx='12' fill='#FFFFFF' stroke='#D8E3EE' /&gt;&lt;rect x='64' y='96' width='368' height='4' rx='2' fill='#1F5FA8' /&gt;&lt;text x='82' y='130' fontSize='15.5' fontWeight='bold' fill='#1F5FA8' textAnchor='start' fontFamily='Microsoft YaHei'&gt;基础档&lt;/text&gt;&lt;text x='82' y='169.0' fontSize='13' fill='#3A4A58' textAnchor='start' fontFamily='Microsoft YaHei'&gt;· 练习 5-1【个人信息字典】&lt;/text&gt;&lt;text x='82' y='197.5' fontSize='13' fill='#3A4A58' textAnchor='start' fontFamily='Microsoft YaHei'&gt;· 练习 5-2【通讯录】&lt;/text&gt;&lt;text x='82' y='226.0' fontSize='13' fill='#3A4A58' textAnchor='start' fontFamily='Microsoft YaHei'&gt;· 练习 5-3【成绩单】&lt;/text&gt;&lt;rect x='468' y='96' width='368' height='330' rx='12' fill='#FFFFFF' stroke='#D8E3EE' /&gt;&lt;rect x='468' y='96' width='368' height='4' rx='2' fill='#1F5FA8' /&gt;&lt;text x='486' y='130' fontSize='15.5' fontWeight='bold' fill='#1F5FA8' textAnchor='start' fontFamily='Microsoft YaHei'&gt;进阶档&lt;/text&gt;&lt;text x='486' y='169.0' fontSize='13' fill='#3A4A58' textAnchor='start' fontFamily='Microsoft YaHei'&gt;· 练习 5-4【词频统计器】&lt;/text&gt;&lt;text x='486' y='197.5' fontSize='13' fill='#3A4A58' textAnchor='start' fontFamily='Microsoft YaHei'&gt;· 文本先转小写（.lower()）&lt;/text&gt;&lt;text x='486' y='226.0' fontSize='13' fill='#3A4A58' textAnchor='start' fontFamily='Microsoft YaHei'&gt;· 按空格 split 成单词列表&lt;/text&gt;&lt;rect x='872' y='96' width='368' height='330' rx='12' fill='#FFFFFF' stroke='#D8E3EE' /&gt;&lt;rect x='872' y='96' width='368' height='4' rx='2' fill='#1F5FA8' /&gt;&lt;text x='890' y='130' fontSize='15.5' fontWeight='bold' fill='#1F5FA8' textAnchor='start' fontFamily='Microsoft YaHei'&gt;参考答案 5-9&lt;/text&gt;&lt;text x='890' y='169.0' fontSize='13' fill='#3A4A58' textAnchor='start' fontFamily='Microsoft YaHei'&gt;· inventory.items() 同时给出键和值，&lt;/text&gt;&lt;text x='890' y='188.5' fontSize='13' fill='#3A4A58' textAnchor='start' fontFamily='Microsoft YaHei'&gt;是遍历字典最好用的方式…&lt;/text&gt;&lt;rect x='64' y='574' width='1152' height='66' rx='12' fill='#EEF5FB' /&gt;&lt;text x='84' y='616' fontSize='14' fill='#243444' textAnchor='start' fontFamily='Microsoft YaHei'&gt;看不懂的地方先回讲义对应小节读一遍，再回来对着这页复述一次——能讲出来才算真懂。&lt;/text&gt;&#13;&#10;            &lt;text x='64' y='684' fontSize='13' fill='#8A9AAA' fontFamily='Microsoft YaHei'&gt;Python 讲授课件 · 逐节版&lt;/text&gt;&#13;&#10;            &lt;text x='1216' y='684' fontSize='13' fill='#8A9AAA' textAnchor='end' fontFamily='Microsoft YaHei'&gt;单元 5 · 第 26 节&lt;/text&gt;&#13;&#10;        &lt;/svg&gt;&#13;&#10;    &lt;/Box&gt;&#13;&#10;&lt;/Slide&gt;&#13;&#10;"/>
         <p:cNvGrpSpPr/>
         <p:nvPr/>
       </p:nvGrpSpPr>

--- a/python-course-ppt/逐节课件/Python讲授课件-单元05.pptx
+++ b/python-course-ppt/逐节课件/Python讲授课件-单元05.pptx
@@ -236,6 +236,1260 @@
     </a:lvl9pPr>
   </p:notesStyle>
 </p:notesMaster>
+</file>
+
+<file path=ppt/notesSlides/notesSlide1.xml><?xml version="1.0" encoding="utf-8"?>
+<p:notes xmlns:a="http://schemas.openxmlformats.org/drawingml/2006/main" xmlns:p="http://schemas.openxmlformats.org/presentationml/2006/main" xmlns:r="http://schemas.openxmlformats.org/officeDocument/2006/relationships">
+  <p:cSld>
+    <p:spTree>
+      <p:nvGrpSpPr>
+        <p:cNvPr id="1" name=""/>
+        <p:cNvGrpSpPr/>
+        <p:nvPr/>
+      </p:nvGrpSpPr>
+      <p:grpSpPr>
+        <a:xfrm>
+          <a:off x="0" y="0"/>
+          <a:ext cx="0" cy="0"/>
+          <a:chOff x="0" y="0"/>
+          <a:chExt cx="0" cy="0"/>
+        </a:xfrm>
+      </p:grpSpPr>
+      <p:sp>
+        <p:nvSpPr>
+          <p:cNvPr id="2" name="讲课提示"/>
+          <p:cNvSpPr txBox="1"/>
+          <p:nvPr/>
+        </p:nvSpPr>
+        <p:spPr>
+          <a:xfrm>
+            <a:off x="457200" y="457200"/>
+            <a:ext cx="6858000" cy="4800600"/>
+          </a:xfrm>
+          <a:prstGeom prst="rect">
+            <a:avLst/>
+          </a:prstGeom>
+        </p:spPr>
+        <p:txBody>
+          <a:bodyPr wrap="square"/>
+          <a:lstStyle/>
+          <a:p>
+            <a:r>
+              <a:rPr lang="zh-CN" dirty="0"/>
+              <a:t>单元 5 · 单元 5 · 字典</a:t>
+            </a:r>
+          </a:p>
+          <a:p>
+            <a:r>
+              <a:rPr lang="zh-CN" dirty="0"/>
+              <a:t/>
+            </a:r>
+          </a:p>
+          <a:p>
+            <a:r>
+              <a:rPr lang="zh-CN" dirty="0"/>
+              <a:t>本单元包含以下课节：</a:t>
+            </a:r>
+          </a:p>
+          <a:p>
+            <a:r>
+              <a:rPr lang="zh-CN" dirty="0"/>
+              <a:t>· 第 23 节 字典：按名字找数据</a:t>
+            </a:r>
+          </a:p>
+          <a:p>
+            <a:r>
+              <a:rPr lang="zh-CN" dirty="0"/>
+              <a:t>· 第 24 节 三种遍历与 get() 安全取值</a:t>
+            </a:r>
+          </a:p>
+          <a:p>
+            <a:r>
+              <a:rPr lang="zh-CN" dirty="0"/>
+              <a:t>· 第 25 节 遍历时修改与嵌套结构</a:t>
+            </a:r>
+          </a:p>
+          <a:p>
+            <a:r>
+              <a:rPr lang="zh-CN" dirty="0"/>
+              <a:t>· 第 26 节 动手实战与答案讲评</a:t>
+            </a:r>
+          </a:p>
+          <a:p>
+            <a:r>
+              <a:rPr lang="zh-CN" dirty="0"/>
+              <a:t>· 第 27 节 单元 5 验收复盘</a:t>
+            </a:r>
+          </a:p>
+          <a:p>
+            <a:r>
+              <a:rPr lang="zh-CN" dirty="0"/>
+              <a:t/>
+            </a:r>
+          </a:p>
+          <a:p>
+            <a:r>
+              <a:rPr lang="zh-CN" dirty="0"/>
+              <a:t>开场用 3 分钟讲清：这个单元学完能做出什么，最后会被关卡怎么验。</a:t>
+            </a:r>
+          </a:p>
+        </p:txBody>
+      </p:sp>
+    </p:spTree>
+  </p:cSld>
+  <p:clrMapOvr>
+    <a:masterClrMapping/>
+  </p:clrMapOvr>
+</p:notes>
+</file>
+
+<file path=ppt/notesSlides/notesSlide10.xml><?xml version="1.0" encoding="utf-8"?>
+<p:notes xmlns:a="http://schemas.openxmlformats.org/drawingml/2006/main" xmlns:p="http://schemas.openxmlformats.org/presentationml/2006/main" xmlns:r="http://schemas.openxmlformats.org/officeDocument/2006/relationships">
+  <p:cSld>
+    <p:spTree>
+      <p:nvGrpSpPr>
+        <p:cNvPr id="1" name=""/>
+        <p:cNvGrpSpPr/>
+        <p:nvPr/>
+      </p:nvGrpSpPr>
+      <p:grpSpPr>
+        <a:xfrm>
+          <a:off x="0" y="0"/>
+          <a:ext cx="0" cy="0"/>
+          <a:chOff x="0" y="0"/>
+          <a:chExt cx="0" cy="0"/>
+        </a:xfrm>
+      </p:grpSpPr>
+      <p:sp>
+        <p:nvSpPr>
+          <p:cNvPr id="2" name="讲课提示"/>
+          <p:cNvSpPr txBox="1"/>
+          <p:nvPr/>
+        </p:nvSpPr>
+        <p:spPr>
+          <a:xfrm>
+            <a:off x="457200" y="457200"/>
+            <a:ext cx="6858000" cy="4800600"/>
+          </a:xfrm>
+          <a:prstGeom prst="rect">
+            <a:avLst/>
+          </a:prstGeom>
+        </p:spPr>
+        <p:txBody>
+          <a:bodyPr wrap="square"/>
+          <a:lstStyle/>
+          <a:p>
+            <a:r>
+              <a:rPr lang="zh-CN" dirty="0"/>
+              <a:t>第 27 节 · 单元 5 验收复盘</a:t>
+            </a:r>
+          </a:p>
+          <a:p>
+            <a:r>
+              <a:rPr lang="zh-CN" dirty="0"/>
+              <a:t>单元 5 · 字典 · W5</a:t>
+            </a:r>
+          </a:p>
+          <a:p>
+            <a:r>
+              <a:rPr lang="zh-CN" dirty="0"/>
+              <a:t/>
+            </a:r>
+          </a:p>
+          <a:p>
+            <a:r>
+              <a:rPr lang="zh-CN" dirty="0"/>
+              <a:t>学习目标：确认字典增删改查、三种遍历、嵌套都过关</a:t>
+            </a:r>
+          </a:p>
+          <a:p>
+            <a:r>
+              <a:rPr lang="zh-CN" dirty="0"/>
+              <a:t/>
+            </a:r>
+          </a:p>
+          <a:p>
+            <a:r>
+              <a:rPr lang="zh-CN" dirty="0"/>
+              <a:t>课堂实操（40 分钟，不看答案）：</a:t>
+            </a:r>
+          </a:p>
+          <a:p>
+            <a:r>
+              <a:rPr lang="zh-CN" dirty="0"/>
+              <a:t>· 逐条打勾验收自测</a:t>
+            </a:r>
+          </a:p>
+          <a:p>
+            <a:r>
+              <a:rPr lang="zh-CN" dirty="0"/>
+              <a:t>· 现场演示嵌套数据的提取</a:t>
+            </a:r>
+          </a:p>
+          <a:p>
+            <a:r>
+              <a:rPr lang="zh-CN" dirty="0"/>
+              <a:t/>
+            </a:r>
+          </a:p>
+          <a:p>
+            <a:r>
+              <a:rPr lang="zh-CN" dirty="0"/>
+              <a:t>课后作业：</a:t>
+            </a:r>
+          </a:p>
+          <a:p>
+            <a:r>
+              <a:rPr lang="zh-CN" dirty="0"/>
+              <a:t>· 完成本单元小结与产出检查</a:t>
+            </a:r>
+          </a:p>
+          <a:p>
+            <a:r>
+              <a:rPr lang="zh-CN" dirty="0"/>
+              <a:t/>
+            </a:r>
+          </a:p>
+          <a:p>
+            <a:r>
+              <a:rPr lang="zh-CN" dirty="0"/>
+              <a:t>节奏：讲 20 分钟 → 学员自己敲 40 分钟（不看答案）→ 对讲评自查 20 分钟 → 写作业 10 分钟。</a:t>
+            </a:r>
+          </a:p>
+        </p:txBody>
+      </p:sp>
+    </p:spTree>
+  </p:cSld>
+  <p:clrMapOvr>
+    <a:masterClrMapping/>
+  </p:clrMapOvr>
+</p:notes>
+</file>
+
+<file path=ppt/notesSlides/notesSlide11.xml><?xml version="1.0" encoding="utf-8"?>
+<p:notes xmlns:a="http://schemas.openxmlformats.org/drawingml/2006/main" xmlns:p="http://schemas.openxmlformats.org/presentationml/2006/main" xmlns:r="http://schemas.openxmlformats.org/officeDocument/2006/relationships">
+  <p:cSld>
+    <p:spTree>
+      <p:nvGrpSpPr>
+        <p:cNvPr id="1" name=""/>
+        <p:cNvGrpSpPr/>
+        <p:nvPr/>
+      </p:nvGrpSpPr>
+      <p:grpSpPr>
+        <a:xfrm>
+          <a:off x="0" y="0"/>
+          <a:ext cx="0" cy="0"/>
+          <a:chOff x="0" y="0"/>
+          <a:chExt cx="0" cy="0"/>
+        </a:xfrm>
+      </p:grpSpPr>
+      <p:sp>
+        <p:nvSpPr>
+          <p:cNvPr id="2" name="讲课提示"/>
+          <p:cNvSpPr txBox="1"/>
+          <p:nvPr/>
+        </p:nvSpPr>
+        <p:spPr>
+          <a:xfrm>
+            <a:off x="457200" y="457200"/>
+            <a:ext cx="6858000" cy="4800600"/>
+          </a:xfrm>
+          <a:prstGeom prst="rect">
+            <a:avLst/>
+          </a:prstGeom>
+        </p:spPr>
+        <p:txBody>
+          <a:bodyPr wrap="square"/>
+          <a:lstStyle/>
+          <a:p>
+            <a:r>
+              <a:rPr lang="zh-CN" dirty="0"/>
+              <a:t>第 27 节 · 核心知识点：单元 5 验收复盘</a:t>
+            </a:r>
+          </a:p>
+          <a:p>
+            <a:r>
+              <a:rPr lang="zh-CN" dirty="0"/>
+              <a:t/>
+            </a:r>
+          </a:p>
+          <a:p>
+            <a:r>
+              <a:rPr lang="zh-CN" dirty="0"/>
+              <a:t>讲这一页时：先让学生说出上节课的结论，再逐块讲要点。</a:t>
+            </a:r>
+          </a:p>
+          <a:p>
+            <a:r>
+              <a:rPr lang="zh-CN" dirty="0"/>
+              <a:t>每讲完一块，问一句「这一步如果写错了，报错会长什么样？」——把错误提前讲。</a:t>
+            </a:r>
+          </a:p>
+          <a:p>
+            <a:r>
+              <a:rPr lang="zh-CN" dirty="0"/>
+              <a:t/>
+            </a:r>
+          </a:p>
+          <a:p>
+            <a:r>
+              <a:rPr lang="zh-CN" dirty="0"/>
+              <a:t>本节目标：确认字典增删改查、三种遍历、嵌套都过关</a:t>
+            </a:r>
+          </a:p>
+          <a:p>
+            <a:r>
+              <a:rPr lang="zh-CN" dirty="0"/>
+              <a:t/>
+            </a:r>
+          </a:p>
+          <a:p>
+            <a:r>
+              <a:rPr lang="zh-CN" dirty="0"/>
+              <a:t>看不到懂的地方，回讲义对应小节读一遍，再回来对着这页复述一次——能讲出来才算真懂。</a:t>
+            </a:r>
+          </a:p>
+        </p:txBody>
+      </p:sp>
+    </p:spTree>
+  </p:cSld>
+  <p:clrMapOvr>
+    <a:masterClrMapping/>
+  </p:clrMapOvr>
+</p:notes>
+</file>
+
+<file path=ppt/notesSlides/notesSlide12.xml><?xml version="1.0" encoding="utf-8"?>
+<p:notes xmlns:a="http://schemas.openxmlformats.org/drawingml/2006/main" xmlns:p="http://schemas.openxmlformats.org/presentationml/2006/main" xmlns:r="http://schemas.openxmlformats.org/officeDocument/2006/relationships">
+  <p:cSld>
+    <p:spTree>
+      <p:nvGrpSpPr>
+        <p:cNvPr id="1" name=""/>
+        <p:cNvGrpSpPr/>
+        <p:nvPr/>
+      </p:nvGrpSpPr>
+      <p:grpSpPr>
+        <a:xfrm>
+          <a:off x="0" y="0"/>
+          <a:ext cx="0" cy="0"/>
+          <a:chOff x="0" y="0"/>
+          <a:chExt cx="0" cy="0"/>
+        </a:xfrm>
+      </p:grpSpPr>
+      <p:sp>
+        <p:nvSpPr>
+          <p:cNvPr id="2" name="讲课提示"/>
+          <p:cNvSpPr txBox="1"/>
+          <p:nvPr/>
+        </p:nvSpPr>
+        <p:spPr>
+          <a:xfrm>
+            <a:off x="457200" y="457200"/>
+            <a:ext cx="6858000" cy="4800600"/>
+          </a:xfrm>
+          <a:prstGeom prst="rect">
+            <a:avLst/>
+          </a:prstGeom>
+        </p:spPr>
+        <p:txBody>
+          <a:bodyPr wrap="square"/>
+          <a:lstStyle/>
+          <a:p>
+            <a:r>
+              <a:rPr lang="zh-CN" dirty="0"/>
+              <a:t>单元 5 小结 · 单元 5 · 小结</a:t>
+            </a:r>
+          </a:p>
+          <a:p>
+            <a:r>
+              <a:rPr lang="zh-CN" dirty="0"/>
+              <a:t/>
+            </a:r>
+          </a:p>
+          <a:p>
+            <a:r>
+              <a:rPr lang="zh-CN" dirty="0"/>
+              <a:t>收尾动作：让学生合上讲义，口述本单元三个最重要的结论；说不出来的，回对应课节。</a:t>
+            </a:r>
+          </a:p>
+          <a:p>
+            <a:r>
+              <a:rPr lang="zh-CN" dirty="0"/>
+              <a:t>然后当场勾一遍本单元课节的「已完成」，没打勾的进下一单元前补掉。</a:t>
+            </a:r>
+          </a:p>
+        </p:txBody>
+      </p:sp>
+    </p:spTree>
+  </p:cSld>
+  <p:clrMapOvr>
+    <a:masterClrMapping/>
+  </p:clrMapOvr>
+</p:notes>
+</file>
+
+<file path=ppt/notesSlides/notesSlide2.xml><?xml version="1.0" encoding="utf-8"?>
+<p:notes xmlns:a="http://schemas.openxmlformats.org/drawingml/2006/main" xmlns:p="http://schemas.openxmlformats.org/presentationml/2006/main" xmlns:r="http://schemas.openxmlformats.org/officeDocument/2006/relationships">
+  <p:cSld>
+    <p:spTree>
+      <p:nvGrpSpPr>
+        <p:cNvPr id="1" name=""/>
+        <p:cNvGrpSpPr/>
+        <p:nvPr/>
+      </p:nvGrpSpPr>
+      <p:grpSpPr>
+        <a:xfrm>
+          <a:off x="0" y="0"/>
+          <a:ext cx="0" cy="0"/>
+          <a:chOff x="0" y="0"/>
+          <a:chExt cx="0" cy="0"/>
+        </a:xfrm>
+      </p:grpSpPr>
+      <p:sp>
+        <p:nvSpPr>
+          <p:cNvPr id="2" name="讲课提示"/>
+          <p:cNvSpPr txBox="1"/>
+          <p:nvPr/>
+        </p:nvSpPr>
+        <p:spPr>
+          <a:xfrm>
+            <a:off x="457200" y="457200"/>
+            <a:ext cx="6858000" cy="4800600"/>
+          </a:xfrm>
+          <a:prstGeom prst="rect">
+            <a:avLst/>
+          </a:prstGeom>
+        </p:spPr>
+        <p:txBody>
+          <a:bodyPr wrap="square"/>
+          <a:lstStyle/>
+          <a:p>
+            <a:r>
+              <a:rPr lang="zh-CN" dirty="0"/>
+              <a:t>第 23 节 · 字典：按名字找数据</a:t>
+            </a:r>
+          </a:p>
+          <a:p>
+            <a:r>
+              <a:rPr lang="zh-CN" dirty="0"/>
+              <a:t>单元 5 · 字典 · W5</a:t>
+            </a:r>
+          </a:p>
+          <a:p>
+            <a:r>
+              <a:rPr lang="zh-CN" dirty="0"/>
+              <a:t/>
+            </a:r>
+          </a:p>
+          <a:p>
+            <a:r>
+              <a:rPr lang="zh-CN" dirty="0"/>
+              <a:t>学习目标：理解「列表按位置找、字典按名字找」，掌握键值对增删改</a:t>
+            </a:r>
+          </a:p>
+          <a:p>
+            <a:r>
+              <a:rPr lang="zh-CN" dirty="0"/>
+              <a:t/>
+            </a:r>
+          </a:p>
+          <a:p>
+            <a:r>
+              <a:rPr lang="zh-CN" dirty="0"/>
+              <a:t>课堂实操（40 分钟，不看答案）：</a:t>
+            </a:r>
+          </a:p>
+          <a:p>
+            <a:r>
+              <a:rPr lang="zh-CN" dirty="0"/>
+              <a:t>· 现场把一个列表版数据改成字典版</a:t>
+            </a:r>
+          </a:p>
+          <a:p>
+            <a:r>
+              <a:rPr lang="zh-CN" dirty="0"/>
+              <a:t>· 演示赋值的新增 vs 修改两种含义</a:t>
+            </a:r>
+          </a:p>
+          <a:p>
+            <a:r>
+              <a:rPr lang="zh-CN" dirty="0"/>
+              <a:t/>
+            </a:r>
+          </a:p>
+          <a:p>
+            <a:r>
+              <a:rPr lang="zh-CN" dirty="0"/>
+              <a:t>课后作业：</a:t>
+            </a:r>
+          </a:p>
+          <a:p>
+            <a:r>
+              <a:rPr lang="zh-CN" dirty="0"/>
+              <a:t>· 完成动手练习 5-1 ~ 5-3</a:t>
+            </a:r>
+          </a:p>
+          <a:p>
+            <a:r>
+              <a:rPr lang="zh-CN" dirty="0"/>
+              <a:t/>
+            </a:r>
+          </a:p>
+          <a:p>
+            <a:r>
+              <a:rPr lang="zh-CN" dirty="0"/>
+              <a:t>节奏：讲 20 分钟 → 学员自己敲 40 分钟（不看答案）→ 对讲评自查 20 分钟 → 写作业 10 分钟。</a:t>
+            </a:r>
+          </a:p>
+        </p:txBody>
+      </p:sp>
+    </p:spTree>
+  </p:cSld>
+  <p:clrMapOvr>
+    <a:masterClrMapping/>
+  </p:clrMapOvr>
+</p:notes>
+</file>
+
+<file path=ppt/notesSlides/notesSlide3.xml><?xml version="1.0" encoding="utf-8"?>
+<p:notes xmlns:a="http://schemas.openxmlformats.org/drawingml/2006/main" xmlns:p="http://schemas.openxmlformats.org/presentationml/2006/main" xmlns:r="http://schemas.openxmlformats.org/officeDocument/2006/relationships">
+  <p:cSld>
+    <p:spTree>
+      <p:nvGrpSpPr>
+        <p:cNvPr id="1" name=""/>
+        <p:cNvGrpSpPr/>
+        <p:nvPr/>
+      </p:nvGrpSpPr>
+      <p:grpSpPr>
+        <a:xfrm>
+          <a:off x="0" y="0"/>
+          <a:ext cx="0" cy="0"/>
+          <a:chOff x="0" y="0"/>
+          <a:chExt cx="0" cy="0"/>
+        </a:xfrm>
+      </p:grpSpPr>
+      <p:sp>
+        <p:nvSpPr>
+          <p:cNvPr id="2" name="讲课提示"/>
+          <p:cNvSpPr txBox="1"/>
+          <p:nvPr/>
+        </p:nvSpPr>
+        <p:spPr>
+          <a:xfrm>
+            <a:off x="457200" y="457200"/>
+            <a:ext cx="6858000" cy="4800600"/>
+          </a:xfrm>
+          <a:prstGeom prst="rect">
+            <a:avLst/>
+          </a:prstGeom>
+        </p:spPr>
+        <p:txBody>
+          <a:bodyPr wrap="square"/>
+          <a:lstStyle/>
+          <a:p>
+            <a:r>
+              <a:rPr lang="zh-CN" dirty="0"/>
+              <a:t>第 23 节 · 核心知识点：字典：按名字找数据</a:t>
+            </a:r>
+          </a:p>
+          <a:p>
+            <a:r>
+              <a:rPr lang="zh-CN" dirty="0"/>
+              <a:t/>
+            </a:r>
+          </a:p>
+          <a:p>
+            <a:r>
+              <a:rPr lang="zh-CN" dirty="0"/>
+              <a:t>讲这一页时：先让学生说出上节课的结论，再逐块讲要点。</a:t>
+            </a:r>
+          </a:p>
+          <a:p>
+            <a:r>
+              <a:rPr lang="zh-CN" dirty="0"/>
+              <a:t>每讲完一块，问一句「这一步如果写错了，报错会长什么样？」——把错误提前讲。</a:t>
+            </a:r>
+          </a:p>
+          <a:p>
+            <a:r>
+              <a:rPr lang="zh-CN" dirty="0"/>
+              <a:t/>
+            </a:r>
+          </a:p>
+          <a:p>
+            <a:r>
+              <a:rPr lang="zh-CN" dirty="0"/>
+              <a:t>本节目标：理解「列表按位置找、字典按名字找」，掌握键值对增删改</a:t>
+            </a:r>
+          </a:p>
+          <a:p>
+            <a:r>
+              <a:rPr lang="zh-CN" dirty="0"/>
+              <a:t/>
+            </a:r>
+          </a:p>
+          <a:p>
+            <a:r>
+              <a:rPr lang="zh-CN" dirty="0"/>
+              <a:t>看不到懂的地方，回讲义对应小节读一遍，再回来对着这页复述一次——能讲出来才算真懂。</a:t>
+            </a:r>
+          </a:p>
+        </p:txBody>
+      </p:sp>
+    </p:spTree>
+  </p:cSld>
+  <p:clrMapOvr>
+    <a:masterClrMapping/>
+  </p:clrMapOvr>
+</p:notes>
+</file>
+
+<file path=ppt/notesSlides/notesSlide4.xml><?xml version="1.0" encoding="utf-8"?>
+<p:notes xmlns:a="http://schemas.openxmlformats.org/drawingml/2006/main" xmlns:p="http://schemas.openxmlformats.org/presentationml/2006/main" xmlns:r="http://schemas.openxmlformats.org/officeDocument/2006/relationships">
+  <p:cSld>
+    <p:spTree>
+      <p:nvGrpSpPr>
+        <p:cNvPr id="1" name=""/>
+        <p:cNvGrpSpPr/>
+        <p:nvPr/>
+      </p:nvGrpSpPr>
+      <p:grpSpPr>
+        <a:xfrm>
+          <a:off x="0" y="0"/>
+          <a:ext cx="0" cy="0"/>
+          <a:chOff x="0" y="0"/>
+          <a:chExt cx="0" cy="0"/>
+        </a:xfrm>
+      </p:grpSpPr>
+      <p:sp>
+        <p:nvSpPr>
+          <p:cNvPr id="2" name="讲课提示"/>
+          <p:cNvSpPr txBox="1"/>
+          <p:nvPr/>
+        </p:nvSpPr>
+        <p:spPr>
+          <a:xfrm>
+            <a:off x="457200" y="457200"/>
+            <a:ext cx="6858000" cy="4800600"/>
+          </a:xfrm>
+          <a:prstGeom prst="rect">
+            <a:avLst/>
+          </a:prstGeom>
+        </p:spPr>
+        <p:txBody>
+          <a:bodyPr wrap="square"/>
+          <a:lstStyle/>
+          <a:p>
+            <a:r>
+              <a:rPr lang="zh-CN" dirty="0"/>
+              <a:t>第 24 节 · 三种遍历与 get() 安全取值</a:t>
+            </a:r>
+          </a:p>
+          <a:p>
+            <a:r>
+              <a:rPr lang="zh-CN" dirty="0"/>
+              <a:t>单元 5 · 字典 · W5</a:t>
+            </a:r>
+          </a:p>
+          <a:p>
+            <a:r>
+              <a:rPr lang="zh-CN" dirty="0"/>
+              <a:t/>
+            </a:r>
+          </a:p>
+          <a:p>
+            <a:r>
+              <a:rPr lang="zh-CN" dirty="0"/>
+              <a:t>学习目标：掌握 items / keys / values 三种遍历，知道 get() 为什么不崩</a:t>
+            </a:r>
+          </a:p>
+          <a:p>
+            <a:r>
+              <a:rPr lang="zh-CN" dirty="0"/>
+              <a:t/>
+            </a:r>
+          </a:p>
+          <a:p>
+            <a:r>
+              <a:rPr lang="zh-CN" dirty="0"/>
+              <a:t>课堂实操（40 分钟，不看答案）：</a:t>
+            </a:r>
+          </a:p>
+          <a:p>
+            <a:r>
+              <a:rPr lang="zh-CN" dirty="0"/>
+              <a:t>· 对同一字典用三种方式遍历并比较输出</a:t>
+            </a:r>
+          </a:p>
+          <a:p>
+            <a:r>
+              <a:rPr lang="zh-CN" dirty="0"/>
+              <a:t>· 故意用 [] 取不存在的键看 KeyError</a:t>
+            </a:r>
+          </a:p>
+          <a:p>
+            <a:r>
+              <a:rPr lang="zh-CN" dirty="0"/>
+              <a:t/>
+            </a:r>
+          </a:p>
+          <a:p>
+            <a:r>
+              <a:rPr lang="zh-CN" dirty="0"/>
+              <a:t>课后作业：</a:t>
+            </a:r>
+          </a:p>
+          <a:p>
+            <a:r>
+              <a:rPr lang="zh-CN" dirty="0"/>
+              <a:t>· 完成动手练习 5-4 ~ 5-6</a:t>
+            </a:r>
+          </a:p>
+          <a:p>
+            <a:r>
+              <a:rPr lang="zh-CN" dirty="0"/>
+              <a:t/>
+            </a:r>
+          </a:p>
+          <a:p>
+            <a:r>
+              <a:rPr lang="zh-CN" dirty="0"/>
+              <a:t>节奏：讲 20 分钟 → 学员自己敲 40 分钟（不看答案）→ 对讲评自查 20 分钟 → 写作业 10 分钟。</a:t>
+            </a:r>
+          </a:p>
+        </p:txBody>
+      </p:sp>
+    </p:spTree>
+  </p:cSld>
+  <p:clrMapOvr>
+    <a:masterClrMapping/>
+  </p:clrMapOvr>
+</p:notes>
+</file>
+
+<file path=ppt/notesSlides/notesSlide5.xml><?xml version="1.0" encoding="utf-8"?>
+<p:notes xmlns:a="http://schemas.openxmlformats.org/drawingml/2006/main" xmlns:p="http://schemas.openxmlformats.org/presentationml/2006/main" xmlns:r="http://schemas.openxmlformats.org/officeDocument/2006/relationships">
+  <p:cSld>
+    <p:spTree>
+      <p:nvGrpSpPr>
+        <p:cNvPr id="1" name=""/>
+        <p:cNvGrpSpPr/>
+        <p:nvPr/>
+      </p:nvGrpSpPr>
+      <p:grpSpPr>
+        <a:xfrm>
+          <a:off x="0" y="0"/>
+          <a:ext cx="0" cy="0"/>
+          <a:chOff x="0" y="0"/>
+          <a:chExt cx="0" cy="0"/>
+        </a:xfrm>
+      </p:grpSpPr>
+      <p:sp>
+        <p:nvSpPr>
+          <p:cNvPr id="2" name="讲课提示"/>
+          <p:cNvSpPr txBox="1"/>
+          <p:nvPr/>
+        </p:nvSpPr>
+        <p:spPr>
+          <a:xfrm>
+            <a:off x="457200" y="457200"/>
+            <a:ext cx="6858000" cy="4800600"/>
+          </a:xfrm>
+          <a:prstGeom prst="rect">
+            <a:avLst/>
+          </a:prstGeom>
+        </p:spPr>
+        <p:txBody>
+          <a:bodyPr wrap="square"/>
+          <a:lstStyle/>
+          <a:p>
+            <a:r>
+              <a:rPr lang="zh-CN" dirty="0"/>
+              <a:t>第 24 节 · 核心知识点：三种遍历与 get() 安全取值</a:t>
+            </a:r>
+          </a:p>
+          <a:p>
+            <a:r>
+              <a:rPr lang="zh-CN" dirty="0"/>
+              <a:t/>
+            </a:r>
+          </a:p>
+          <a:p>
+            <a:r>
+              <a:rPr lang="zh-CN" dirty="0"/>
+              <a:t>讲这一页时：先让学生说出上节课的结论，再逐块讲要点。</a:t>
+            </a:r>
+          </a:p>
+          <a:p>
+            <a:r>
+              <a:rPr lang="zh-CN" dirty="0"/>
+              <a:t>每讲完一块，问一句「这一步如果写错了，报错会长什么样？」——把错误提前讲。</a:t>
+            </a:r>
+          </a:p>
+          <a:p>
+            <a:r>
+              <a:rPr lang="zh-CN" dirty="0"/>
+              <a:t/>
+            </a:r>
+          </a:p>
+          <a:p>
+            <a:r>
+              <a:rPr lang="zh-CN" dirty="0"/>
+              <a:t>本节目标：掌握 items / keys / values 三种遍历，知道 get() 为什么不崩</a:t>
+            </a:r>
+          </a:p>
+          <a:p>
+            <a:r>
+              <a:rPr lang="zh-CN" dirty="0"/>
+              <a:t/>
+            </a:r>
+          </a:p>
+          <a:p>
+            <a:r>
+              <a:rPr lang="zh-CN" dirty="0"/>
+              <a:t>看不到懂的地方，回讲义对应小节读一遍，再回来对着这页复述一次——能讲出来才算真懂。</a:t>
+            </a:r>
+          </a:p>
+        </p:txBody>
+      </p:sp>
+    </p:spTree>
+  </p:cSld>
+  <p:clrMapOvr>
+    <a:masterClrMapping/>
+  </p:clrMapOvr>
+</p:notes>
+</file>
+
+<file path=ppt/notesSlides/notesSlide6.xml><?xml version="1.0" encoding="utf-8"?>
+<p:notes xmlns:a="http://schemas.openxmlformats.org/drawingml/2006/main" xmlns:p="http://schemas.openxmlformats.org/presentationml/2006/main" xmlns:r="http://schemas.openxmlformats.org/officeDocument/2006/relationships">
+  <p:cSld>
+    <p:spTree>
+      <p:nvGrpSpPr>
+        <p:cNvPr id="1" name=""/>
+        <p:cNvGrpSpPr/>
+        <p:nvPr/>
+      </p:nvGrpSpPr>
+      <p:grpSpPr>
+        <a:xfrm>
+          <a:off x="0" y="0"/>
+          <a:ext cx="0" cy="0"/>
+          <a:chOff x="0" y="0"/>
+          <a:chExt cx="0" cy="0"/>
+        </a:xfrm>
+      </p:grpSpPr>
+      <p:sp>
+        <p:nvSpPr>
+          <p:cNvPr id="2" name="讲课提示"/>
+          <p:cNvSpPr txBox="1"/>
+          <p:nvPr/>
+        </p:nvSpPr>
+        <p:spPr>
+          <a:xfrm>
+            <a:off x="457200" y="457200"/>
+            <a:ext cx="6858000" cy="4800600"/>
+          </a:xfrm>
+          <a:prstGeom prst="rect">
+            <a:avLst/>
+          </a:prstGeom>
+        </p:spPr>
+        <p:txBody>
+          <a:bodyPr wrap="square"/>
+          <a:lstStyle/>
+          <a:p>
+            <a:r>
+              <a:rPr lang="zh-CN" dirty="0"/>
+              <a:t>第 25 节 · 遍历时修改与嵌套结构</a:t>
+            </a:r>
+          </a:p>
+          <a:p>
+            <a:r>
+              <a:rPr lang="zh-CN" dirty="0"/>
+              <a:t>单元 5 · 字典 · W5</a:t>
+            </a:r>
+          </a:p>
+          <a:p>
+            <a:r>
+              <a:rPr lang="zh-CN" dirty="0"/>
+              <a:t/>
+            </a:r>
+          </a:p>
+          <a:p>
+            <a:r>
+              <a:rPr lang="zh-CN" dirty="0"/>
+              <a:t>学习目标：能处理嵌套结构，为后面学 JSON 打基础</a:t>
+            </a:r>
+          </a:p>
+          <a:p>
+            <a:r>
+              <a:rPr lang="zh-CN" dirty="0"/>
+              <a:t/>
+            </a:r>
+          </a:p>
+          <a:p>
+            <a:r>
+              <a:rPr lang="zh-CN" dirty="0"/>
+              <a:t>课堂实操（40 分钟，不看答案）：</a:t>
+            </a:r>
+          </a:p>
+          <a:p>
+            <a:r>
+              <a:rPr lang="zh-CN" dirty="0"/>
+              <a:t>· 现场把三层嵌套数据一层层打印出来</a:t>
+            </a:r>
+          </a:p>
+          <a:p>
+            <a:r>
+              <a:rPr lang="zh-CN" dirty="0"/>
+              <a:t>· 讨论：为什么 JSON 能被 Python 直接读</a:t>
+            </a:r>
+          </a:p>
+          <a:p>
+            <a:r>
+              <a:rPr lang="zh-CN" dirty="0"/>
+              <a:t/>
+            </a:r>
+          </a:p>
+          <a:p>
+            <a:r>
+              <a:rPr lang="zh-CN" dirty="0"/>
+              <a:t>课后作业：</a:t>
+            </a:r>
+          </a:p>
+          <a:p>
+            <a:r>
+              <a:rPr lang="zh-CN" dirty="0"/>
+              <a:t>· ★ 动手项目 6.1–6.3 生日调查</a:t>
+            </a:r>
+          </a:p>
+          <a:p>
+            <a:r>
+              <a:rPr lang="zh-CN" dirty="0"/>
+              <a:t/>
+            </a:r>
+          </a:p>
+          <a:p>
+            <a:r>
+              <a:rPr lang="zh-CN" dirty="0"/>
+              <a:t>节奏：讲 20 分钟 → 学员自己敲 40 分钟（不看答案）→ 对讲评自查 20 分钟 → 写作业 10 分钟。</a:t>
+            </a:r>
+          </a:p>
+        </p:txBody>
+      </p:sp>
+    </p:spTree>
+  </p:cSld>
+  <p:clrMapOvr>
+    <a:masterClrMapping/>
+  </p:clrMapOvr>
+</p:notes>
+</file>
+
+<file path=ppt/notesSlides/notesSlide7.xml><?xml version="1.0" encoding="utf-8"?>
+<p:notes xmlns:a="http://schemas.openxmlformats.org/drawingml/2006/main" xmlns:p="http://schemas.openxmlformats.org/presentationml/2006/main" xmlns:r="http://schemas.openxmlformats.org/officeDocument/2006/relationships">
+  <p:cSld>
+    <p:spTree>
+      <p:nvGrpSpPr>
+        <p:cNvPr id="1" name=""/>
+        <p:cNvGrpSpPr/>
+        <p:nvPr/>
+      </p:nvGrpSpPr>
+      <p:grpSpPr>
+        <a:xfrm>
+          <a:off x="0" y="0"/>
+          <a:ext cx="0" cy="0"/>
+          <a:chOff x="0" y="0"/>
+          <a:chExt cx="0" cy="0"/>
+        </a:xfrm>
+      </p:grpSpPr>
+      <p:sp>
+        <p:nvSpPr>
+          <p:cNvPr id="2" name="讲课提示"/>
+          <p:cNvSpPr txBox="1"/>
+          <p:nvPr/>
+        </p:nvSpPr>
+        <p:spPr>
+          <a:xfrm>
+            <a:off x="457200" y="457200"/>
+            <a:ext cx="6858000" cy="4800600"/>
+          </a:xfrm>
+          <a:prstGeom prst="rect">
+            <a:avLst/>
+          </a:prstGeom>
+        </p:spPr>
+        <p:txBody>
+          <a:bodyPr wrap="square"/>
+          <a:lstStyle/>
+          <a:p>
+            <a:r>
+              <a:rPr lang="zh-CN" dirty="0"/>
+              <a:t>第 25 节 · 核心知识点：遍历时修改与嵌套结构</a:t>
+            </a:r>
+          </a:p>
+          <a:p>
+            <a:r>
+              <a:rPr lang="zh-CN" dirty="0"/>
+              <a:t/>
+            </a:r>
+          </a:p>
+          <a:p>
+            <a:r>
+              <a:rPr lang="zh-CN" dirty="0"/>
+              <a:t>讲这一页时：先让学生说出上节课的结论，再逐块讲要点。</a:t>
+            </a:r>
+          </a:p>
+          <a:p>
+            <a:r>
+              <a:rPr lang="zh-CN" dirty="0"/>
+              <a:t>每讲完一块，问一句「这一步如果写错了，报错会长什么样？」——把错误提前讲。</a:t>
+            </a:r>
+          </a:p>
+          <a:p>
+            <a:r>
+              <a:rPr lang="zh-CN" dirty="0"/>
+              <a:t/>
+            </a:r>
+          </a:p>
+          <a:p>
+            <a:r>
+              <a:rPr lang="zh-CN" dirty="0"/>
+              <a:t>本节目标：能处理嵌套结构，为后面学 JSON 打基础</a:t>
+            </a:r>
+          </a:p>
+          <a:p>
+            <a:r>
+              <a:rPr lang="zh-CN" dirty="0"/>
+              <a:t/>
+            </a:r>
+          </a:p>
+          <a:p>
+            <a:r>
+              <a:rPr lang="zh-CN" dirty="0"/>
+              <a:t>看不到懂的地方，回讲义对应小节读一遍，再回来对着这页复述一次——能讲出来才算真懂。</a:t>
+            </a:r>
+          </a:p>
+        </p:txBody>
+      </p:sp>
+    </p:spTree>
+  </p:cSld>
+  <p:clrMapOvr>
+    <a:masterClrMapping/>
+  </p:clrMapOvr>
+</p:notes>
+</file>
+
+<file path=ppt/notesSlides/notesSlide8.xml><?xml version="1.0" encoding="utf-8"?>
+<p:notes xmlns:a="http://schemas.openxmlformats.org/drawingml/2006/main" xmlns:p="http://schemas.openxmlformats.org/presentationml/2006/main" xmlns:r="http://schemas.openxmlformats.org/officeDocument/2006/relationships">
+  <p:cSld>
+    <p:spTree>
+      <p:nvGrpSpPr>
+        <p:cNvPr id="1" name=""/>
+        <p:cNvGrpSpPr/>
+        <p:nvPr/>
+      </p:nvGrpSpPr>
+      <p:grpSpPr>
+        <a:xfrm>
+          <a:off x="0" y="0"/>
+          <a:ext cx="0" cy="0"/>
+          <a:chOff x="0" y="0"/>
+          <a:chExt cx="0" cy="0"/>
+        </a:xfrm>
+      </p:grpSpPr>
+      <p:sp>
+        <p:nvSpPr>
+          <p:cNvPr id="2" name="讲课提示"/>
+          <p:cNvSpPr txBox="1"/>
+          <p:nvPr/>
+        </p:nvSpPr>
+        <p:spPr>
+          <a:xfrm>
+            <a:off x="457200" y="457200"/>
+            <a:ext cx="6858000" cy="4800600"/>
+          </a:xfrm>
+          <a:prstGeom prst="rect">
+            <a:avLst/>
+          </a:prstGeom>
+        </p:spPr>
+        <p:txBody>
+          <a:bodyPr wrap="square"/>
+          <a:lstStyle/>
+          <a:p>
+            <a:r>
+              <a:rPr lang="zh-CN" dirty="0"/>
+              <a:t>第 26 节 · 动手实战与答案讲评</a:t>
+            </a:r>
+          </a:p>
+          <a:p>
+            <a:r>
+              <a:rPr lang="zh-CN" dirty="0"/>
+              <a:t>单元 5 · 字典 · W5</a:t>
+            </a:r>
+          </a:p>
+          <a:p>
+            <a:r>
+              <a:rPr lang="zh-CN" dirty="0"/>
+              <a:t/>
+            </a:r>
+          </a:p>
+          <a:p>
+            <a:r>
+              <a:rPr lang="zh-CN" dirty="0"/>
+              <a:t>学习目标：独立完成单元 5 练习，能熟练遍历嵌套数据</a:t>
+            </a:r>
+          </a:p>
+          <a:p>
+            <a:r>
+              <a:rPr lang="zh-CN" dirty="0"/>
+              <a:t/>
+            </a:r>
+          </a:p>
+          <a:p>
+            <a:r>
+              <a:rPr lang="zh-CN" dirty="0"/>
+              <a:t>课堂实操（40 分钟，不看答案）：</a:t>
+            </a:r>
+          </a:p>
+          <a:p>
+            <a:r>
+              <a:rPr lang="zh-CN" dirty="0"/>
+              <a:t>· 限时 30 分钟独立完成基础档</a:t>
+            </a:r>
+          </a:p>
+          <a:p>
+            <a:r>
+              <a:rPr lang="zh-CN" dirty="0"/>
+              <a:t>· 逐题对照答案讲评</a:t>
+            </a:r>
+          </a:p>
+          <a:p>
+            <a:r>
+              <a:rPr lang="zh-CN" dirty="0"/>
+              <a:t/>
+            </a:r>
+          </a:p>
+          <a:p>
+            <a:r>
+              <a:rPr lang="zh-CN" dirty="0"/>
+              <a:t>课后作业：</a:t>
+            </a:r>
+          </a:p>
+          <a:p>
+            <a:r>
+              <a:rPr lang="zh-CN" dirty="0"/>
+              <a:t>· 产出：三种嵌套结构各一组</a:t>
+            </a:r>
+          </a:p>
+          <a:p>
+            <a:r>
+              <a:rPr lang="zh-CN" dirty="0"/>
+              <a:t/>
+            </a:r>
+          </a:p>
+          <a:p>
+            <a:r>
+              <a:rPr lang="zh-CN" dirty="0"/>
+              <a:t>节奏：讲 20 分钟 → 学员自己敲 40 分钟（不看答案）→ 对讲评自查 20 分钟 → 写作业 10 分钟。</a:t>
+            </a:r>
+          </a:p>
+        </p:txBody>
+      </p:sp>
+    </p:spTree>
+  </p:cSld>
+  <p:clrMapOvr>
+    <a:masterClrMapping/>
+  </p:clrMapOvr>
+</p:notes>
+</file>
+
+<file path=ppt/notesSlides/notesSlide9.xml><?xml version="1.0" encoding="utf-8"?>
+<p:notes xmlns:a="http://schemas.openxmlformats.org/drawingml/2006/main" xmlns:p="http://schemas.openxmlformats.org/presentationml/2006/main" xmlns:r="http://schemas.openxmlformats.org/officeDocument/2006/relationships">
+  <p:cSld>
+    <p:spTree>
+      <p:nvGrpSpPr>
+        <p:cNvPr id="1" name=""/>
+        <p:cNvGrpSpPr/>
+        <p:nvPr/>
+      </p:nvGrpSpPr>
+      <p:grpSpPr>
+        <a:xfrm>
+          <a:off x="0" y="0"/>
+          <a:ext cx="0" cy="0"/>
+          <a:chOff x="0" y="0"/>
+          <a:chExt cx="0" cy="0"/>
+        </a:xfrm>
+      </p:grpSpPr>
+      <p:sp>
+        <p:nvSpPr>
+          <p:cNvPr id="2" name="讲课提示"/>
+          <p:cNvSpPr txBox="1"/>
+          <p:nvPr/>
+        </p:nvSpPr>
+        <p:spPr>
+          <a:xfrm>
+            <a:off x="457200" y="457200"/>
+            <a:ext cx="6858000" cy="4800600"/>
+          </a:xfrm>
+          <a:prstGeom prst="rect">
+            <a:avLst/>
+          </a:prstGeom>
+        </p:spPr>
+        <p:txBody>
+          <a:bodyPr wrap="square"/>
+          <a:lstStyle/>
+          <a:p>
+            <a:r>
+              <a:rPr lang="zh-CN" dirty="0"/>
+              <a:t>第 26 节 · 核心知识点：动手实战与答案讲评</a:t>
+            </a:r>
+          </a:p>
+          <a:p>
+            <a:r>
+              <a:rPr lang="zh-CN" dirty="0"/>
+              <a:t/>
+            </a:r>
+          </a:p>
+          <a:p>
+            <a:r>
+              <a:rPr lang="zh-CN" dirty="0"/>
+              <a:t>讲这一页时：先让学生说出上节课的结论，再逐块讲要点。</a:t>
+            </a:r>
+          </a:p>
+          <a:p>
+            <a:r>
+              <a:rPr lang="zh-CN" dirty="0"/>
+              <a:t>每讲完一块，问一句「这一步如果写错了，报错会长什么样？」——把错误提前讲。</a:t>
+            </a:r>
+          </a:p>
+          <a:p>
+            <a:r>
+              <a:rPr lang="zh-CN" dirty="0"/>
+              <a:t/>
+            </a:r>
+          </a:p>
+          <a:p>
+            <a:r>
+              <a:rPr lang="zh-CN" dirty="0"/>
+              <a:t>本节目标：独立完成单元 5 练习，能熟练遍历嵌套数据</a:t>
+            </a:r>
+          </a:p>
+          <a:p>
+            <a:r>
+              <a:rPr lang="zh-CN" dirty="0"/>
+              <a:t/>
+            </a:r>
+          </a:p>
+          <a:p>
+            <a:r>
+              <a:rPr lang="zh-CN" dirty="0"/>
+              <a:t>看不到懂的地方，回讲义对应小节读一遍，再回来对着这页复述一次——能讲出来才算真懂。</a:t>
+            </a:r>
+          </a:p>
+        </p:txBody>
+      </p:sp>
+    </p:spTree>
+  </p:cSld>
+  <p:clrMapOvr>
+    <a:masterClrMapping/>
+  </p:clrMapOvr>
+</p:notes>
 </file>
 
 <file path=ppt/slideLayouts/slideLayout1.xml><?xml version="1.0" encoding="utf-8"?>
